--- a/docs/commercial/zimam-pricing-deck.pptx
+++ b/docs/commercial/zimam-pricing-deck.pptx
@@ -20,9 +20,12 @@
     <p:sldId id="268" r:id="rId14"/>
     <p:sldId id="269" r:id="rId15"/>
     <p:sldId id="270" r:id="rId16"/>
+    <p:sldId id="271" r:id="rId17"/>
+    <p:sldId id="272" r:id="rId18"/>
+    <p:sldId id="273" r:id="rId19"/>
   </p:sldIdLst>
   <p:notesMasterIdLst>
-    <p:notesMasterId r:id="rId17"/>
+    <p:notesMasterId r:id="rId20"/>
   </p:notesMasterIdLst>
   <p:sldSz cx="12192000" cy="6858000"/>
   <p:notesSz cx="6858000" cy="12192000"/>
@@ -121,43 +124,50 @@
   <p:extLst>
     <p:ext uri="{521415D9-36F7-43E2-AB2F-B90AF26B5E84}">
       <p14:sectionLst xmlns:p14="http://schemas.microsoft.com/office/powerpoint/2010/main">
-        <p14:section name="Summary" id="{f6e35c0c-e7e6-5fb9-a244-2ff06f48bbff}">
+        <p14:section name="Summary" id="{bde85c6d-e80a-591e-d124-15cbc631a1ac}">
           <p14:sldIdLst>
             <p14:sldId id="256"/>
             <p14:sldId id="257"/>
           </p14:sldIdLst>
         </p14:section>
-        <p14:section name="Offer and market" id="{c67877d7-4a68-bbec-0230-62b30213128f}">
+        <p14:section name="Offer and market" id="{807e39bf-c1d2-0659-6a2c-90b379f4957d}">
           <p14:sldIdLst>
             <p14:sldId id="258"/>
             <p14:sldId id="259"/>
             <p14:sldId id="260"/>
           </p14:sldIdLst>
         </p14:section>
-        <p14:section name="Price book" id="{fc52d5b2-7213-033e-50ed-00b90c669f50}">
+        <p14:section name="Price book" id="{bf89bff4-cc2b-c5d9-9182-e008239aa0fe}">
           <p14:sldIdLst>
             <p14:sldId id="261"/>
             <p14:sldId id="262"/>
             <p14:sldId id="263"/>
           </p14:sldIdLst>
         </p14:section>
-        <p14:section name="Costs" id="{85f48c09-738e-56b9-fa1a-54de4b727a6b}">
+        <p14:section name="Costs" id="{127fdc36-8065-404d-3cb3-71f08913daa7}">
           <p14:sldIdLst>
             <p14:sldId id="264"/>
             <p14:sldId id="265"/>
           </p14:sldIdLst>
         </p14:section>
-        <p14:section name="Economics" id="{38e13497-7e82-8bd7-6f2f-c38cdba321cc}">
+        <p14:section name="Economics" id="{a38aa2fd-51a8-e7ec-7c97-72ba2ab270f0}">
           <p14:sldIdLst>
             <p14:sldId id="266"/>
             <p14:sldId id="267"/>
             <p14:sldId id="268"/>
           </p14:sldIdLst>
         </p14:section>
-        <p14:section name="Decisions" id="{b80a098c-44ba-4890-c7c1-e8a557ca2137}">
+        <p14:section name="AI" id="{6701a89b-3e13-5b8c-f08b-e123920ccb27}">
           <p14:sldIdLst>
             <p14:sldId id="269"/>
             <p14:sldId id="270"/>
+            <p14:sldId id="271"/>
+          </p14:sldIdLst>
+        </p14:section>
+        <p14:section name="Decisions" id="{8824e28e-c912-b788-cec5-4deecad7f449}">
+          <p14:sldIdLst>
+            <p14:sldId id="272"/>
+            <p14:sldId id="273"/>
           </p14:sldIdLst>
         </p14:section>
       </p14:sectionLst>
@@ -2076,6 +2086,361 @@
 </c:chartSpace>
 </file>
 
+<file path=ppt/charts/chart6.xml><?xml version="1.0" encoding="utf-8"?>
+<c:chartSpace xmlns:c="http://schemas.openxmlformats.org/drawingml/2006/chart" xmlns:a="http://schemas.openxmlformats.org/drawingml/2006/main" xmlns:r="http://schemas.openxmlformats.org/officeDocument/2006/relationships">
+  <c:date1904 val="0"/>
+  <c:roundedCorners val="1"/>
+  <c:chart>
+    <c:title>
+      <c:tx>
+        <c:rich>
+          <a:bodyPr/>
+          <a:lstStyle/>
+          <a:p>
+            <a:pPr>
+              <a:defRPr sz="1400" b="0" i="0" u="none" strike="noStrike">
+                <a:solidFill>
+                  <a:srgbClr val="0B3D2E"/>
+                </a:solidFill>
+                <a:latin typeface="+mn-lt"/>
+              </a:defRPr>
+            </a:pPr>
+            <a:r>
+              <a:rPr sz="1400" b="0" i="0" u="none" strike="noStrike">
+                <a:solidFill>
+                  <a:srgbClr val="0B3D2E"/>
+                </a:solidFill>
+                <a:latin typeface="+mn-lt"/>
+              </a:rPr>
+              <a:t>Infrastructure gross margin by AI add-on</a:t>
+            </a:r>
+          </a:p>
+        </c:rich>
+      </c:tx>
+      <c:layout/>
+      <c:overlay val="0"/>
+    </c:title>
+    <c:autoTitleDeleted val="0"/>
+    <c:plotArea>
+      <c:layout/>
+      <c:barChart>
+        <c:barDir val="bar"/>
+        <c:grouping val="clustered"/>
+        <c:varyColors val="0"/>
+        <c:ser>
+          <c:idx val="0"/>
+          <c:order val="0"/>
+          <c:tx>
+            <c:strRef>
+              <c:f>Sheet1!$B$1</c:f>
+              <c:strCache>
+                <c:ptCount val="1"/>
+                <c:pt idx="0">
+                  <c:v>Gross margin</c:v>
+                </c:pt>
+              </c:strCache>
+            </c:strRef>
+          </c:tx>
+          <c:spPr>
+            <a:solidFill>
+              <a:srgbClr val="0C6A4E"/>
+            </a:solidFill>
+            <a:effectLst/>
+          </c:spPr>
+          <c:invertIfNegative val="0"/>
+          <c:dLbls>
+            <c:numFmt formatCode="0%" sourceLinked="0"/>
+            <c:txPr>
+              <a:bodyPr/>
+              <a:lstStyle/>
+              <a:p>
+                <a:pPr>
+                  <a:defRPr b="0" i="0" strike="noStrike" sz="1200" u="none">
+                    <a:solidFill>
+                      <a:srgbClr val="16201B"/>
+                    </a:solidFill>
+                    <a:latin typeface="+mn-lt"/>
+                  </a:defRPr>
+                </a:pPr>
+              </a:p>
+            </c:txPr>
+            <c:showLegendKey val="0"/>
+            <c:showVal val="1"/>
+            <c:showCatName val="0"/>
+            <c:showSerName val="0"/>
+            <c:showPercent val="0"/>
+            <c:showBubbleSize val="0"/>
+            <c:showLeaderLines val="0"/>
+          </c:dLbls>
+          <c:dPt>
+            <c:idx val="0"/>
+            <c:invertIfNegative val="0"/>
+            <c:bubble3D val="0"/>
+            <c:spPr>
+              <a:solidFill>
+                <a:srgbClr val="0C6A4E"/>
+              </a:solidFill>
+              <a:effectLst/>
+            </c:spPr>
+          </c:dPt>
+          <c:dPt>
+            <c:idx val="1"/>
+            <c:invertIfNegative val="0"/>
+            <c:bubble3D val="0"/>
+            <c:spPr>
+              <a:solidFill>
+                <a:srgbClr val="0C6A4E"/>
+              </a:solidFill>
+              <a:effectLst/>
+            </c:spPr>
+          </c:dPt>
+          <c:dPt>
+            <c:idx val="2"/>
+            <c:invertIfNegative val="0"/>
+            <c:bubble3D val="0"/>
+            <c:spPr>
+              <a:solidFill>
+                <a:srgbClr val="0C6A4E"/>
+              </a:solidFill>
+              <a:effectLst/>
+            </c:spPr>
+          </c:dPt>
+          <c:dPt>
+            <c:idx val="3"/>
+            <c:invertIfNegative val="0"/>
+            <c:bubble3D val="0"/>
+            <c:spPr>
+              <a:solidFill>
+                <a:srgbClr val="0B3D2E"/>
+              </a:solidFill>
+              <a:effectLst/>
+            </c:spPr>
+          </c:dPt>
+          <c:dPt>
+            <c:idx val="4"/>
+            <c:invertIfNegative val="0"/>
+            <c:bubble3D val="0"/>
+            <c:spPr>
+              <a:solidFill>
+                <a:srgbClr val="B26B00"/>
+              </a:solidFill>
+              <a:effectLst/>
+            </c:spPr>
+          </c:dPt>
+          <c:dPt>
+            <c:idx val="5"/>
+            <c:invertIfNegative val="0"/>
+            <c:bubble3D val="0"/>
+            <c:spPr>
+              <a:solidFill>
+                <a:srgbClr val="7A3E9D"/>
+              </a:solidFill>
+              <a:effectLst/>
+            </c:spPr>
+          </c:dPt>
+          <c:cat>
+            <c:multiLvlStrRef>
+              <c:f>Sheet1!$A$2:$A$7</c:f>
+              <c:multiLvlStrCache>
+                <c:ptCount val="6"/>
+                <c:lvl>
+                  <c:pt idx="0">
+                    <c:v>Protect, Starter 10k</c:v>
+                  </c:pt>
+                  <c:pt idx="1">
+                    <c:v>Protect, Business S</c:v>
+                  </c:pt>
+                  <c:pt idx="2">
+                    <c:v>Protect, Business L</c:v>
+                  </c:pt>
+                  <c:pt idx="3">
+                    <c:v>Protect, Enterprise S</c:v>
+                  </c:pt>
+                  <c:pt idx="4">
+                    <c:v>Assist, extra 100 requests</c:v>
+                  </c:pt>
+                  <c:pt idx="5">
+                    <c:v>Agent Pack</c:v>
+                  </c:pt>
+                </c:lvl>
+              </c:multiLvlStrCache>
+            </c:multiLvlStrRef>
+          </c:cat>
+          <c:val>
+            <c:numRef>
+              <c:f>Sheet1!$B$2:$B$7</c:f>
+              <c:numCache>
+                <c:formatCode>General</c:formatCode>
+                <c:ptCount val="6"/>
+                <c:pt idx="0">
+                  <c:v>0.93</c:v>
+                </c:pt>
+                <c:pt idx="1">
+                  <c:v>0.96</c:v>
+                </c:pt>
+                <c:pt idx="2">
+                  <c:v>0.96</c:v>
+                </c:pt>
+                <c:pt idx="3">
+                  <c:v>0.61</c:v>
+                </c:pt>
+                <c:pt idx="4">
+                  <c:v>0.63</c:v>
+                </c:pt>
+                <c:pt idx="5">
+                  <c:v>0.98</c:v>
+                </c:pt>
+              </c:numCache>
+            </c:numRef>
+          </c:val>
+        </c:ser>
+        <c:dLbls>
+          <c:numFmt formatCode="0%" sourceLinked="0"/>
+          <c:txPr>
+            <a:bodyPr/>
+            <a:lstStyle/>
+            <a:p>
+              <a:pPr>
+                <a:defRPr b="0" i="0" strike="noStrike" sz="1200" u="none">
+                  <a:solidFill>
+                    <a:srgbClr val="16201B"/>
+                  </a:solidFill>
+                  <a:latin typeface="+mn-lt"/>
+                </a:defRPr>
+              </a:pPr>
+            </a:p>
+          </c:txPr>
+          <c:showLegendKey val="0"/>
+          <c:showVal val="1"/>
+          <c:showCatName val="0"/>
+          <c:showSerName val="0"/>
+          <c:showPercent val="0"/>
+          <c:showBubbleSize val="0"/>
+          <c:showLeaderLines val="0"/>
+        </c:dLbls>
+        <c:gapWidth val="150"/>
+        <c:overlap val="0"/>
+        <c:axId val="2094734554"/>
+        <c:axId val="2094734552"/>
+        <c:axId val="2094734556"/>
+      </c:barChart>
+      <c:catAx>
+        <c:axId val="2094734554"/>
+        <c:scaling>
+          <c:orientation val="maxMin"/>
+        </c:scaling>
+        <c:delete val="0"/>
+        <c:axPos val="l"/>
+        <c:numFmt formatCode="General" sourceLinked="1"/>
+        <c:majorTickMark val="out"/>
+        <c:minorTickMark val="none"/>
+        <c:tickLblPos val="nextTo"/>
+        <c:spPr>
+          <a:ln w="12700" cap="flat">
+            <a:solidFill>
+              <a:srgbClr val="888888"/>
+            </a:solidFill>
+            <a:prstDash val="solid"/>
+            <a:round/>
+          </a:ln>
+        </c:spPr>
+        <c:txPr>
+          <a:bodyPr/>
+          <a:lstStyle/>
+          <a:p>
+            <a:pPr>
+              <a:defRPr sz="1200" b="0" i="0" u="none" strike="noStrike">
+                <a:solidFill>
+                  <a:srgbClr val="56645C"/>
+                </a:solidFill>
+                <a:latin typeface="+mn-lt"/>
+              </a:defRPr>
+            </a:pPr>
+            <a:endParaRPr lang="en-US"/>
+          </a:p>
+        </c:txPr>
+        <c:crossAx val="2094734552"/>
+        <c:crosses val="autoZero"/>
+        <c:auto val="1"/>
+        <c:lblAlgn val="ctr"/>
+        <c:noMultiLvlLbl val="1"/>
+      </c:catAx>
+      <c:valAx>
+        <c:axId val="2094734552"/>
+        <c:scaling>
+          <c:orientation val="minMax"/>
+          <c:max val="1.1"/>
+          <c:min val="0"/>
+        </c:scaling>
+        <c:delete val="1"/>
+        <c:axPos val="b"/>
+        <c:majorGridlines>
+          <c:spPr>
+            <a:ln w="9525" cap="flat">
+              <a:solidFill>
+                <a:srgbClr val="E1E8E3"/>
+              </a:solidFill>
+              <a:prstDash val="solid"/>
+              <a:round/>
+            </a:ln>
+          </c:spPr>
+        </c:majorGridlines>
+        <c:numFmt formatCode="General" sourceLinked="0"/>
+        <c:majorTickMark val="out"/>
+        <c:minorTickMark val="none"/>
+        <c:tickLblPos val="low"/>
+        <c:spPr>
+          <a:ln w="12700" cap="flat">
+            <a:solidFill>
+              <a:srgbClr val="888888"/>
+            </a:solidFill>
+            <a:prstDash val="solid"/>
+            <a:round/>
+          </a:ln>
+        </c:spPr>
+        <c:txPr>
+          <a:bodyPr/>
+          <a:lstStyle/>
+          <a:p>
+            <a:pPr>
+              <a:defRPr sz="1100" b="0" i="0" u="none" strike="noStrike">
+                <a:solidFill>
+                  <a:srgbClr val="56645C"/>
+                </a:solidFill>
+                <a:latin typeface="+mn-lt"/>
+              </a:defRPr>
+            </a:pPr>
+            <a:endParaRPr lang="en-US"/>
+          </a:p>
+        </c:txPr>
+        <c:crossAx val="2094734554"/>
+        <c:crosses val="autoZero"/>
+        <c:crossBetween val="between"/>
+      </c:valAx>
+      <c:spPr>
+        <a:noFill/>
+        <a:ln>
+          <a:noFill/>
+        </a:ln>
+        <a:effectLst/>
+      </c:spPr>
+    </c:plotArea>
+    <c:plotVisOnly val="1"/>
+    <c:dispBlanksAs val="span"/>
+  </c:chart>
+  <c:spPr>
+    <a:noFill/>
+    <a:ln>
+      <a:noFill/>
+    </a:ln>
+    <a:effectLst/>
+  </c:spPr>
+  <c:externalData r:id="rId1">
+    <c:autoUpdate val="0"/>
+  </c:externalData>
+</c:chartSpace>
+</file>
+
 <file path=ppt/notesMasters/notesMaster1.xml><?xml version="1.0" encoding="utf-8"?>
 <p:notesMaster xmlns:a="http://schemas.openxmlformats.org/drawingml/2006/main" xmlns:r="http://schemas.openxmlformats.org/officeDocument/2006/relationships" xmlns:p="http://schemas.openxmlformats.org/presentationml/2006/main">
   <p:cSld>
@@ -2911,7 +3276,7 @@
           <a:p>
             <a:r>
               <a:rPr lang="en-US" dirty="0"/>
-              <a:t>Domain check (7 October 2026): zimam.com (since 2005, parked), zimam.sa and zimam.com.sa (Saudi companies), zimam.io, zimam.co, zimam.me, zimam.ai (regional AI commerce analytics), getzimam.com (Saudi COD e-commerce) and zimam.dev (open-source AI agent governance) are taken. Available: zimamid.com, zimamid.sa, zimamcloud.com, zimamcloud.sa, zimamidentity.com, usezimam.com.</a:t>
+              <a:t>Sources and dates are in docs/product/ai-strategy.md section 3 (research date 8 October 2026). Okta ITP, Ping Protect and Auth0 Bot Detection prices are sales-quoted. Oracle's Adaptive Security is the only in-Kingdom risk engine we found, and it is rule-based.</a:t>
             </a:r>
             <a:endParaRPr lang="en-US" dirty="0"/>
           </a:p>
@@ -2999,7 +3364,7 @@
           <a:p>
             <a:r>
               <a:rPr lang="en-US" dirty="0"/>
-              <a:t>Close by confirming owners and dates for the open items.</a:t>
+              <a:t>Also included at no charge: an admin MCP server (customers bring their own AI client, so no LLM cost to us and residency is their choice) and an AI login-theme generator (about SAR 0.35 per theme). Rule: an LLM never makes the allow or deny decision at login.</a:t>
             </a:r>
             <a:endParaRPr lang="en-US" dirty="0"/>
           </a:p>
@@ -3023,6 +3388,270 @@
             <a:fld id="{F7021451-1387-4CA6-816F-3879F97B5CBC}" type="slidenum">
               <a:rPr lang="en-US"/>
               <a:t>15</a:t>
+            </a:fld>
+            <a:endParaRPr lang="en-US"/>
+          </a:p>
+        </p:txBody>
+      </p:sp>
+    </p:spTree>
+    <p:extLst>
+      <p:ext uri="{BB962C8B-B14F-4D97-AF65-F5344CB8AC3E}">
+        <p14:creationId xmlns:p14="http://schemas.microsoft.com/office/powerpoint/2010/main" val="1024086991"/>
+      </p:ext>
+    </p:extLst>
+  </p:cSld>
+  <p:clrMapOvr>
+    <a:masterClrMapping/>
+  </p:clrMapOvr>
+</p:notes>
+</file>
+
+<file path=ppt/notesSlides/notesSlide16.xml><?xml version="1.0" encoding="utf-8"?>
+<p:notes xmlns:a="http://schemas.openxmlformats.org/drawingml/2006/main" xmlns:r="http://schemas.openxmlformats.org/officeDocument/2006/relationships" xmlns:p="http://schemas.openxmlformats.org/presentationml/2006/main">
+  <p:cSld>
+    <p:spTree>
+      <p:nvGrpSpPr>
+        <p:cNvPr id="1" name=""/>
+        <p:cNvGrpSpPr/>
+        <p:nvPr/>
+      </p:nvGrpSpPr>
+      <p:grpSpPr>
+        <a:xfrm>
+          <a:off x="0" y="0"/>
+          <a:ext cx="0" cy="0"/>
+          <a:chOff x="0" y="0"/>
+          <a:chExt cx="0" cy="0"/>
+        </a:xfrm>
+      </p:grpSpPr>
+      <p:sp>
+        <p:nvSpPr>
+          <p:cNvPr id="2" name="Slide Image Placeholder 1"/>
+          <p:cNvSpPr>
+            <a:spLocks noGrp="1" noRot="1" noChangeAspect="1"/>
+          </p:cNvSpPr>
+          <p:nvPr>
+            <p:ph type="sldImg"/>
+          </p:nvPr>
+        </p:nvSpPr>
+        <p:spPr/>
+      </p:sp>
+      <p:sp>
+        <p:nvSpPr>
+          <p:cNvPr id="3" name="Notes Placeholder 2"/>
+          <p:cNvSpPr>
+            <a:spLocks noGrp="1"/>
+          </p:cNvSpPr>
+          <p:nvPr>
+            <p:ph type="body" idx="1"/>
+          </p:nvPr>
+        </p:nvSpPr>
+        <p:spPr/>
+        <p:txBody>
+          <a:bodyPr/>
+          <a:lstStyle/>
+          <a:p>
+            <a:r>
+              <a:rPr lang="en-US" dirty="0"/>
+              <a:t>From cost_model.py. Starter and Business Protect costs assume 60 subscribers per pooled cell. Assist costs SAR 0.28 a request at the OCI "Large Cohere" on-demand price, which still has to be confirmed for Command A in Riyadh. Enterprise margins include the full Assist quota of 1,000 requests.</a:t>
+            </a:r>
+            <a:endParaRPr lang="en-US" dirty="0"/>
+          </a:p>
+        </p:txBody>
+      </p:sp>
+      <p:sp>
+        <p:nvSpPr>
+          <p:cNvPr id="4" name="Slide Number Placeholder 3"/>
+          <p:cNvSpPr>
+            <a:spLocks noGrp="1"/>
+          </p:cNvSpPr>
+          <p:nvPr>
+            <p:ph type="sldNum" sz="quarter" idx="10"/>
+          </p:nvPr>
+        </p:nvSpPr>
+        <p:spPr/>
+        <p:txBody>
+          <a:bodyPr/>
+          <a:lstStyle/>
+          <a:p>
+            <a:fld id="{F7021451-1387-4CA6-816F-3879F97B5CBC}" type="slidenum">
+              <a:rPr lang="en-US"/>
+              <a:t>16</a:t>
+            </a:fld>
+            <a:endParaRPr lang="en-US"/>
+          </a:p>
+        </p:txBody>
+      </p:sp>
+    </p:spTree>
+    <p:extLst>
+      <p:ext uri="{BB962C8B-B14F-4D97-AF65-F5344CB8AC3E}">
+        <p14:creationId xmlns:p14="http://schemas.microsoft.com/office/powerpoint/2010/main" val="1024086991"/>
+      </p:ext>
+    </p:extLst>
+  </p:cSld>
+  <p:clrMapOvr>
+    <a:masterClrMapping/>
+  </p:clrMapOvr>
+</p:notes>
+</file>
+
+<file path=ppt/notesSlides/notesSlide17.xml><?xml version="1.0" encoding="utf-8"?>
+<p:notes xmlns:a="http://schemas.openxmlformats.org/drawingml/2006/main" xmlns:r="http://schemas.openxmlformats.org/officeDocument/2006/relationships" xmlns:p="http://schemas.openxmlformats.org/presentationml/2006/main">
+  <p:cSld>
+    <p:spTree>
+      <p:nvGrpSpPr>
+        <p:cNvPr id="1" name=""/>
+        <p:cNvGrpSpPr/>
+        <p:nvPr/>
+      </p:nvGrpSpPr>
+      <p:grpSpPr>
+        <a:xfrm>
+          <a:off x="0" y="0"/>
+          <a:ext cx="0" cy="0"/>
+          <a:chOff x="0" y="0"/>
+          <a:chExt cx="0" cy="0"/>
+        </a:xfrm>
+      </p:grpSpPr>
+      <p:sp>
+        <p:nvSpPr>
+          <p:cNvPr id="2" name="Slide Image Placeholder 1"/>
+          <p:cNvSpPr>
+            <a:spLocks noGrp="1" noRot="1" noChangeAspect="1"/>
+          </p:cNvSpPr>
+          <p:nvPr>
+            <p:ph type="sldImg"/>
+          </p:nvPr>
+        </p:nvSpPr>
+        <p:spPr/>
+      </p:sp>
+      <p:sp>
+        <p:nvSpPr>
+          <p:cNvPr id="3" name="Notes Placeholder 2"/>
+          <p:cNvSpPr>
+            <a:spLocks noGrp="1"/>
+          </p:cNvSpPr>
+          <p:nvPr>
+            <p:ph type="body" idx="1"/>
+          </p:nvPr>
+        </p:nvSpPr>
+        <p:spPr/>
+        <p:txBody>
+          <a:bodyPr/>
+          <a:lstStyle/>
+          <a:p>
+            <a:r>
+              <a:rPr lang="en-US" dirty="0"/>
+              <a:t>Domain check (7 October 2026): zimam.com (since 2005, parked), zimam.sa and zimam.com.sa (Saudi companies), zimam.io, zimam.co, zimam.me, zimam.ai (regional AI commerce analytics), getzimam.com (Saudi COD e-commerce) and zimam.dev (open-source AI agent governance) are taken. Available: zimamid.com, zimamid.sa, zimamcloud.com, zimamcloud.sa, zimamidentity.com, usezimam.com.</a:t>
+            </a:r>
+            <a:endParaRPr lang="en-US" dirty="0"/>
+          </a:p>
+        </p:txBody>
+      </p:sp>
+      <p:sp>
+        <p:nvSpPr>
+          <p:cNvPr id="4" name="Slide Number Placeholder 3"/>
+          <p:cNvSpPr>
+            <a:spLocks noGrp="1"/>
+          </p:cNvSpPr>
+          <p:nvPr>
+            <p:ph type="sldNum" sz="quarter" idx="10"/>
+          </p:nvPr>
+        </p:nvSpPr>
+        <p:spPr/>
+        <p:txBody>
+          <a:bodyPr/>
+          <a:lstStyle/>
+          <a:p>
+            <a:fld id="{F7021451-1387-4CA6-816F-3879F97B5CBC}" type="slidenum">
+              <a:rPr lang="en-US"/>
+              <a:t>17</a:t>
+            </a:fld>
+            <a:endParaRPr lang="en-US"/>
+          </a:p>
+        </p:txBody>
+      </p:sp>
+    </p:spTree>
+    <p:extLst>
+      <p:ext uri="{BB962C8B-B14F-4D97-AF65-F5344CB8AC3E}">
+        <p14:creationId xmlns:p14="http://schemas.microsoft.com/office/powerpoint/2010/main" val="1024086991"/>
+      </p:ext>
+    </p:extLst>
+  </p:cSld>
+  <p:clrMapOvr>
+    <a:masterClrMapping/>
+  </p:clrMapOvr>
+</p:notes>
+</file>
+
+<file path=ppt/notesSlides/notesSlide18.xml><?xml version="1.0" encoding="utf-8"?>
+<p:notes xmlns:a="http://schemas.openxmlformats.org/drawingml/2006/main" xmlns:r="http://schemas.openxmlformats.org/officeDocument/2006/relationships" xmlns:p="http://schemas.openxmlformats.org/presentationml/2006/main">
+  <p:cSld>
+    <p:spTree>
+      <p:nvGrpSpPr>
+        <p:cNvPr id="1" name=""/>
+        <p:cNvGrpSpPr/>
+        <p:nvPr/>
+      </p:nvGrpSpPr>
+      <p:grpSpPr>
+        <a:xfrm>
+          <a:off x="0" y="0"/>
+          <a:ext cx="0" cy="0"/>
+          <a:chOff x="0" y="0"/>
+          <a:chExt cx="0" cy="0"/>
+        </a:xfrm>
+      </p:grpSpPr>
+      <p:sp>
+        <p:nvSpPr>
+          <p:cNvPr id="2" name="Slide Image Placeholder 1"/>
+          <p:cNvSpPr>
+            <a:spLocks noGrp="1" noRot="1" noChangeAspect="1"/>
+          </p:cNvSpPr>
+          <p:nvPr>
+            <p:ph type="sldImg"/>
+          </p:nvPr>
+        </p:nvSpPr>
+        <p:spPr/>
+      </p:sp>
+      <p:sp>
+        <p:nvSpPr>
+          <p:cNvPr id="3" name="Notes Placeholder 2"/>
+          <p:cNvSpPr>
+            <a:spLocks noGrp="1"/>
+          </p:cNvSpPr>
+          <p:nvPr>
+            <p:ph type="body" idx="1"/>
+          </p:nvPr>
+        </p:nvSpPr>
+        <p:spPr/>
+        <p:txBody>
+          <a:bodyPr/>
+          <a:lstStyle/>
+          <a:p>
+            <a:r>
+              <a:rPr lang="en-US" dirty="0"/>
+              <a:t>Close by confirming owners and dates for the open items.</a:t>
+            </a:r>
+            <a:endParaRPr lang="en-US" dirty="0"/>
+          </a:p>
+        </p:txBody>
+      </p:sp>
+      <p:sp>
+        <p:nvSpPr>
+          <p:cNvPr id="4" name="Slide Number Placeholder 3"/>
+          <p:cNvSpPr>
+            <a:spLocks noGrp="1"/>
+          </p:cNvSpPr>
+          <p:nvPr>
+            <p:ph type="sldNum" sz="quarter" idx="10"/>
+          </p:nvPr>
+        </p:nvSpPr>
+        <p:spPr/>
+        <p:txBody>
+          <a:bodyPr/>
+          <a:lstStyle/>
+          <a:p>
+            <a:fld id="{F7021451-1387-4CA6-816F-3879F97B5CBC}" type="slidenum">
+              <a:rPr lang="en-US"/>
+              <a:t>18</a:t>
             </a:fld>
             <a:endParaRPr lang="en-US"/>
           </a:p>
@@ -7090,27 +7719,2271 @@
                   <a:schemeClr val="tx2"/>
                 </a:solidFill>
               </a:rPr>
-              <a:t>Settle four items before publishing prices</a:t>
+              <a:t>Competitors charge a premium for AI, outside KSA</a:t>
             </a:r>
             <a:endParaRPr lang="en-US" sz="3400" dirty="0"/>
           </a:p>
         </p:txBody>
       </p:sp>
-      <p:sp>
-        <p:nvSpPr>
-          <p:cNvPr id="3" name="risk 1"/>
+      <p:graphicFrame>
+        <p:nvGraphicFramePr>
+          <p:cNvPr id="15" name="Table 0"/>
+          <p:cNvGraphicFramePr>
+            <a:graphicFrameLocks noGrp="1"/>
+          </p:cNvGraphicFramePr>
+          <p:nvPr>
+            <p:extLst>
+              <p:ext uri="{D42A27DB-BD31-4B8C-83A1-F6EECF244321}">
+                <p14:modId xmlns:p14="http://schemas.microsoft.com/office/powerpoint/2010/main" val="1579011935"/>
+              </p:ext>
+            </p:extLst>
+          </p:nvPr>
+        </p:nvGraphicFramePr>
+        <p:xfrm>
+          <a:off x="548640" y="1371600"/>
+          <a:ext cx="11064240" cy="914400"/>
+        </p:xfrm>
+        <a:graphic>
+          <a:graphicData uri="http://schemas.openxmlformats.org/drawingml/2006/table">
+            <a:tbl>
+              <a:tblPr/>
+              <a:tblGrid>
+                <a:gridCol w="2011680"/>
+                <a:gridCol w="3017520"/>
+                <a:gridCol w="2834640"/>
+                <a:gridCol w="3200400"/>
+              </a:tblGrid>
+              <a:tr h="438912">
+                <a:tc>
+                  <a:txBody>
+                    <a:bodyPr/>
+                    <a:lstStyle/>
+                    <a:p>
+                      <a:pPr algn="l" indent="0" marL="0">
+                        <a:buNone/>
+                      </a:pPr>
+                      <a:r>
+                        <a:rPr lang="en-US" sz="1300" b="1" dirty="0">
+                          <a:solidFill>
+                            <a:schemeClr val="bg1"/>
+                          </a:solidFill>
+                        </a:rPr>
+                        <a:t>Vendor</a:t>
+                      </a:r>
+                      <a:endParaRPr lang="en-US" sz="1300" dirty="0"/>
+                    </a:p>
+                  </a:txBody>
+                  <a:tcPr marL="109728" marR="109728" marT="36576" marB="36576" anchor="ctr">
+                    <a:lnL w="12700" cap="flat" cmpd="sng" algn="ctr">
+                      <a:solidFill>
+                        <a:srgbClr val="FFFFFF"/>
+                      </a:solidFill>
+                      <a:prstDash val="solid"/>
+                      <a:round/>
+                      <a:headEnd type="none" w="med" len="med"/>
+                      <a:tailEnd type="none" w="med" len="med"/>
+                    </a:lnL>
+                    <a:lnR w="12700" cap="flat" cmpd="sng" algn="ctr">
+                      <a:solidFill>
+                        <a:srgbClr val="FFFFFF"/>
+                      </a:solidFill>
+                      <a:prstDash val="solid"/>
+                      <a:round/>
+                      <a:headEnd type="none" w="med" len="med"/>
+                      <a:tailEnd type="none" w="med" len="med"/>
+                    </a:lnR>
+                    <a:lnT w="12700" cap="flat" cmpd="sng" algn="ctr">
+                      <a:solidFill>
+                        <a:srgbClr val="FFFFFF"/>
+                      </a:solidFill>
+                      <a:prstDash val="solid"/>
+                      <a:round/>
+                      <a:headEnd type="none" w="med" len="med"/>
+                      <a:tailEnd type="none" w="med" len="med"/>
+                    </a:lnT>
+                    <a:lnB w="12700" cap="flat" cmpd="sng" algn="ctr">
+                      <a:solidFill>
+                        <a:srgbClr val="FFFFFF"/>
+                      </a:solidFill>
+                      <a:prstDash val="solid"/>
+                      <a:round/>
+                      <a:headEnd type="none" w="med" len="med"/>
+                      <a:tailEnd type="none" w="med" len="med"/>
+                    </a:lnB>
+                    <a:solidFill>
+                      <a:schemeClr val="accent1"/>
+                    </a:solidFill>
+                  </a:tcPr>
+                </a:tc>
+                <a:tc>
+                  <a:txBody>
+                    <a:bodyPr/>
+                    <a:lstStyle/>
+                    <a:p>
+                      <a:pPr algn="l" indent="0" marL="0">
+                        <a:buNone/>
+                      </a:pPr>
+                      <a:r>
+                        <a:rPr lang="en-US" sz="1300" b="1" dirty="0">
+                          <a:solidFill>
+                            <a:schemeClr val="bg1"/>
+                          </a:solidFill>
+                        </a:rPr>
+                        <a:t>Login risk / fraud AI</a:t>
+                      </a:r>
+                      <a:endParaRPr lang="en-US" sz="1300" dirty="0"/>
+                    </a:p>
+                  </a:txBody>
+                  <a:tcPr marL="109728" marR="109728" marT="36576" marB="36576" anchor="ctr">
+                    <a:lnL w="12700" cap="flat" cmpd="sng" algn="ctr">
+                      <a:solidFill>
+                        <a:srgbClr val="FFFFFF"/>
+                      </a:solidFill>
+                      <a:prstDash val="solid"/>
+                      <a:round/>
+                      <a:headEnd type="none" w="med" len="med"/>
+                      <a:tailEnd type="none" w="med" len="med"/>
+                    </a:lnL>
+                    <a:lnR w="12700" cap="flat" cmpd="sng" algn="ctr">
+                      <a:solidFill>
+                        <a:srgbClr val="FFFFFF"/>
+                      </a:solidFill>
+                      <a:prstDash val="solid"/>
+                      <a:round/>
+                      <a:headEnd type="none" w="med" len="med"/>
+                      <a:tailEnd type="none" w="med" len="med"/>
+                    </a:lnR>
+                    <a:lnT w="12700" cap="flat" cmpd="sng" algn="ctr">
+                      <a:solidFill>
+                        <a:srgbClr val="FFFFFF"/>
+                      </a:solidFill>
+                      <a:prstDash val="solid"/>
+                      <a:round/>
+                      <a:headEnd type="none" w="med" len="med"/>
+                      <a:tailEnd type="none" w="med" len="med"/>
+                    </a:lnT>
+                    <a:lnB w="12700" cap="flat" cmpd="sng" algn="ctr">
+                      <a:solidFill>
+                        <a:srgbClr val="FFFFFF"/>
+                      </a:solidFill>
+                      <a:prstDash val="solid"/>
+                      <a:round/>
+                      <a:headEnd type="none" w="med" len="med"/>
+                      <a:tailEnd type="none" w="med" len="med"/>
+                    </a:lnB>
+                    <a:solidFill>
+                      <a:schemeClr val="accent1"/>
+                    </a:solidFill>
+                  </a:tcPr>
+                </a:tc>
+                <a:tc>
+                  <a:txBody>
+                    <a:bodyPr/>
+                    <a:lstStyle/>
+                    <a:p>
+                      <a:pPr algn="l" indent="0" marL="0">
+                        <a:buNone/>
+                      </a:pPr>
+                      <a:r>
+                        <a:rPr lang="en-US" sz="1300" b="1" dirty="0">
+                          <a:solidFill>
+                            <a:schemeClr val="bg1"/>
+                          </a:solidFill>
+                        </a:rPr>
+                        <a:t>AI agents</a:t>
+                      </a:r>
+                      <a:endParaRPr lang="en-US" sz="1300" dirty="0"/>
+                    </a:p>
+                  </a:txBody>
+                  <a:tcPr marL="109728" marR="109728" marT="36576" marB="36576" anchor="ctr">
+                    <a:lnL w="12700" cap="flat" cmpd="sng" algn="ctr">
+                      <a:solidFill>
+                        <a:srgbClr val="FFFFFF"/>
+                      </a:solidFill>
+                      <a:prstDash val="solid"/>
+                      <a:round/>
+                      <a:headEnd type="none" w="med" len="med"/>
+                      <a:tailEnd type="none" w="med" len="med"/>
+                    </a:lnL>
+                    <a:lnR w="12700" cap="flat" cmpd="sng" algn="ctr">
+                      <a:solidFill>
+                        <a:srgbClr val="FFFFFF"/>
+                      </a:solidFill>
+                      <a:prstDash val="solid"/>
+                      <a:round/>
+                      <a:headEnd type="none" w="med" len="med"/>
+                      <a:tailEnd type="none" w="med" len="med"/>
+                    </a:lnR>
+                    <a:lnT w="12700" cap="flat" cmpd="sng" algn="ctr">
+                      <a:solidFill>
+                        <a:srgbClr val="FFFFFF"/>
+                      </a:solidFill>
+                      <a:prstDash val="solid"/>
+                      <a:round/>
+                      <a:headEnd type="none" w="med" len="med"/>
+                      <a:tailEnd type="none" w="med" len="med"/>
+                    </a:lnT>
+                    <a:lnB w="12700" cap="flat" cmpd="sng" algn="ctr">
+                      <a:solidFill>
+                        <a:srgbClr val="FFFFFF"/>
+                      </a:solidFill>
+                      <a:prstDash val="solid"/>
+                      <a:round/>
+                      <a:headEnd type="none" w="med" len="med"/>
+                      <a:tailEnd type="none" w="med" len="med"/>
+                    </a:lnB>
+                    <a:solidFill>
+                      <a:schemeClr val="accent1"/>
+                    </a:solidFill>
+                  </a:tcPr>
+                </a:tc>
+                <a:tc>
+                  <a:txBody>
+                    <a:bodyPr/>
+                    <a:lstStyle/>
+                    <a:p>
+                      <a:pPr algn="l" indent="0" marL="0">
+                        <a:buNone/>
+                      </a:pPr>
+                      <a:r>
+                        <a:rPr lang="en-US" sz="1300" b="1" dirty="0">
+                          <a:solidFill>
+                            <a:schemeClr val="bg1"/>
+                          </a:solidFill>
+                        </a:rPr>
+                        <a:t>AI price</a:t>
+                      </a:r>
+                      <a:endParaRPr lang="en-US" sz="1300" dirty="0"/>
+                    </a:p>
+                  </a:txBody>
+                  <a:tcPr marL="109728" marR="109728" marT="36576" marB="36576" anchor="ctr">
+                    <a:lnL w="12700" cap="flat" cmpd="sng" algn="ctr">
+                      <a:solidFill>
+                        <a:srgbClr val="FFFFFF"/>
+                      </a:solidFill>
+                      <a:prstDash val="solid"/>
+                      <a:round/>
+                      <a:headEnd type="none" w="med" len="med"/>
+                      <a:tailEnd type="none" w="med" len="med"/>
+                    </a:lnL>
+                    <a:lnR w="12700" cap="flat" cmpd="sng" algn="ctr">
+                      <a:solidFill>
+                        <a:srgbClr val="FFFFFF"/>
+                      </a:solidFill>
+                      <a:prstDash val="solid"/>
+                      <a:round/>
+                      <a:headEnd type="none" w="med" len="med"/>
+                      <a:tailEnd type="none" w="med" len="med"/>
+                    </a:lnR>
+                    <a:lnT w="12700" cap="flat" cmpd="sng" algn="ctr">
+                      <a:solidFill>
+                        <a:srgbClr val="FFFFFF"/>
+                      </a:solidFill>
+                      <a:prstDash val="solid"/>
+                      <a:round/>
+                      <a:headEnd type="none" w="med" len="med"/>
+                      <a:tailEnd type="none" w="med" len="med"/>
+                    </a:lnT>
+                    <a:lnB w="12700" cap="flat" cmpd="sng" algn="ctr">
+                      <a:solidFill>
+                        <a:srgbClr val="FFFFFF"/>
+                      </a:solidFill>
+                      <a:prstDash val="solid"/>
+                      <a:round/>
+                      <a:headEnd type="none" w="med" len="med"/>
+                      <a:tailEnd type="none" w="med" len="med"/>
+                    </a:lnB>
+                    <a:solidFill>
+                      <a:schemeClr val="accent1"/>
+                    </a:solidFill>
+                  </a:tcPr>
+                </a:tc>
+              </a:tr>
+              <a:tr h="438912">
+                <a:tc>
+                  <a:txBody>
+                    <a:bodyPr/>
+                    <a:lstStyle/>
+                    <a:p>
+                      <a:pPr algn="l" indent="0" marL="0">
+                        <a:buNone/>
+                      </a:pPr>
+                      <a:r>
+                        <a:rPr lang="en-US" sz="1300" b="1" dirty="0">
+                          <a:solidFill>
+                            <a:schemeClr val="tx1"/>
+                          </a:solidFill>
+                        </a:rPr>
+                        <a:t>Auth0</a:t>
+                      </a:r>
+                      <a:endParaRPr lang="en-US" sz="1300" dirty="0"/>
+                    </a:p>
+                  </a:txBody>
+                  <a:tcPr marL="109728" marR="109728" marT="36576" marB="36576" anchor="ctr">
+                    <a:lnL w="12700" cap="flat" cmpd="sng" algn="ctr">
+                      <a:solidFill>
+                        <a:srgbClr val="FFFFFF"/>
+                      </a:solidFill>
+                      <a:prstDash val="solid"/>
+                      <a:round/>
+                      <a:headEnd type="none" w="med" len="med"/>
+                      <a:tailEnd type="none" w="med" len="med"/>
+                    </a:lnL>
+                    <a:lnR w="12700" cap="flat" cmpd="sng" algn="ctr">
+                      <a:solidFill>
+                        <a:srgbClr val="FFFFFF"/>
+                      </a:solidFill>
+                      <a:prstDash val="solid"/>
+                      <a:round/>
+                      <a:headEnd type="none" w="med" len="med"/>
+                      <a:tailEnd type="none" w="med" len="med"/>
+                    </a:lnR>
+                    <a:lnT w="12700" cap="flat" cmpd="sng" algn="ctr">
+                      <a:solidFill>
+                        <a:srgbClr val="FFFFFF"/>
+                      </a:solidFill>
+                      <a:prstDash val="solid"/>
+                      <a:round/>
+                      <a:headEnd type="none" w="med" len="med"/>
+                      <a:tailEnd type="none" w="med" len="med"/>
+                    </a:lnT>
+                    <a:lnB w="12700" cap="flat" cmpd="sng" algn="ctr">
+                      <a:solidFill>
+                        <a:srgbClr val="FFFFFF"/>
+                      </a:solidFill>
+                      <a:prstDash val="solid"/>
+                      <a:round/>
+                      <a:headEnd type="none" w="med" len="med"/>
+                      <a:tailEnd type="none" w="med" len="med"/>
+                    </a:lnB>
+                    <a:solidFill>
+                      <a:schemeClr val="bg2"/>
+                    </a:solidFill>
+                  </a:tcPr>
+                </a:tc>
+                <a:tc>
+                  <a:txBody>
+                    <a:bodyPr/>
+                    <a:lstStyle/>
+                    <a:p>
+                      <a:pPr algn="l" indent="0" marL="0">
+                        <a:buNone/>
+                      </a:pPr>
+                      <a:r>
+                        <a:rPr lang="en-US" sz="1300" dirty="0">
+                          <a:solidFill>
+                            <a:schemeClr val="tx1"/>
+                          </a:solidFill>
+                        </a:rPr>
+                        <a:t>Bot Detection, Adaptive MFA</a:t>
+                      </a:r>
+                      <a:endParaRPr lang="en-US" sz="1300" dirty="0"/>
+                    </a:p>
+                  </a:txBody>
+                  <a:tcPr marL="109728" marR="109728" marT="36576" marB="36576" anchor="ctr">
+                    <a:lnL w="12700" cap="flat" cmpd="sng" algn="ctr">
+                      <a:solidFill>
+                        <a:srgbClr val="FFFFFF"/>
+                      </a:solidFill>
+                      <a:prstDash val="solid"/>
+                      <a:round/>
+                      <a:headEnd type="none" w="med" len="med"/>
+                      <a:tailEnd type="none" w="med" len="med"/>
+                    </a:lnL>
+                    <a:lnR w="12700" cap="flat" cmpd="sng" algn="ctr">
+                      <a:solidFill>
+                        <a:srgbClr val="FFFFFF"/>
+                      </a:solidFill>
+                      <a:prstDash val="solid"/>
+                      <a:round/>
+                      <a:headEnd type="none" w="med" len="med"/>
+                      <a:tailEnd type="none" w="med" len="med"/>
+                    </a:lnR>
+                    <a:lnT w="12700" cap="flat" cmpd="sng" algn="ctr">
+                      <a:solidFill>
+                        <a:srgbClr val="FFFFFF"/>
+                      </a:solidFill>
+                      <a:prstDash val="solid"/>
+                      <a:round/>
+                      <a:headEnd type="none" w="med" len="med"/>
+                      <a:tailEnd type="none" w="med" len="med"/>
+                    </a:lnT>
+                    <a:lnB w="12700" cap="flat" cmpd="sng" algn="ctr">
+                      <a:solidFill>
+                        <a:srgbClr val="FFFFFF"/>
+                      </a:solidFill>
+                      <a:prstDash val="solid"/>
+                      <a:round/>
+                      <a:headEnd type="none" w="med" len="med"/>
+                      <a:tailEnd type="none" w="med" len="med"/>
+                    </a:lnB>
+                    <a:solidFill>
+                      <a:schemeClr val="bg2"/>
+                    </a:solidFill>
+                  </a:tcPr>
+                </a:tc>
+                <a:tc>
+                  <a:txBody>
+                    <a:bodyPr/>
+                    <a:lstStyle/>
+                    <a:p>
+                      <a:pPr algn="l" indent="0" marL="0">
+                        <a:buNone/>
+                      </a:pPr>
+                      <a:r>
+                        <a:rPr lang="en-US" sz="1300" dirty="0">
+                          <a:solidFill>
+                            <a:schemeClr val="tx1"/>
+                          </a:solidFill>
+                        </a:rPr>
+                        <a:t>AI Agents add-on, Token Vault</a:t>
+                      </a:r>
+                      <a:endParaRPr lang="en-US" sz="1300" dirty="0"/>
+                    </a:p>
+                  </a:txBody>
+                  <a:tcPr marL="109728" marR="109728" marT="36576" marB="36576" anchor="ctr">
+                    <a:lnL w="12700" cap="flat" cmpd="sng" algn="ctr">
+                      <a:solidFill>
+                        <a:srgbClr val="FFFFFF"/>
+                      </a:solidFill>
+                      <a:prstDash val="solid"/>
+                      <a:round/>
+                      <a:headEnd type="none" w="med" len="med"/>
+                      <a:tailEnd type="none" w="med" len="med"/>
+                    </a:lnL>
+                    <a:lnR w="12700" cap="flat" cmpd="sng" algn="ctr">
+                      <a:solidFill>
+                        <a:srgbClr val="FFFFFF"/>
+                      </a:solidFill>
+                      <a:prstDash val="solid"/>
+                      <a:round/>
+                      <a:headEnd type="none" w="med" len="med"/>
+                      <a:tailEnd type="none" w="med" len="med"/>
+                    </a:lnR>
+                    <a:lnT w="12700" cap="flat" cmpd="sng" algn="ctr">
+                      <a:solidFill>
+                        <a:srgbClr val="FFFFFF"/>
+                      </a:solidFill>
+                      <a:prstDash val="solid"/>
+                      <a:round/>
+                      <a:headEnd type="none" w="med" len="med"/>
+                      <a:tailEnd type="none" w="med" len="med"/>
+                    </a:lnT>
+                    <a:lnB w="12700" cap="flat" cmpd="sng" algn="ctr">
+                      <a:solidFill>
+                        <a:srgbClr val="FFFFFF"/>
+                      </a:solidFill>
+                      <a:prstDash val="solid"/>
+                      <a:round/>
+                      <a:headEnd type="none" w="med" len="med"/>
+                      <a:tailEnd type="none" w="med" len="med"/>
+                    </a:lnB>
+                    <a:solidFill>
+                      <a:schemeClr val="bg2"/>
+                    </a:solidFill>
+                  </a:tcPr>
+                </a:tc>
+                <a:tc>
+                  <a:txBody>
+                    <a:bodyPr/>
+                    <a:lstStyle/>
+                    <a:p>
+                      <a:pPr algn="l" indent="0" marL="0">
+                        <a:buNone/>
+                      </a:pPr>
+                      <a:r>
+                        <a:rPr lang="en-US" sz="1300" dirty="0">
+                          <a:solidFill>
+                            <a:schemeClr val="tx1"/>
+                          </a:solidFill>
+                        </a:rPr>
+                        <a:t>Risk: Enterprise only · Agents: +50% of plan</a:t>
+                      </a:r>
+                      <a:endParaRPr lang="en-US" sz="1300" dirty="0"/>
+                    </a:p>
+                  </a:txBody>
+                  <a:tcPr marL="109728" marR="109728" marT="36576" marB="36576" anchor="ctr">
+                    <a:lnL w="12700" cap="flat" cmpd="sng" algn="ctr">
+                      <a:solidFill>
+                        <a:srgbClr val="FFFFFF"/>
+                      </a:solidFill>
+                      <a:prstDash val="solid"/>
+                      <a:round/>
+                      <a:headEnd type="none" w="med" len="med"/>
+                      <a:tailEnd type="none" w="med" len="med"/>
+                    </a:lnL>
+                    <a:lnR w="12700" cap="flat" cmpd="sng" algn="ctr">
+                      <a:solidFill>
+                        <a:srgbClr val="FFFFFF"/>
+                      </a:solidFill>
+                      <a:prstDash val="solid"/>
+                      <a:round/>
+                      <a:headEnd type="none" w="med" len="med"/>
+                      <a:tailEnd type="none" w="med" len="med"/>
+                    </a:lnR>
+                    <a:lnT w="12700" cap="flat" cmpd="sng" algn="ctr">
+                      <a:solidFill>
+                        <a:srgbClr val="FFFFFF"/>
+                      </a:solidFill>
+                      <a:prstDash val="solid"/>
+                      <a:round/>
+                      <a:headEnd type="none" w="med" len="med"/>
+                      <a:tailEnd type="none" w="med" len="med"/>
+                    </a:lnT>
+                    <a:lnB w="12700" cap="flat" cmpd="sng" algn="ctr">
+                      <a:solidFill>
+                        <a:srgbClr val="FFFFFF"/>
+                      </a:solidFill>
+                      <a:prstDash val="solid"/>
+                      <a:round/>
+                      <a:headEnd type="none" w="med" len="med"/>
+                      <a:tailEnd type="none" w="med" len="med"/>
+                    </a:lnB>
+                    <a:solidFill>
+                      <a:schemeClr val="bg2"/>
+                    </a:solidFill>
+                  </a:tcPr>
+                </a:tc>
+              </a:tr>
+              <a:tr h="438912">
+                <a:tc>
+                  <a:txBody>
+                    <a:bodyPr/>
+                    <a:lstStyle/>
+                    <a:p>
+                      <a:pPr algn="l" indent="0" marL="0">
+                        <a:buNone/>
+                      </a:pPr>
+                      <a:r>
+                        <a:rPr lang="en-US" sz="1300" b="1" dirty="0">
+                          <a:solidFill>
+                            <a:schemeClr val="tx1"/>
+                          </a:solidFill>
+                        </a:rPr>
+                        <a:t>Okta</a:t>
+                      </a:r>
+                      <a:endParaRPr lang="en-US" sz="1300" dirty="0"/>
+                    </a:p>
+                  </a:txBody>
+                  <a:tcPr marL="109728" marR="109728" marT="36576" marB="36576" anchor="ctr">
+                    <a:lnL w="12700" cap="flat" cmpd="sng" algn="ctr">
+                      <a:solidFill>
+                        <a:srgbClr val="FFFFFF"/>
+                      </a:solidFill>
+                      <a:prstDash val="solid"/>
+                      <a:round/>
+                      <a:headEnd type="none" w="med" len="med"/>
+                      <a:tailEnd type="none" w="med" len="med"/>
+                    </a:lnL>
+                    <a:lnR w="12700" cap="flat" cmpd="sng" algn="ctr">
+                      <a:solidFill>
+                        <a:srgbClr val="FFFFFF"/>
+                      </a:solidFill>
+                      <a:prstDash val="solid"/>
+                      <a:round/>
+                      <a:headEnd type="none" w="med" len="med"/>
+                      <a:tailEnd type="none" w="med" len="med"/>
+                    </a:lnR>
+                    <a:lnT w="12700" cap="flat" cmpd="sng" algn="ctr">
+                      <a:solidFill>
+                        <a:srgbClr val="FFFFFF"/>
+                      </a:solidFill>
+                      <a:prstDash val="solid"/>
+                      <a:round/>
+                      <a:headEnd type="none" w="med" len="med"/>
+                      <a:tailEnd type="none" w="med" len="med"/>
+                    </a:lnT>
+                    <a:lnB w="12700" cap="flat" cmpd="sng" algn="ctr">
+                      <a:solidFill>
+                        <a:srgbClr val="FFFFFF"/>
+                      </a:solidFill>
+                      <a:prstDash val="solid"/>
+                      <a:round/>
+                      <a:headEnd type="none" w="med" len="med"/>
+                      <a:tailEnd type="none" w="med" len="med"/>
+                    </a:lnB>
+                    <a:solidFill>
+                      <a:schemeClr val="bg1"/>
+                    </a:solidFill>
+                  </a:tcPr>
+                </a:tc>
+                <a:tc>
+                  <a:txBody>
+                    <a:bodyPr/>
+                    <a:lstStyle/>
+                    <a:p>
+                      <a:pPr algn="l" indent="0" marL="0">
+                        <a:buNone/>
+                      </a:pPr>
+                      <a:r>
+                        <a:rPr lang="en-US" sz="1300" dirty="0">
+                          <a:solidFill>
+                            <a:schemeClr val="tx1"/>
+                          </a:solidFill>
+                        </a:rPr>
+                        <a:t>Identity Threat Protection</a:t>
+                      </a:r>
+                      <a:endParaRPr lang="en-US" sz="1300" dirty="0"/>
+                    </a:p>
+                  </a:txBody>
+                  <a:tcPr marL="109728" marR="109728" marT="36576" marB="36576" anchor="ctr">
+                    <a:lnL w="12700" cap="flat" cmpd="sng" algn="ctr">
+                      <a:solidFill>
+                        <a:srgbClr val="FFFFFF"/>
+                      </a:solidFill>
+                      <a:prstDash val="solid"/>
+                      <a:round/>
+                      <a:headEnd type="none" w="med" len="med"/>
+                      <a:tailEnd type="none" w="med" len="med"/>
+                    </a:lnL>
+                    <a:lnR w="12700" cap="flat" cmpd="sng" algn="ctr">
+                      <a:solidFill>
+                        <a:srgbClr val="FFFFFF"/>
+                      </a:solidFill>
+                      <a:prstDash val="solid"/>
+                      <a:round/>
+                      <a:headEnd type="none" w="med" len="med"/>
+                      <a:tailEnd type="none" w="med" len="med"/>
+                    </a:lnR>
+                    <a:lnT w="12700" cap="flat" cmpd="sng" algn="ctr">
+                      <a:solidFill>
+                        <a:srgbClr val="FFFFFF"/>
+                      </a:solidFill>
+                      <a:prstDash val="solid"/>
+                      <a:round/>
+                      <a:headEnd type="none" w="med" len="med"/>
+                      <a:tailEnd type="none" w="med" len="med"/>
+                    </a:lnT>
+                    <a:lnB w="12700" cap="flat" cmpd="sng" algn="ctr">
+                      <a:solidFill>
+                        <a:srgbClr val="FFFFFF"/>
+                      </a:solidFill>
+                      <a:prstDash val="solid"/>
+                      <a:round/>
+                      <a:headEnd type="none" w="med" len="med"/>
+                      <a:tailEnd type="none" w="med" len="med"/>
+                    </a:lnB>
+                    <a:solidFill>
+                      <a:schemeClr val="bg1"/>
+                    </a:solidFill>
+                  </a:tcPr>
+                </a:tc>
+                <a:tc>
+                  <a:txBody>
+                    <a:bodyPr/>
+                    <a:lstStyle/>
+                    <a:p>
+                      <a:pPr algn="l" indent="0" marL="0">
+                        <a:buNone/>
+                      </a:pPr>
+                      <a:r>
+                        <a:rPr lang="en-US" sz="1300" dirty="0">
+                          <a:solidFill>
+                            <a:schemeClr val="tx1"/>
+                          </a:solidFill>
+                        </a:rPr>
+                        <a:t>Agent SSO, Okta for AI Agents</a:t>
+                      </a:r>
+                      <a:endParaRPr lang="en-US" sz="1300" dirty="0"/>
+                    </a:p>
+                  </a:txBody>
+                  <a:tcPr marL="109728" marR="109728" marT="36576" marB="36576" anchor="ctr">
+                    <a:lnL w="12700" cap="flat" cmpd="sng" algn="ctr">
+                      <a:solidFill>
+                        <a:srgbClr val="FFFFFF"/>
+                      </a:solidFill>
+                      <a:prstDash val="solid"/>
+                      <a:round/>
+                      <a:headEnd type="none" w="med" len="med"/>
+                      <a:tailEnd type="none" w="med" len="med"/>
+                    </a:lnL>
+                    <a:lnR w="12700" cap="flat" cmpd="sng" algn="ctr">
+                      <a:solidFill>
+                        <a:srgbClr val="FFFFFF"/>
+                      </a:solidFill>
+                      <a:prstDash val="solid"/>
+                      <a:round/>
+                      <a:headEnd type="none" w="med" len="med"/>
+                      <a:tailEnd type="none" w="med" len="med"/>
+                    </a:lnR>
+                    <a:lnT w="12700" cap="flat" cmpd="sng" algn="ctr">
+                      <a:solidFill>
+                        <a:srgbClr val="FFFFFF"/>
+                      </a:solidFill>
+                      <a:prstDash val="solid"/>
+                      <a:round/>
+                      <a:headEnd type="none" w="med" len="med"/>
+                      <a:tailEnd type="none" w="med" len="med"/>
+                    </a:lnT>
+                    <a:lnB w="12700" cap="flat" cmpd="sng" algn="ctr">
+                      <a:solidFill>
+                        <a:srgbClr val="FFFFFF"/>
+                      </a:solidFill>
+                      <a:prstDash val="solid"/>
+                      <a:round/>
+                      <a:headEnd type="none" w="med" len="med"/>
+                      <a:tailEnd type="none" w="med" len="med"/>
+                    </a:lnB>
+                    <a:solidFill>
+                      <a:schemeClr val="bg1"/>
+                    </a:solidFill>
+                  </a:tcPr>
+                </a:tc>
+                <a:tc>
+                  <a:txBody>
+                    <a:bodyPr/>
+                    <a:lstStyle/>
+                    <a:p>
+                      <a:pPr algn="l" indent="0" marL="0">
+                        <a:buNone/>
+                      </a:pPr>
+                      <a:r>
+                        <a:rPr lang="en-US" sz="1300" dirty="0">
+                          <a:solidFill>
+                            <a:schemeClr val="tx1"/>
+                          </a:solidFill>
+                        </a:rPr>
+                        <a:t>ITP add-on · Agent SSO included</a:t>
+                      </a:r>
+                      <a:endParaRPr lang="en-US" sz="1300" dirty="0"/>
+                    </a:p>
+                  </a:txBody>
+                  <a:tcPr marL="109728" marR="109728" marT="36576" marB="36576" anchor="ctr">
+                    <a:lnL w="12700" cap="flat" cmpd="sng" algn="ctr">
+                      <a:solidFill>
+                        <a:srgbClr val="FFFFFF"/>
+                      </a:solidFill>
+                      <a:prstDash val="solid"/>
+                      <a:round/>
+                      <a:headEnd type="none" w="med" len="med"/>
+                      <a:tailEnd type="none" w="med" len="med"/>
+                    </a:lnL>
+                    <a:lnR w="12700" cap="flat" cmpd="sng" algn="ctr">
+                      <a:solidFill>
+                        <a:srgbClr val="FFFFFF"/>
+                      </a:solidFill>
+                      <a:prstDash val="solid"/>
+                      <a:round/>
+                      <a:headEnd type="none" w="med" len="med"/>
+                      <a:tailEnd type="none" w="med" len="med"/>
+                    </a:lnR>
+                    <a:lnT w="12700" cap="flat" cmpd="sng" algn="ctr">
+                      <a:solidFill>
+                        <a:srgbClr val="FFFFFF"/>
+                      </a:solidFill>
+                      <a:prstDash val="solid"/>
+                      <a:round/>
+                      <a:headEnd type="none" w="med" len="med"/>
+                      <a:tailEnd type="none" w="med" len="med"/>
+                    </a:lnT>
+                    <a:lnB w="12700" cap="flat" cmpd="sng" algn="ctr">
+                      <a:solidFill>
+                        <a:srgbClr val="FFFFFF"/>
+                      </a:solidFill>
+                      <a:prstDash val="solid"/>
+                      <a:round/>
+                      <a:headEnd type="none" w="med" len="med"/>
+                      <a:tailEnd type="none" w="med" len="med"/>
+                    </a:lnB>
+                    <a:solidFill>
+                      <a:schemeClr val="bg1"/>
+                    </a:solidFill>
+                  </a:tcPr>
+                </a:tc>
+              </a:tr>
+              <a:tr h="438912">
+                <a:tc>
+                  <a:txBody>
+                    <a:bodyPr/>
+                    <a:lstStyle/>
+                    <a:p>
+                      <a:pPr algn="l" indent="0" marL="0">
+                        <a:buNone/>
+                      </a:pPr>
+                      <a:r>
+                        <a:rPr lang="en-US" sz="1300" b="1" dirty="0">
+                          <a:solidFill>
+                            <a:schemeClr val="tx1"/>
+                          </a:solidFill>
+                        </a:rPr>
+                        <a:t>Microsoft Entra</a:t>
+                      </a:r>
+                      <a:endParaRPr lang="en-US" sz="1300" dirty="0"/>
+                    </a:p>
+                  </a:txBody>
+                  <a:tcPr marL="109728" marR="109728" marT="36576" marB="36576" anchor="ctr">
+                    <a:lnL w="12700" cap="flat" cmpd="sng" algn="ctr">
+                      <a:solidFill>
+                        <a:srgbClr val="FFFFFF"/>
+                      </a:solidFill>
+                      <a:prstDash val="solid"/>
+                      <a:round/>
+                      <a:headEnd type="none" w="med" len="med"/>
+                      <a:tailEnd type="none" w="med" len="med"/>
+                    </a:lnL>
+                    <a:lnR w="12700" cap="flat" cmpd="sng" algn="ctr">
+                      <a:solidFill>
+                        <a:srgbClr val="FFFFFF"/>
+                      </a:solidFill>
+                      <a:prstDash val="solid"/>
+                      <a:round/>
+                      <a:headEnd type="none" w="med" len="med"/>
+                      <a:tailEnd type="none" w="med" len="med"/>
+                    </a:lnR>
+                    <a:lnT w="12700" cap="flat" cmpd="sng" algn="ctr">
+                      <a:solidFill>
+                        <a:srgbClr val="FFFFFF"/>
+                      </a:solidFill>
+                      <a:prstDash val="solid"/>
+                      <a:round/>
+                      <a:headEnd type="none" w="med" len="med"/>
+                      <a:tailEnd type="none" w="med" len="med"/>
+                    </a:lnT>
+                    <a:lnB w="12700" cap="flat" cmpd="sng" algn="ctr">
+                      <a:solidFill>
+                        <a:srgbClr val="FFFFFF"/>
+                      </a:solidFill>
+                      <a:prstDash val="solid"/>
+                      <a:round/>
+                      <a:headEnd type="none" w="med" len="med"/>
+                      <a:tailEnd type="none" w="med" len="med"/>
+                    </a:lnB>
+                    <a:solidFill>
+                      <a:schemeClr val="bg2"/>
+                    </a:solidFill>
+                  </a:tcPr>
+                </a:tc>
+                <a:tc>
+                  <a:txBody>
+                    <a:bodyPr/>
+                    <a:lstStyle/>
+                    <a:p>
+                      <a:pPr algn="l" indent="0" marL="0">
+                        <a:buNone/>
+                      </a:pPr>
+                      <a:r>
+                        <a:rPr lang="en-US" sz="1300" dirty="0">
+                          <a:solidFill>
+                            <a:schemeClr val="tx1"/>
+                          </a:solidFill>
+                        </a:rPr>
+                        <a:t>ID Protection (P2)</a:t>
+                      </a:r>
+                      <a:endParaRPr lang="en-US" sz="1300" dirty="0"/>
+                    </a:p>
+                  </a:txBody>
+                  <a:tcPr marL="109728" marR="109728" marT="36576" marB="36576" anchor="ctr">
+                    <a:lnL w="12700" cap="flat" cmpd="sng" algn="ctr">
+                      <a:solidFill>
+                        <a:srgbClr val="FFFFFF"/>
+                      </a:solidFill>
+                      <a:prstDash val="solid"/>
+                      <a:round/>
+                      <a:headEnd type="none" w="med" len="med"/>
+                      <a:tailEnd type="none" w="med" len="med"/>
+                    </a:lnL>
+                    <a:lnR w="12700" cap="flat" cmpd="sng" algn="ctr">
+                      <a:solidFill>
+                        <a:srgbClr val="FFFFFF"/>
+                      </a:solidFill>
+                      <a:prstDash val="solid"/>
+                      <a:round/>
+                      <a:headEnd type="none" w="med" len="med"/>
+                      <a:tailEnd type="none" w="med" len="med"/>
+                    </a:lnR>
+                    <a:lnT w="12700" cap="flat" cmpd="sng" algn="ctr">
+                      <a:solidFill>
+                        <a:srgbClr val="FFFFFF"/>
+                      </a:solidFill>
+                      <a:prstDash val="solid"/>
+                      <a:round/>
+                      <a:headEnd type="none" w="med" len="med"/>
+                      <a:tailEnd type="none" w="med" len="med"/>
+                    </a:lnT>
+                    <a:lnB w="12700" cap="flat" cmpd="sng" algn="ctr">
+                      <a:solidFill>
+                        <a:srgbClr val="FFFFFF"/>
+                      </a:solidFill>
+                      <a:prstDash val="solid"/>
+                      <a:round/>
+                      <a:headEnd type="none" w="med" len="med"/>
+                      <a:tailEnd type="none" w="med" len="med"/>
+                    </a:lnB>
+                    <a:solidFill>
+                      <a:schemeClr val="bg2"/>
+                    </a:solidFill>
+                  </a:tcPr>
+                </a:tc>
+                <a:tc>
+                  <a:txBody>
+                    <a:bodyPr/>
+                    <a:lstStyle/>
+                    <a:p>
+                      <a:pPr algn="l" indent="0" marL="0">
+                        <a:buNone/>
+                      </a:pPr>
+                      <a:r>
+                        <a:rPr lang="en-US" sz="1300" dirty="0">
+                          <a:solidFill>
+                            <a:schemeClr val="tx1"/>
+                          </a:solidFill>
+                        </a:rPr>
+                        <a:t>Entra Agent ID</a:t>
+                      </a:r>
+                      <a:endParaRPr lang="en-US" sz="1300" dirty="0"/>
+                    </a:p>
+                  </a:txBody>
+                  <a:tcPr marL="109728" marR="109728" marT="36576" marB="36576" anchor="ctr">
+                    <a:lnL w="12700" cap="flat" cmpd="sng" algn="ctr">
+                      <a:solidFill>
+                        <a:srgbClr val="FFFFFF"/>
+                      </a:solidFill>
+                      <a:prstDash val="solid"/>
+                      <a:round/>
+                      <a:headEnd type="none" w="med" len="med"/>
+                      <a:tailEnd type="none" w="med" len="med"/>
+                    </a:lnL>
+                    <a:lnR w="12700" cap="flat" cmpd="sng" algn="ctr">
+                      <a:solidFill>
+                        <a:srgbClr val="FFFFFF"/>
+                      </a:solidFill>
+                      <a:prstDash val="solid"/>
+                      <a:round/>
+                      <a:headEnd type="none" w="med" len="med"/>
+                      <a:tailEnd type="none" w="med" len="med"/>
+                    </a:lnR>
+                    <a:lnT w="12700" cap="flat" cmpd="sng" algn="ctr">
+                      <a:solidFill>
+                        <a:srgbClr val="FFFFFF"/>
+                      </a:solidFill>
+                      <a:prstDash val="solid"/>
+                      <a:round/>
+                      <a:headEnd type="none" w="med" len="med"/>
+                      <a:tailEnd type="none" w="med" len="med"/>
+                    </a:lnT>
+                    <a:lnB w="12700" cap="flat" cmpd="sng" algn="ctr">
+                      <a:solidFill>
+                        <a:srgbClr val="FFFFFF"/>
+                      </a:solidFill>
+                      <a:prstDash val="solid"/>
+                      <a:round/>
+                      <a:headEnd type="none" w="med" len="med"/>
+                      <a:tailEnd type="none" w="med" len="med"/>
+                    </a:lnB>
+                    <a:solidFill>
+                      <a:schemeClr val="bg2"/>
+                    </a:solidFill>
+                  </a:tcPr>
+                </a:tc>
+                <a:tc>
+                  <a:txBody>
+                    <a:bodyPr/>
+                    <a:lstStyle/>
+                    <a:p>
+                      <a:pPr algn="l" indent="0" marL="0">
+                        <a:buNone/>
+                      </a:pPr>
+                      <a:r>
+                        <a:rPr lang="en-US" sz="1300" dirty="0">
+                          <a:solidFill>
+                            <a:schemeClr val="tx1"/>
+                          </a:solidFill>
+                        </a:rPr>
+                        <a:t>P2 USD 10/user · Copilot USD 4/SCU-hour</a:t>
+                      </a:r>
+                      <a:endParaRPr lang="en-US" sz="1300" dirty="0"/>
+                    </a:p>
+                  </a:txBody>
+                  <a:tcPr marL="109728" marR="109728" marT="36576" marB="36576" anchor="ctr">
+                    <a:lnL w="12700" cap="flat" cmpd="sng" algn="ctr">
+                      <a:solidFill>
+                        <a:srgbClr val="FFFFFF"/>
+                      </a:solidFill>
+                      <a:prstDash val="solid"/>
+                      <a:round/>
+                      <a:headEnd type="none" w="med" len="med"/>
+                      <a:tailEnd type="none" w="med" len="med"/>
+                    </a:lnL>
+                    <a:lnR w="12700" cap="flat" cmpd="sng" algn="ctr">
+                      <a:solidFill>
+                        <a:srgbClr val="FFFFFF"/>
+                      </a:solidFill>
+                      <a:prstDash val="solid"/>
+                      <a:round/>
+                      <a:headEnd type="none" w="med" len="med"/>
+                      <a:tailEnd type="none" w="med" len="med"/>
+                    </a:lnR>
+                    <a:lnT w="12700" cap="flat" cmpd="sng" algn="ctr">
+                      <a:solidFill>
+                        <a:srgbClr val="FFFFFF"/>
+                      </a:solidFill>
+                      <a:prstDash val="solid"/>
+                      <a:round/>
+                      <a:headEnd type="none" w="med" len="med"/>
+                      <a:tailEnd type="none" w="med" len="med"/>
+                    </a:lnT>
+                    <a:lnB w="12700" cap="flat" cmpd="sng" algn="ctr">
+                      <a:solidFill>
+                        <a:srgbClr val="FFFFFF"/>
+                      </a:solidFill>
+                      <a:prstDash val="solid"/>
+                      <a:round/>
+                      <a:headEnd type="none" w="med" len="med"/>
+                      <a:tailEnd type="none" w="med" len="med"/>
+                    </a:lnB>
+                    <a:solidFill>
+                      <a:schemeClr val="bg2"/>
+                    </a:solidFill>
+                  </a:tcPr>
+                </a:tc>
+              </a:tr>
+              <a:tr h="438912">
+                <a:tc>
+                  <a:txBody>
+                    <a:bodyPr/>
+                    <a:lstStyle/>
+                    <a:p>
+                      <a:pPr algn="l" indent="0" marL="0">
+                        <a:buNone/>
+                      </a:pPr>
+                      <a:r>
+                        <a:rPr lang="en-US" sz="1300" b="1" dirty="0">
+                          <a:solidFill>
+                            <a:schemeClr val="tx1"/>
+                          </a:solidFill>
+                        </a:rPr>
+                        <a:t>Ping Identity</a:t>
+                      </a:r>
+                      <a:endParaRPr lang="en-US" sz="1300" dirty="0"/>
+                    </a:p>
+                  </a:txBody>
+                  <a:tcPr marL="109728" marR="109728" marT="36576" marB="36576" anchor="ctr">
+                    <a:lnL w="12700" cap="flat" cmpd="sng" algn="ctr">
+                      <a:solidFill>
+                        <a:srgbClr val="FFFFFF"/>
+                      </a:solidFill>
+                      <a:prstDash val="solid"/>
+                      <a:round/>
+                      <a:headEnd type="none" w="med" len="med"/>
+                      <a:tailEnd type="none" w="med" len="med"/>
+                    </a:lnL>
+                    <a:lnR w="12700" cap="flat" cmpd="sng" algn="ctr">
+                      <a:solidFill>
+                        <a:srgbClr val="FFFFFF"/>
+                      </a:solidFill>
+                      <a:prstDash val="solid"/>
+                      <a:round/>
+                      <a:headEnd type="none" w="med" len="med"/>
+                      <a:tailEnd type="none" w="med" len="med"/>
+                    </a:lnR>
+                    <a:lnT w="12700" cap="flat" cmpd="sng" algn="ctr">
+                      <a:solidFill>
+                        <a:srgbClr val="FFFFFF"/>
+                      </a:solidFill>
+                      <a:prstDash val="solid"/>
+                      <a:round/>
+                      <a:headEnd type="none" w="med" len="med"/>
+                      <a:tailEnd type="none" w="med" len="med"/>
+                    </a:lnT>
+                    <a:lnB w="12700" cap="flat" cmpd="sng" algn="ctr">
+                      <a:solidFill>
+                        <a:srgbClr val="FFFFFF"/>
+                      </a:solidFill>
+                      <a:prstDash val="solid"/>
+                      <a:round/>
+                      <a:headEnd type="none" w="med" len="med"/>
+                      <a:tailEnd type="none" w="med" len="med"/>
+                    </a:lnB>
+                    <a:solidFill>
+                      <a:schemeClr val="bg1"/>
+                    </a:solidFill>
+                  </a:tcPr>
+                </a:tc>
+                <a:tc>
+                  <a:txBody>
+                    <a:bodyPr/>
+                    <a:lstStyle/>
+                    <a:p>
+                      <a:pPr algn="l" indent="0" marL="0">
+                        <a:buNone/>
+                      </a:pPr>
+                      <a:r>
+                        <a:rPr lang="en-US" sz="1300" dirty="0">
+                          <a:solidFill>
+                            <a:schemeClr val="tx1"/>
+                          </a:solidFill>
+                        </a:rPr>
+                        <a:t>PingOne Protect (ML)</a:t>
+                      </a:r>
+                      <a:endParaRPr lang="en-US" sz="1300" dirty="0"/>
+                    </a:p>
+                  </a:txBody>
+                  <a:tcPr marL="109728" marR="109728" marT="36576" marB="36576" anchor="ctr">
+                    <a:lnL w="12700" cap="flat" cmpd="sng" algn="ctr">
+                      <a:solidFill>
+                        <a:srgbClr val="FFFFFF"/>
+                      </a:solidFill>
+                      <a:prstDash val="solid"/>
+                      <a:round/>
+                      <a:headEnd type="none" w="med" len="med"/>
+                      <a:tailEnd type="none" w="med" len="med"/>
+                    </a:lnL>
+                    <a:lnR w="12700" cap="flat" cmpd="sng" algn="ctr">
+                      <a:solidFill>
+                        <a:srgbClr val="FFFFFF"/>
+                      </a:solidFill>
+                      <a:prstDash val="solid"/>
+                      <a:round/>
+                      <a:headEnd type="none" w="med" len="med"/>
+                      <a:tailEnd type="none" w="med" len="med"/>
+                    </a:lnR>
+                    <a:lnT w="12700" cap="flat" cmpd="sng" algn="ctr">
+                      <a:solidFill>
+                        <a:srgbClr val="FFFFFF"/>
+                      </a:solidFill>
+                      <a:prstDash val="solid"/>
+                      <a:round/>
+                      <a:headEnd type="none" w="med" len="med"/>
+                      <a:tailEnd type="none" w="med" len="med"/>
+                    </a:lnT>
+                    <a:lnB w="12700" cap="flat" cmpd="sng" algn="ctr">
+                      <a:solidFill>
+                        <a:srgbClr val="FFFFFF"/>
+                      </a:solidFill>
+                      <a:prstDash val="solid"/>
+                      <a:round/>
+                      <a:headEnd type="none" w="med" len="med"/>
+                      <a:tailEnd type="none" w="med" len="med"/>
+                    </a:lnB>
+                    <a:solidFill>
+                      <a:schemeClr val="bg1"/>
+                    </a:solidFill>
+                  </a:tcPr>
+                </a:tc>
+                <a:tc>
+                  <a:txBody>
+                    <a:bodyPr/>
+                    <a:lstStyle/>
+                    <a:p>
+                      <a:pPr algn="l" indent="0" marL="0">
+                        <a:buNone/>
+                      </a:pPr>
+                      <a:r>
+                        <a:rPr lang="en-US" sz="1300" dirty="0">
+                          <a:solidFill>
+                            <a:schemeClr val="tx1"/>
+                          </a:solidFill>
+                        </a:rPr>
+                        <a:t>Identity for AI</a:t>
+                      </a:r>
+                      <a:endParaRPr lang="en-US" sz="1300" dirty="0"/>
+                    </a:p>
+                  </a:txBody>
+                  <a:tcPr marL="109728" marR="109728" marT="36576" marB="36576" anchor="ctr">
+                    <a:lnL w="12700" cap="flat" cmpd="sng" algn="ctr">
+                      <a:solidFill>
+                        <a:srgbClr val="FFFFFF"/>
+                      </a:solidFill>
+                      <a:prstDash val="solid"/>
+                      <a:round/>
+                      <a:headEnd type="none" w="med" len="med"/>
+                      <a:tailEnd type="none" w="med" len="med"/>
+                    </a:lnL>
+                    <a:lnR w="12700" cap="flat" cmpd="sng" algn="ctr">
+                      <a:solidFill>
+                        <a:srgbClr val="FFFFFF"/>
+                      </a:solidFill>
+                      <a:prstDash val="solid"/>
+                      <a:round/>
+                      <a:headEnd type="none" w="med" len="med"/>
+                      <a:tailEnd type="none" w="med" len="med"/>
+                    </a:lnR>
+                    <a:lnT w="12700" cap="flat" cmpd="sng" algn="ctr">
+                      <a:solidFill>
+                        <a:srgbClr val="FFFFFF"/>
+                      </a:solidFill>
+                      <a:prstDash val="solid"/>
+                      <a:round/>
+                      <a:headEnd type="none" w="med" len="med"/>
+                      <a:tailEnd type="none" w="med" len="med"/>
+                    </a:lnT>
+                    <a:lnB w="12700" cap="flat" cmpd="sng" algn="ctr">
+                      <a:solidFill>
+                        <a:srgbClr val="FFFFFF"/>
+                      </a:solidFill>
+                      <a:prstDash val="solid"/>
+                      <a:round/>
+                      <a:headEnd type="none" w="med" len="med"/>
+                      <a:tailEnd type="none" w="med" len="med"/>
+                    </a:lnB>
+                    <a:solidFill>
+                      <a:schemeClr val="bg1"/>
+                    </a:solidFill>
+                  </a:tcPr>
+                </a:tc>
+                <a:tc>
+                  <a:txBody>
+                    <a:bodyPr/>
+                    <a:lstStyle/>
+                    <a:p>
+                      <a:pPr algn="l" indent="0" marL="0">
+                        <a:buNone/>
+                      </a:pPr>
+                      <a:r>
+                        <a:rPr lang="en-US" sz="1300" dirty="0">
+                          <a:solidFill>
+                            <a:schemeClr val="tx1"/>
+                          </a:solidFill>
+                        </a:rPr>
+                        <a:t>Not public; plans from USD 35k/year</a:t>
+                      </a:r>
+                      <a:endParaRPr lang="en-US" sz="1300" dirty="0"/>
+                    </a:p>
+                  </a:txBody>
+                  <a:tcPr marL="109728" marR="109728" marT="36576" marB="36576" anchor="ctr">
+                    <a:lnL w="12700" cap="flat" cmpd="sng" algn="ctr">
+                      <a:solidFill>
+                        <a:srgbClr val="FFFFFF"/>
+                      </a:solidFill>
+                      <a:prstDash val="solid"/>
+                      <a:round/>
+                      <a:headEnd type="none" w="med" len="med"/>
+                      <a:tailEnd type="none" w="med" len="med"/>
+                    </a:lnL>
+                    <a:lnR w="12700" cap="flat" cmpd="sng" algn="ctr">
+                      <a:solidFill>
+                        <a:srgbClr val="FFFFFF"/>
+                      </a:solidFill>
+                      <a:prstDash val="solid"/>
+                      <a:round/>
+                      <a:headEnd type="none" w="med" len="med"/>
+                      <a:tailEnd type="none" w="med" len="med"/>
+                    </a:lnR>
+                    <a:lnT w="12700" cap="flat" cmpd="sng" algn="ctr">
+                      <a:solidFill>
+                        <a:srgbClr val="FFFFFF"/>
+                      </a:solidFill>
+                      <a:prstDash val="solid"/>
+                      <a:round/>
+                      <a:headEnd type="none" w="med" len="med"/>
+                      <a:tailEnd type="none" w="med" len="med"/>
+                    </a:lnT>
+                    <a:lnB w="12700" cap="flat" cmpd="sng" algn="ctr">
+                      <a:solidFill>
+                        <a:srgbClr val="FFFFFF"/>
+                      </a:solidFill>
+                      <a:prstDash val="solid"/>
+                      <a:round/>
+                      <a:headEnd type="none" w="med" len="med"/>
+                      <a:tailEnd type="none" w="med" len="med"/>
+                    </a:lnB>
+                    <a:solidFill>
+                      <a:schemeClr val="bg1"/>
+                    </a:solidFill>
+                  </a:tcPr>
+                </a:tc>
+              </a:tr>
+              <a:tr h="438912">
+                <a:tc>
+                  <a:txBody>
+                    <a:bodyPr/>
+                    <a:lstStyle/>
+                    <a:p>
+                      <a:pPr algn="l" indent="0" marL="0">
+                        <a:buNone/>
+                      </a:pPr>
+                      <a:r>
+                        <a:rPr lang="en-US" sz="1300" b="1" dirty="0">
+                          <a:solidFill>
+                            <a:schemeClr val="tx1"/>
+                          </a:solidFill>
+                        </a:rPr>
+                        <a:t>AWS Cognito</a:t>
+                      </a:r>
+                      <a:endParaRPr lang="en-US" sz="1300" dirty="0"/>
+                    </a:p>
+                  </a:txBody>
+                  <a:tcPr marL="109728" marR="109728" marT="36576" marB="36576" anchor="ctr">
+                    <a:lnL w="12700" cap="flat" cmpd="sng" algn="ctr">
+                      <a:solidFill>
+                        <a:srgbClr val="FFFFFF"/>
+                      </a:solidFill>
+                      <a:prstDash val="solid"/>
+                      <a:round/>
+                      <a:headEnd type="none" w="med" len="med"/>
+                      <a:tailEnd type="none" w="med" len="med"/>
+                    </a:lnL>
+                    <a:lnR w="12700" cap="flat" cmpd="sng" algn="ctr">
+                      <a:solidFill>
+                        <a:srgbClr val="FFFFFF"/>
+                      </a:solidFill>
+                      <a:prstDash val="solid"/>
+                      <a:round/>
+                      <a:headEnd type="none" w="med" len="med"/>
+                      <a:tailEnd type="none" w="med" len="med"/>
+                    </a:lnR>
+                    <a:lnT w="12700" cap="flat" cmpd="sng" algn="ctr">
+                      <a:solidFill>
+                        <a:srgbClr val="FFFFFF"/>
+                      </a:solidFill>
+                      <a:prstDash val="solid"/>
+                      <a:round/>
+                      <a:headEnd type="none" w="med" len="med"/>
+                      <a:tailEnd type="none" w="med" len="med"/>
+                    </a:lnT>
+                    <a:lnB w="12700" cap="flat" cmpd="sng" algn="ctr">
+                      <a:solidFill>
+                        <a:srgbClr val="FFFFFF"/>
+                      </a:solidFill>
+                      <a:prstDash val="solid"/>
+                      <a:round/>
+                      <a:headEnd type="none" w="med" len="med"/>
+                      <a:tailEnd type="none" w="med" len="med"/>
+                    </a:lnB>
+                    <a:solidFill>
+                      <a:schemeClr val="bg2"/>
+                    </a:solidFill>
+                  </a:tcPr>
+                </a:tc>
+                <a:tc>
+                  <a:txBody>
+                    <a:bodyPr/>
+                    <a:lstStyle/>
+                    <a:p>
+                      <a:pPr algn="l" indent="0" marL="0">
+                        <a:buNone/>
+                      </a:pPr>
+                      <a:r>
+                        <a:rPr lang="en-US" sz="1300" dirty="0">
+                          <a:solidFill>
+                            <a:schemeClr val="tx1"/>
+                          </a:solidFill>
+                        </a:rPr>
+                        <a:t>Plus threat protection</a:t>
+                      </a:r>
+                      <a:endParaRPr lang="en-US" sz="1300" dirty="0"/>
+                    </a:p>
+                  </a:txBody>
+                  <a:tcPr marL="109728" marR="109728" marT="36576" marB="36576" anchor="ctr">
+                    <a:lnL w="12700" cap="flat" cmpd="sng" algn="ctr">
+                      <a:solidFill>
+                        <a:srgbClr val="FFFFFF"/>
+                      </a:solidFill>
+                      <a:prstDash val="solid"/>
+                      <a:round/>
+                      <a:headEnd type="none" w="med" len="med"/>
+                      <a:tailEnd type="none" w="med" len="med"/>
+                    </a:lnL>
+                    <a:lnR w="12700" cap="flat" cmpd="sng" algn="ctr">
+                      <a:solidFill>
+                        <a:srgbClr val="FFFFFF"/>
+                      </a:solidFill>
+                      <a:prstDash val="solid"/>
+                      <a:round/>
+                      <a:headEnd type="none" w="med" len="med"/>
+                      <a:tailEnd type="none" w="med" len="med"/>
+                    </a:lnR>
+                    <a:lnT w="12700" cap="flat" cmpd="sng" algn="ctr">
+                      <a:solidFill>
+                        <a:srgbClr val="FFFFFF"/>
+                      </a:solidFill>
+                      <a:prstDash val="solid"/>
+                      <a:round/>
+                      <a:headEnd type="none" w="med" len="med"/>
+                      <a:tailEnd type="none" w="med" len="med"/>
+                    </a:lnT>
+                    <a:lnB w="12700" cap="flat" cmpd="sng" algn="ctr">
+                      <a:solidFill>
+                        <a:srgbClr val="FFFFFF"/>
+                      </a:solidFill>
+                      <a:prstDash val="solid"/>
+                      <a:round/>
+                      <a:headEnd type="none" w="med" len="med"/>
+                      <a:tailEnd type="none" w="med" len="med"/>
+                    </a:lnB>
+                    <a:solidFill>
+                      <a:schemeClr val="bg2"/>
+                    </a:solidFill>
+                  </a:tcPr>
+                </a:tc>
+                <a:tc>
+                  <a:txBody>
+                    <a:bodyPr/>
+                    <a:lstStyle/>
+                    <a:p>
+                      <a:pPr algn="l" indent="0" marL="0">
+                        <a:buNone/>
+                      </a:pPr>
+                      <a:r>
+                        <a:rPr lang="en-US" sz="1300" dirty="0">
+                          <a:solidFill>
+                            <a:schemeClr val="tx1"/>
+                          </a:solidFill>
+                        </a:rPr>
+                        <a:t>–</a:t>
+                      </a:r>
+                      <a:endParaRPr lang="en-US" sz="1300" dirty="0"/>
+                    </a:p>
+                  </a:txBody>
+                  <a:tcPr marL="109728" marR="109728" marT="36576" marB="36576" anchor="ctr">
+                    <a:lnL w="12700" cap="flat" cmpd="sng" algn="ctr">
+                      <a:solidFill>
+                        <a:srgbClr val="FFFFFF"/>
+                      </a:solidFill>
+                      <a:prstDash val="solid"/>
+                      <a:round/>
+                      <a:headEnd type="none" w="med" len="med"/>
+                      <a:tailEnd type="none" w="med" len="med"/>
+                    </a:lnL>
+                    <a:lnR w="12700" cap="flat" cmpd="sng" algn="ctr">
+                      <a:solidFill>
+                        <a:srgbClr val="FFFFFF"/>
+                      </a:solidFill>
+                      <a:prstDash val="solid"/>
+                      <a:round/>
+                      <a:headEnd type="none" w="med" len="med"/>
+                      <a:tailEnd type="none" w="med" len="med"/>
+                    </a:lnR>
+                    <a:lnT w="12700" cap="flat" cmpd="sng" algn="ctr">
+                      <a:solidFill>
+                        <a:srgbClr val="FFFFFF"/>
+                      </a:solidFill>
+                      <a:prstDash val="solid"/>
+                      <a:round/>
+                      <a:headEnd type="none" w="med" len="med"/>
+                      <a:tailEnd type="none" w="med" len="med"/>
+                    </a:lnT>
+                    <a:lnB w="12700" cap="flat" cmpd="sng" algn="ctr">
+                      <a:solidFill>
+                        <a:srgbClr val="FFFFFF"/>
+                      </a:solidFill>
+                      <a:prstDash val="solid"/>
+                      <a:round/>
+                      <a:headEnd type="none" w="med" len="med"/>
+                      <a:tailEnd type="none" w="med" len="med"/>
+                    </a:lnB>
+                    <a:solidFill>
+                      <a:schemeClr val="bg2"/>
+                    </a:solidFill>
+                  </a:tcPr>
+                </a:tc>
+                <a:tc>
+                  <a:txBody>
+                    <a:bodyPr/>
+                    <a:lstStyle/>
+                    <a:p>
+                      <a:pPr algn="l" indent="0" marL="0">
+                        <a:buNone/>
+                      </a:pPr>
+                      <a:r>
+                        <a:rPr lang="en-US" sz="1300" dirty="0">
+                          <a:solidFill>
+                            <a:schemeClr val="tx1"/>
+                          </a:solidFill>
+                        </a:rPr>
+                        <a:t>USD 0.02/MAU (SAR 750 at 10k MAU)</a:t>
+                      </a:r>
+                      <a:endParaRPr lang="en-US" sz="1300" dirty="0"/>
+                    </a:p>
+                  </a:txBody>
+                  <a:tcPr marL="109728" marR="109728" marT="36576" marB="36576" anchor="ctr">
+                    <a:lnL w="12700" cap="flat" cmpd="sng" algn="ctr">
+                      <a:solidFill>
+                        <a:srgbClr val="FFFFFF"/>
+                      </a:solidFill>
+                      <a:prstDash val="solid"/>
+                      <a:round/>
+                      <a:headEnd type="none" w="med" len="med"/>
+                      <a:tailEnd type="none" w="med" len="med"/>
+                    </a:lnL>
+                    <a:lnR w="12700" cap="flat" cmpd="sng" algn="ctr">
+                      <a:solidFill>
+                        <a:srgbClr val="FFFFFF"/>
+                      </a:solidFill>
+                      <a:prstDash val="solid"/>
+                      <a:round/>
+                      <a:headEnd type="none" w="med" len="med"/>
+                      <a:tailEnd type="none" w="med" len="med"/>
+                    </a:lnR>
+                    <a:lnT w="12700" cap="flat" cmpd="sng" algn="ctr">
+                      <a:solidFill>
+                        <a:srgbClr val="FFFFFF"/>
+                      </a:solidFill>
+                      <a:prstDash val="solid"/>
+                      <a:round/>
+                      <a:headEnd type="none" w="med" len="med"/>
+                      <a:tailEnd type="none" w="med" len="med"/>
+                    </a:lnT>
+                    <a:lnB w="12700" cap="flat" cmpd="sng" algn="ctr">
+                      <a:solidFill>
+                        <a:srgbClr val="FFFFFF"/>
+                      </a:solidFill>
+                      <a:prstDash val="solid"/>
+                      <a:round/>
+                      <a:headEnd type="none" w="med" len="med"/>
+                      <a:tailEnd type="none" w="med" len="med"/>
+                    </a:lnB>
+                    <a:solidFill>
+                      <a:schemeClr val="bg2"/>
+                    </a:solidFill>
+                  </a:tcPr>
+                </a:tc>
+              </a:tr>
+              <a:tr h="438912">
+                <a:tc>
+                  <a:txBody>
+                    <a:bodyPr/>
+                    <a:lstStyle/>
+                    <a:p>
+                      <a:pPr algn="l" indent="0" marL="0">
+                        <a:buNone/>
+                      </a:pPr>
+                      <a:r>
+                        <a:rPr lang="en-US" sz="1300" b="1" dirty="0">
+                          <a:solidFill>
+                            <a:schemeClr val="tx1"/>
+                          </a:solidFill>
+                        </a:rPr>
+                        <a:t>WSO2</a:t>
+                      </a:r>
+                      <a:endParaRPr lang="en-US" sz="1300" dirty="0"/>
+                    </a:p>
+                  </a:txBody>
+                  <a:tcPr marL="109728" marR="109728" marT="36576" marB="36576" anchor="ctr">
+                    <a:lnL w="12700" cap="flat" cmpd="sng" algn="ctr">
+                      <a:solidFill>
+                        <a:srgbClr val="FFFFFF"/>
+                      </a:solidFill>
+                      <a:prstDash val="solid"/>
+                      <a:round/>
+                      <a:headEnd type="none" w="med" len="med"/>
+                      <a:tailEnd type="none" w="med" len="med"/>
+                    </a:lnL>
+                    <a:lnR w="12700" cap="flat" cmpd="sng" algn="ctr">
+                      <a:solidFill>
+                        <a:srgbClr val="FFFFFF"/>
+                      </a:solidFill>
+                      <a:prstDash val="solid"/>
+                      <a:round/>
+                      <a:headEnd type="none" w="med" len="med"/>
+                      <a:tailEnd type="none" w="med" len="med"/>
+                    </a:lnR>
+                    <a:lnT w="12700" cap="flat" cmpd="sng" algn="ctr">
+                      <a:solidFill>
+                        <a:srgbClr val="FFFFFF"/>
+                      </a:solidFill>
+                      <a:prstDash val="solid"/>
+                      <a:round/>
+                      <a:headEnd type="none" w="med" len="med"/>
+                      <a:tailEnd type="none" w="med" len="med"/>
+                    </a:lnT>
+                    <a:lnB w="12700" cap="flat" cmpd="sng" algn="ctr">
+                      <a:solidFill>
+                        <a:srgbClr val="FFFFFF"/>
+                      </a:solidFill>
+                      <a:prstDash val="solid"/>
+                      <a:round/>
+                      <a:headEnd type="none" w="med" len="med"/>
+                      <a:tailEnd type="none" w="med" len="med"/>
+                    </a:lnB>
+                    <a:solidFill>
+                      <a:schemeClr val="bg1"/>
+                    </a:solidFill>
+                  </a:tcPr>
+                </a:tc>
+                <a:tc>
+                  <a:txBody>
+                    <a:bodyPr/>
+                    <a:lstStyle/>
+                    <a:p>
+                      <a:pPr algn="l" indent="0" marL="0">
+                        <a:buNone/>
+                      </a:pPr>
+                      <a:r>
+                        <a:rPr lang="en-US" sz="1300" dirty="0">
+                          <a:solidFill>
+                            <a:schemeClr val="tx1"/>
+                          </a:solidFill>
+                        </a:rPr>
+                        <a:t>Sift risk score</a:t>
+                      </a:r>
+                      <a:endParaRPr lang="en-US" sz="1300" dirty="0"/>
+                    </a:p>
+                  </a:txBody>
+                  <a:tcPr marL="109728" marR="109728" marT="36576" marB="36576" anchor="ctr">
+                    <a:lnL w="12700" cap="flat" cmpd="sng" algn="ctr">
+                      <a:solidFill>
+                        <a:srgbClr val="FFFFFF"/>
+                      </a:solidFill>
+                      <a:prstDash val="solid"/>
+                      <a:round/>
+                      <a:headEnd type="none" w="med" len="med"/>
+                      <a:tailEnd type="none" w="med" len="med"/>
+                    </a:lnL>
+                    <a:lnR w="12700" cap="flat" cmpd="sng" algn="ctr">
+                      <a:solidFill>
+                        <a:srgbClr val="FFFFFF"/>
+                      </a:solidFill>
+                      <a:prstDash val="solid"/>
+                      <a:round/>
+                      <a:headEnd type="none" w="med" len="med"/>
+                      <a:tailEnd type="none" w="med" len="med"/>
+                    </a:lnR>
+                    <a:lnT w="12700" cap="flat" cmpd="sng" algn="ctr">
+                      <a:solidFill>
+                        <a:srgbClr val="FFFFFF"/>
+                      </a:solidFill>
+                      <a:prstDash val="solid"/>
+                      <a:round/>
+                      <a:headEnd type="none" w="med" len="med"/>
+                      <a:tailEnd type="none" w="med" len="med"/>
+                    </a:lnT>
+                    <a:lnB w="12700" cap="flat" cmpd="sng" algn="ctr">
+                      <a:solidFill>
+                        <a:srgbClr val="FFFFFF"/>
+                      </a:solidFill>
+                      <a:prstDash val="solid"/>
+                      <a:round/>
+                      <a:headEnd type="none" w="med" len="med"/>
+                      <a:tailEnd type="none" w="med" len="med"/>
+                    </a:lnB>
+                    <a:solidFill>
+                      <a:schemeClr val="bg1"/>
+                    </a:solidFill>
+                  </a:tcPr>
+                </a:tc>
+                <a:tc>
+                  <a:txBody>
+                    <a:bodyPr/>
+                    <a:lstStyle/>
+                    <a:p>
+                      <a:pPr algn="l" indent="0" marL="0">
+                        <a:buNone/>
+                      </a:pPr>
+                      <a:r>
+                        <a:rPr lang="en-US" sz="1300" dirty="0">
+                          <a:solidFill>
+                            <a:schemeClr val="tx1"/>
+                          </a:solidFill>
+                        </a:rPr>
+                        <a:t>Agent ID, LoginFlow AI</a:t>
+                      </a:r>
+                      <a:endParaRPr lang="en-US" sz="1300" dirty="0"/>
+                    </a:p>
+                  </a:txBody>
+                  <a:tcPr marL="109728" marR="109728" marT="36576" marB="36576" anchor="ctr">
+                    <a:lnL w="12700" cap="flat" cmpd="sng" algn="ctr">
+                      <a:solidFill>
+                        <a:srgbClr val="FFFFFF"/>
+                      </a:solidFill>
+                      <a:prstDash val="solid"/>
+                      <a:round/>
+                      <a:headEnd type="none" w="med" len="med"/>
+                      <a:tailEnd type="none" w="med" len="med"/>
+                    </a:lnL>
+                    <a:lnR w="12700" cap="flat" cmpd="sng" algn="ctr">
+                      <a:solidFill>
+                        <a:srgbClr val="FFFFFF"/>
+                      </a:solidFill>
+                      <a:prstDash val="solid"/>
+                      <a:round/>
+                      <a:headEnd type="none" w="med" len="med"/>
+                      <a:tailEnd type="none" w="med" len="med"/>
+                    </a:lnR>
+                    <a:lnT w="12700" cap="flat" cmpd="sng" algn="ctr">
+                      <a:solidFill>
+                        <a:srgbClr val="FFFFFF"/>
+                      </a:solidFill>
+                      <a:prstDash val="solid"/>
+                      <a:round/>
+                      <a:headEnd type="none" w="med" len="med"/>
+                      <a:tailEnd type="none" w="med" len="med"/>
+                    </a:lnT>
+                    <a:lnB w="12700" cap="flat" cmpd="sng" algn="ctr">
+                      <a:solidFill>
+                        <a:srgbClr val="FFFFFF"/>
+                      </a:solidFill>
+                      <a:prstDash val="solid"/>
+                      <a:round/>
+                      <a:headEnd type="none" w="med" len="med"/>
+                      <a:tailEnd type="none" w="med" len="med"/>
+                    </a:lnB>
+                    <a:solidFill>
+                      <a:schemeClr val="bg1"/>
+                    </a:solidFill>
+                  </a:tcPr>
+                </a:tc>
+                <a:tc>
+                  <a:txBody>
+                    <a:bodyPr/>
+                    <a:lstStyle/>
+                    <a:p>
+                      <a:pPr algn="l" indent="0" marL="0">
+                        <a:buNone/>
+                      </a:pPr>
+                      <a:r>
+                        <a:rPr lang="en-US" sz="1300" dirty="0">
+                          <a:solidFill>
+                            <a:schemeClr val="tx1"/>
+                          </a:solidFill>
+                        </a:rPr>
+                        <a:t>Fraud: Enterprise add-on, not public</a:t>
+                      </a:r>
+                      <a:endParaRPr lang="en-US" sz="1300" dirty="0"/>
+                    </a:p>
+                  </a:txBody>
+                  <a:tcPr marL="109728" marR="109728" marT="36576" marB="36576" anchor="ctr">
+                    <a:lnL w="12700" cap="flat" cmpd="sng" algn="ctr">
+                      <a:solidFill>
+                        <a:srgbClr val="FFFFFF"/>
+                      </a:solidFill>
+                      <a:prstDash val="solid"/>
+                      <a:round/>
+                      <a:headEnd type="none" w="med" len="med"/>
+                      <a:tailEnd type="none" w="med" len="med"/>
+                    </a:lnL>
+                    <a:lnR w="12700" cap="flat" cmpd="sng" algn="ctr">
+                      <a:solidFill>
+                        <a:srgbClr val="FFFFFF"/>
+                      </a:solidFill>
+                      <a:prstDash val="solid"/>
+                      <a:round/>
+                      <a:headEnd type="none" w="med" len="med"/>
+                      <a:tailEnd type="none" w="med" len="med"/>
+                    </a:lnR>
+                    <a:lnT w="12700" cap="flat" cmpd="sng" algn="ctr">
+                      <a:solidFill>
+                        <a:srgbClr val="FFFFFF"/>
+                      </a:solidFill>
+                      <a:prstDash val="solid"/>
+                      <a:round/>
+                      <a:headEnd type="none" w="med" len="med"/>
+                      <a:tailEnd type="none" w="med" len="med"/>
+                    </a:lnT>
+                    <a:lnB w="12700" cap="flat" cmpd="sng" algn="ctr">
+                      <a:solidFill>
+                        <a:srgbClr val="FFFFFF"/>
+                      </a:solidFill>
+                      <a:prstDash val="solid"/>
+                      <a:round/>
+                      <a:headEnd type="none" w="med" len="med"/>
+                      <a:tailEnd type="none" w="med" len="med"/>
+                    </a:lnB>
+                    <a:solidFill>
+                      <a:schemeClr val="bg1"/>
+                    </a:solidFill>
+                  </a:tcPr>
+                </a:tc>
+              </a:tr>
+              <a:tr h="438912">
+                <a:tc>
+                  <a:txBody>
+                    <a:bodyPr/>
+                    <a:lstStyle/>
+                    <a:p>
+                      <a:pPr algn="l" indent="0" marL="0">
+                        <a:buNone/>
+                      </a:pPr>
+                      <a:r>
+                        <a:rPr lang="en-US" sz="1300" b="1" dirty="0">
+                          <a:solidFill>
+                            <a:schemeClr val="tx1"/>
+                          </a:solidFill>
+                        </a:rPr>
+                        <a:t>Managed Keycloak</a:t>
+                      </a:r>
+                      <a:endParaRPr lang="en-US" sz="1300" dirty="0"/>
+                    </a:p>
+                  </a:txBody>
+                  <a:tcPr marL="109728" marR="109728" marT="36576" marB="36576" anchor="ctr">
+                    <a:lnL w="12700" cap="flat" cmpd="sng" algn="ctr">
+                      <a:solidFill>
+                        <a:srgbClr val="FFFFFF"/>
+                      </a:solidFill>
+                      <a:prstDash val="solid"/>
+                      <a:round/>
+                      <a:headEnd type="none" w="med" len="med"/>
+                      <a:tailEnd type="none" w="med" len="med"/>
+                    </a:lnL>
+                    <a:lnR w="12700" cap="flat" cmpd="sng" algn="ctr">
+                      <a:solidFill>
+                        <a:srgbClr val="FFFFFF"/>
+                      </a:solidFill>
+                      <a:prstDash val="solid"/>
+                      <a:round/>
+                      <a:headEnd type="none" w="med" len="med"/>
+                      <a:tailEnd type="none" w="med" len="med"/>
+                    </a:lnR>
+                    <a:lnT w="12700" cap="flat" cmpd="sng" algn="ctr">
+                      <a:solidFill>
+                        <a:srgbClr val="FFFFFF"/>
+                      </a:solidFill>
+                      <a:prstDash val="solid"/>
+                      <a:round/>
+                      <a:headEnd type="none" w="med" len="med"/>
+                      <a:tailEnd type="none" w="med" len="med"/>
+                    </a:lnT>
+                    <a:lnB w="12700" cap="flat" cmpd="sng" algn="ctr">
+                      <a:solidFill>
+                        <a:srgbClr val="FFFFFF"/>
+                      </a:solidFill>
+                      <a:prstDash val="solid"/>
+                      <a:round/>
+                      <a:headEnd type="none" w="med" len="med"/>
+                      <a:tailEnd type="none" w="med" len="med"/>
+                    </a:lnB>
+                    <a:solidFill>
+                      <a:schemeClr val="bg2"/>
+                    </a:solidFill>
+                  </a:tcPr>
+                </a:tc>
+                <a:tc>
+                  <a:txBody>
+                    <a:bodyPr/>
+                    <a:lstStyle/>
+                    <a:p>
+                      <a:pPr algn="l" indent="0" marL="0">
+                        <a:buNone/>
+                      </a:pPr>
+                      <a:r>
+                        <a:rPr lang="en-US" sz="1300" dirty="0">
+                          <a:solidFill>
+                            <a:schemeClr val="tx1"/>
+                          </a:solidFill>
+                        </a:rPr>
+                        <a:t>None</a:t>
+                      </a:r>
+                      <a:endParaRPr lang="en-US" sz="1300" dirty="0"/>
+                    </a:p>
+                  </a:txBody>
+                  <a:tcPr marL="109728" marR="109728" marT="36576" marB="36576" anchor="ctr">
+                    <a:lnL w="12700" cap="flat" cmpd="sng" algn="ctr">
+                      <a:solidFill>
+                        <a:srgbClr val="FFFFFF"/>
+                      </a:solidFill>
+                      <a:prstDash val="solid"/>
+                      <a:round/>
+                      <a:headEnd type="none" w="med" len="med"/>
+                      <a:tailEnd type="none" w="med" len="med"/>
+                    </a:lnL>
+                    <a:lnR w="12700" cap="flat" cmpd="sng" algn="ctr">
+                      <a:solidFill>
+                        <a:srgbClr val="FFFFFF"/>
+                      </a:solidFill>
+                      <a:prstDash val="solid"/>
+                      <a:round/>
+                      <a:headEnd type="none" w="med" len="med"/>
+                      <a:tailEnd type="none" w="med" len="med"/>
+                    </a:lnR>
+                    <a:lnT w="12700" cap="flat" cmpd="sng" algn="ctr">
+                      <a:solidFill>
+                        <a:srgbClr val="FFFFFF"/>
+                      </a:solidFill>
+                      <a:prstDash val="solid"/>
+                      <a:round/>
+                      <a:headEnd type="none" w="med" len="med"/>
+                      <a:tailEnd type="none" w="med" len="med"/>
+                    </a:lnT>
+                    <a:lnB w="12700" cap="flat" cmpd="sng" algn="ctr">
+                      <a:solidFill>
+                        <a:srgbClr val="FFFFFF"/>
+                      </a:solidFill>
+                      <a:prstDash val="solid"/>
+                      <a:round/>
+                      <a:headEnd type="none" w="med" len="med"/>
+                      <a:tailEnd type="none" w="med" len="med"/>
+                    </a:lnB>
+                    <a:solidFill>
+                      <a:schemeClr val="bg2"/>
+                    </a:solidFill>
+                  </a:tcPr>
+                </a:tc>
+                <a:tc>
+                  <a:txBody>
+                    <a:bodyPr/>
+                    <a:lstStyle/>
+                    <a:p>
+                      <a:pPr algn="l" indent="0" marL="0">
+                        <a:buNone/>
+                      </a:pPr>
+                      <a:r>
+                        <a:rPr lang="en-US" sz="1300" dirty="0">
+                          <a:solidFill>
+                            <a:schemeClr val="tx1"/>
+                          </a:solidFill>
+                        </a:rPr>
+                        <a:t>Admin MCP server only</a:t>
+                      </a:r>
+                      <a:endParaRPr lang="en-US" sz="1300" dirty="0"/>
+                    </a:p>
+                  </a:txBody>
+                  <a:tcPr marL="109728" marR="109728" marT="36576" marB="36576" anchor="ctr">
+                    <a:lnL w="12700" cap="flat" cmpd="sng" algn="ctr">
+                      <a:solidFill>
+                        <a:srgbClr val="FFFFFF"/>
+                      </a:solidFill>
+                      <a:prstDash val="solid"/>
+                      <a:round/>
+                      <a:headEnd type="none" w="med" len="med"/>
+                      <a:tailEnd type="none" w="med" len="med"/>
+                    </a:lnL>
+                    <a:lnR w="12700" cap="flat" cmpd="sng" algn="ctr">
+                      <a:solidFill>
+                        <a:srgbClr val="FFFFFF"/>
+                      </a:solidFill>
+                      <a:prstDash val="solid"/>
+                      <a:round/>
+                      <a:headEnd type="none" w="med" len="med"/>
+                      <a:tailEnd type="none" w="med" len="med"/>
+                    </a:lnR>
+                    <a:lnT w="12700" cap="flat" cmpd="sng" algn="ctr">
+                      <a:solidFill>
+                        <a:srgbClr val="FFFFFF"/>
+                      </a:solidFill>
+                      <a:prstDash val="solid"/>
+                      <a:round/>
+                      <a:headEnd type="none" w="med" len="med"/>
+                      <a:tailEnd type="none" w="med" len="med"/>
+                    </a:lnT>
+                    <a:lnB w="12700" cap="flat" cmpd="sng" algn="ctr">
+                      <a:solidFill>
+                        <a:srgbClr val="FFFFFF"/>
+                      </a:solidFill>
+                      <a:prstDash val="solid"/>
+                      <a:round/>
+                      <a:headEnd type="none" w="med" len="med"/>
+                      <a:tailEnd type="none" w="med" len="med"/>
+                    </a:lnB>
+                    <a:solidFill>
+                      <a:schemeClr val="bg2"/>
+                    </a:solidFill>
+                  </a:tcPr>
+                </a:tc>
+                <a:tc>
+                  <a:txBody>
+                    <a:bodyPr/>
+                    <a:lstStyle/>
+                    <a:p>
+                      <a:pPr algn="l" indent="0" marL="0">
+                        <a:buNone/>
+                      </a:pPr>
+                      <a:r>
+                        <a:rPr lang="en-US" sz="1300" dirty="0">
+                          <a:solidFill>
+                            <a:schemeClr val="tx1"/>
+                          </a:solidFill>
+                        </a:rPr>
+                        <a:t>–</a:t>
+                      </a:r>
+                      <a:endParaRPr lang="en-US" sz="1300" dirty="0"/>
+                    </a:p>
+                  </a:txBody>
+                  <a:tcPr marL="109728" marR="109728" marT="36576" marB="36576" anchor="ctr">
+                    <a:lnL w="12700" cap="flat" cmpd="sng" algn="ctr">
+                      <a:solidFill>
+                        <a:srgbClr val="FFFFFF"/>
+                      </a:solidFill>
+                      <a:prstDash val="solid"/>
+                      <a:round/>
+                      <a:headEnd type="none" w="med" len="med"/>
+                      <a:tailEnd type="none" w="med" len="med"/>
+                    </a:lnL>
+                    <a:lnR w="12700" cap="flat" cmpd="sng" algn="ctr">
+                      <a:solidFill>
+                        <a:srgbClr val="FFFFFF"/>
+                      </a:solidFill>
+                      <a:prstDash val="solid"/>
+                      <a:round/>
+                      <a:headEnd type="none" w="med" len="med"/>
+                      <a:tailEnd type="none" w="med" len="med"/>
+                    </a:lnR>
+                    <a:lnT w="12700" cap="flat" cmpd="sng" algn="ctr">
+                      <a:solidFill>
+                        <a:srgbClr val="FFFFFF"/>
+                      </a:solidFill>
+                      <a:prstDash val="solid"/>
+                      <a:round/>
+                      <a:headEnd type="none" w="med" len="med"/>
+                      <a:tailEnd type="none" w="med" len="med"/>
+                    </a:lnT>
+                    <a:lnB w="12700" cap="flat" cmpd="sng" algn="ctr">
+                      <a:solidFill>
+                        <a:srgbClr val="FFFFFF"/>
+                      </a:solidFill>
+                      <a:prstDash val="solid"/>
+                      <a:round/>
+                      <a:headEnd type="none" w="med" len="med"/>
+                      <a:tailEnd type="none" w="med" len="med"/>
+                    </a:lnB>
+                    <a:solidFill>
+                      <a:schemeClr val="bg2"/>
+                    </a:solidFill>
+                  </a:tcPr>
+                </a:tc>
+              </a:tr>
+              <a:tr h="438912">
+                <a:tc>
+                  <a:txBody>
+                    <a:bodyPr/>
+                    <a:lstStyle/>
+                    <a:p>
+                      <a:pPr algn="l" indent="0" marL="0">
+                        <a:buNone/>
+                      </a:pPr>
+                      <a:r>
+                        <a:rPr lang="en-US" sz="1300" b="1" dirty="0">
+                          <a:solidFill>
+                            <a:schemeClr val="tx1"/>
+                          </a:solidFill>
+                        </a:rPr>
+                        <a:t>Oracle OCI IAM</a:t>
+                      </a:r>
+                      <a:endParaRPr lang="en-US" sz="1300" dirty="0"/>
+                    </a:p>
+                  </a:txBody>
+                  <a:tcPr marL="109728" marR="109728" marT="36576" marB="36576" anchor="ctr">
+                    <a:lnL w="12700" cap="flat" cmpd="sng" algn="ctr">
+                      <a:solidFill>
+                        <a:srgbClr val="FFFFFF"/>
+                      </a:solidFill>
+                      <a:prstDash val="solid"/>
+                      <a:round/>
+                      <a:headEnd type="none" w="med" len="med"/>
+                      <a:tailEnd type="none" w="med" len="med"/>
+                    </a:lnL>
+                    <a:lnR w="12700" cap="flat" cmpd="sng" algn="ctr">
+                      <a:solidFill>
+                        <a:srgbClr val="FFFFFF"/>
+                      </a:solidFill>
+                      <a:prstDash val="solid"/>
+                      <a:round/>
+                      <a:headEnd type="none" w="med" len="med"/>
+                      <a:tailEnd type="none" w="med" len="med"/>
+                    </a:lnR>
+                    <a:lnT w="12700" cap="flat" cmpd="sng" algn="ctr">
+                      <a:solidFill>
+                        <a:srgbClr val="FFFFFF"/>
+                      </a:solidFill>
+                      <a:prstDash val="solid"/>
+                      <a:round/>
+                      <a:headEnd type="none" w="med" len="med"/>
+                      <a:tailEnd type="none" w="med" len="med"/>
+                    </a:lnT>
+                    <a:lnB w="12700" cap="flat" cmpd="sng" algn="ctr">
+                      <a:solidFill>
+                        <a:srgbClr val="FFFFFF"/>
+                      </a:solidFill>
+                      <a:prstDash val="solid"/>
+                      <a:round/>
+                      <a:headEnd type="none" w="med" len="med"/>
+                      <a:tailEnd type="none" w="med" len="med"/>
+                    </a:lnB>
+                    <a:solidFill>
+                      <a:schemeClr val="bg1"/>
+                    </a:solidFill>
+                  </a:tcPr>
+                </a:tc>
+                <a:tc>
+                  <a:txBody>
+                    <a:bodyPr/>
+                    <a:lstStyle/>
+                    <a:p>
+                      <a:pPr algn="l" indent="0" marL="0">
+                        <a:buNone/>
+                      </a:pPr>
+                      <a:r>
+                        <a:rPr lang="en-US" sz="1300" dirty="0">
+                          <a:solidFill>
+                            <a:schemeClr val="tx1"/>
+                          </a:solidFill>
+                        </a:rPr>
+                        <a:t>Rules-based risk, in-Kingdom</a:t>
+                      </a:r>
+                      <a:endParaRPr lang="en-US" sz="1300" dirty="0"/>
+                    </a:p>
+                  </a:txBody>
+                  <a:tcPr marL="109728" marR="109728" marT="36576" marB="36576" anchor="ctr">
+                    <a:lnL w="12700" cap="flat" cmpd="sng" algn="ctr">
+                      <a:solidFill>
+                        <a:srgbClr val="FFFFFF"/>
+                      </a:solidFill>
+                      <a:prstDash val="solid"/>
+                      <a:round/>
+                      <a:headEnd type="none" w="med" len="med"/>
+                      <a:tailEnd type="none" w="med" len="med"/>
+                    </a:lnL>
+                    <a:lnR w="12700" cap="flat" cmpd="sng" algn="ctr">
+                      <a:solidFill>
+                        <a:srgbClr val="FFFFFF"/>
+                      </a:solidFill>
+                      <a:prstDash val="solid"/>
+                      <a:round/>
+                      <a:headEnd type="none" w="med" len="med"/>
+                      <a:tailEnd type="none" w="med" len="med"/>
+                    </a:lnR>
+                    <a:lnT w="12700" cap="flat" cmpd="sng" algn="ctr">
+                      <a:solidFill>
+                        <a:srgbClr val="FFFFFF"/>
+                      </a:solidFill>
+                      <a:prstDash val="solid"/>
+                      <a:round/>
+                      <a:headEnd type="none" w="med" len="med"/>
+                      <a:tailEnd type="none" w="med" len="med"/>
+                    </a:lnT>
+                    <a:lnB w="12700" cap="flat" cmpd="sng" algn="ctr">
+                      <a:solidFill>
+                        <a:srgbClr val="FFFFFF"/>
+                      </a:solidFill>
+                      <a:prstDash val="solid"/>
+                      <a:round/>
+                      <a:headEnd type="none" w="med" len="med"/>
+                      <a:tailEnd type="none" w="med" len="med"/>
+                    </a:lnB>
+                    <a:solidFill>
+                      <a:schemeClr val="bg1"/>
+                    </a:solidFill>
+                  </a:tcPr>
+                </a:tc>
+                <a:tc>
+                  <a:txBody>
+                    <a:bodyPr/>
+                    <a:lstStyle/>
+                    <a:p>
+                      <a:pPr algn="l" indent="0" marL="0">
+                        <a:buNone/>
+                      </a:pPr>
+                      <a:r>
+                        <a:rPr lang="en-US" sz="1300" dirty="0">
+                          <a:solidFill>
+                            <a:schemeClr val="tx1"/>
+                          </a:solidFill>
+                        </a:rPr>
+                        <a:t>–</a:t>
+                      </a:r>
+                      <a:endParaRPr lang="en-US" sz="1300" dirty="0"/>
+                    </a:p>
+                  </a:txBody>
+                  <a:tcPr marL="109728" marR="109728" marT="36576" marB="36576" anchor="ctr">
+                    <a:lnL w="12700" cap="flat" cmpd="sng" algn="ctr">
+                      <a:solidFill>
+                        <a:srgbClr val="FFFFFF"/>
+                      </a:solidFill>
+                      <a:prstDash val="solid"/>
+                      <a:round/>
+                      <a:headEnd type="none" w="med" len="med"/>
+                      <a:tailEnd type="none" w="med" len="med"/>
+                    </a:lnL>
+                    <a:lnR w="12700" cap="flat" cmpd="sng" algn="ctr">
+                      <a:solidFill>
+                        <a:srgbClr val="FFFFFF"/>
+                      </a:solidFill>
+                      <a:prstDash val="solid"/>
+                      <a:round/>
+                      <a:headEnd type="none" w="med" len="med"/>
+                      <a:tailEnd type="none" w="med" len="med"/>
+                    </a:lnR>
+                    <a:lnT w="12700" cap="flat" cmpd="sng" algn="ctr">
+                      <a:solidFill>
+                        <a:srgbClr val="FFFFFF"/>
+                      </a:solidFill>
+                      <a:prstDash val="solid"/>
+                      <a:round/>
+                      <a:headEnd type="none" w="med" len="med"/>
+                      <a:tailEnd type="none" w="med" len="med"/>
+                    </a:lnT>
+                    <a:lnB w="12700" cap="flat" cmpd="sng" algn="ctr">
+                      <a:solidFill>
+                        <a:srgbClr val="FFFFFF"/>
+                      </a:solidFill>
+                      <a:prstDash val="solid"/>
+                      <a:round/>
+                      <a:headEnd type="none" w="med" len="med"/>
+                      <a:tailEnd type="none" w="med" len="med"/>
+                    </a:lnB>
+                    <a:solidFill>
+                      <a:schemeClr val="bg1"/>
+                    </a:solidFill>
+                  </a:tcPr>
+                </a:tc>
+                <a:tc>
+                  <a:txBody>
+                    <a:bodyPr/>
+                    <a:lstStyle/>
+                    <a:p>
+                      <a:pPr algn="l" indent="0" marL="0">
+                        <a:buNone/>
+                      </a:pPr>
+                      <a:r>
+                        <a:rPr lang="en-US" sz="1300" dirty="0">
+                          <a:solidFill>
+                            <a:schemeClr val="tx1"/>
+                          </a:solidFill>
+                        </a:rPr>
+                        <a:t>Included</a:t>
+                      </a:r>
+                      <a:endParaRPr lang="en-US" sz="1300" dirty="0"/>
+                    </a:p>
+                  </a:txBody>
+                  <a:tcPr marL="109728" marR="109728" marT="36576" marB="36576" anchor="ctr">
+                    <a:lnL w="12700" cap="flat" cmpd="sng" algn="ctr">
+                      <a:solidFill>
+                        <a:srgbClr val="FFFFFF"/>
+                      </a:solidFill>
+                      <a:prstDash val="solid"/>
+                      <a:round/>
+                      <a:headEnd type="none" w="med" len="med"/>
+                      <a:tailEnd type="none" w="med" len="med"/>
+                    </a:lnL>
+                    <a:lnR w="12700" cap="flat" cmpd="sng" algn="ctr">
+                      <a:solidFill>
+                        <a:srgbClr val="FFFFFF"/>
+                      </a:solidFill>
+                      <a:prstDash val="solid"/>
+                      <a:round/>
+                      <a:headEnd type="none" w="med" len="med"/>
+                      <a:tailEnd type="none" w="med" len="med"/>
+                    </a:lnR>
+                    <a:lnT w="12700" cap="flat" cmpd="sng" algn="ctr">
+                      <a:solidFill>
+                        <a:srgbClr val="FFFFFF"/>
+                      </a:solidFill>
+                      <a:prstDash val="solid"/>
+                      <a:round/>
+                      <a:headEnd type="none" w="med" len="med"/>
+                      <a:tailEnd type="none" w="med" len="med"/>
+                    </a:lnT>
+                    <a:lnB w="12700" cap="flat" cmpd="sng" algn="ctr">
+                      <a:solidFill>
+                        <a:srgbClr val="FFFFFF"/>
+                      </a:solidFill>
+                      <a:prstDash val="solid"/>
+                      <a:round/>
+                      <a:headEnd type="none" w="med" len="med"/>
+                      <a:tailEnd type="none" w="med" len="med"/>
+                    </a:lnB>
+                    <a:solidFill>
+                      <a:schemeClr val="bg1"/>
+                    </a:solidFill>
+                  </a:tcPr>
+                </a:tc>
+              </a:tr>
+            </a:tbl>
+          </a:graphicData>
+        </a:graphic>
+      </p:graphicFrame>
+      <p:sp>
+        <p:nvSpPr>
+          <p:cNvPr id="4" name="badge LuGlobe"/>
           <p:cNvSpPr/>
           <p:nvPr/>
         </p:nvSpPr>
         <p:spPr>
           <a:xfrm>
-            <a:off x="548640" y="1463040"/>
-            <a:ext cx="5440680" cy="2148840"/>
-          </a:xfrm>
-          <a:prstGeom prst="roundRect">
-            <a:avLst>
-              <a:gd name="adj" fmla="val 3404"/>
-            </a:avLst>
+            <a:off x="548640" y="5486400"/>
+            <a:ext cx="457200" cy="457200"/>
+          </a:xfrm>
+          <a:prstGeom prst="ellipse">
+            <a:avLst/>
           </a:prstGeom>
           <a:solidFill>
             <a:schemeClr val="bg2"/>
@@ -7118,29 +9991,9 @@
           <a:ln/>
         </p:spPr>
       </p:sp>
-      <p:sp>
-        <p:nvSpPr>
-          <p:cNvPr id="4" name="badge LuDatabase"/>
-          <p:cNvSpPr/>
-          <p:nvPr/>
-        </p:nvSpPr>
-        <p:spPr>
-          <a:xfrm>
-            <a:off x="822960" y="1737360"/>
-            <a:ext cx="548640" cy="548640"/>
-          </a:xfrm>
-          <a:prstGeom prst="ellipse">
-            <a:avLst/>
-          </a:prstGeom>
-          <a:solidFill>
-            <a:schemeClr val="bg1"/>
-          </a:solidFill>
-          <a:ln/>
-        </p:spPr>
-      </p:sp>
       <p:pic>
         <p:nvPicPr>
-          <p:cNvPr id="5" name="icon LuDatabase" descr="preencoded.png">    </p:cNvPr>
+          <p:cNvPr id="5" name="icon LuGlobe" descr="preencoded.png">    </p:cNvPr>
           <p:cNvPicPr>
             <a:picLocks noChangeAspect="1"/>
           </p:cNvPicPr>
@@ -7154,8 +10007,8 @@
         </p:blipFill>
         <p:spPr>
           <a:xfrm>
-            <a:off x="954634" y="1869034"/>
-            <a:ext cx="285293" cy="285293"/>
+            <a:off x="658368" y="5596128"/>
+            <a:ext cx="237744" cy="237744"/>
           </a:xfrm>
           <a:prstGeom prst="rect">
             <a:avLst/>
@@ -7164,14 +10017,14 @@
       </p:pic>
       <p:sp>
         <p:nvSpPr>
-          <p:cNvPr id="6" name="Text 3"/>
+          <p:cNvPr id="6" name="Text 2"/>
           <p:cNvSpPr txBox="1"/>
           <p:nvPr/>
         </p:nvSpPr>
         <p:spPr>
           <a:xfrm>
-            <a:off x="1554480" y="1810512"/>
-            <a:ext cx="4206240" cy="411480"/>
+            <a:off x="1143000" y="5550408"/>
+            <a:ext cx="10424160" cy="457200"/>
           </a:xfrm>
           <a:prstGeom prst="rect">
             <a:avLst/>
@@ -7187,606 +10040,12 @@
               <a:buNone/>
             </a:pPr>
             <a:r>
-              <a:rPr lang="en-US" sz="1800" b="1" dirty="0">
-                <a:solidFill>
-                  <a:schemeClr val="tx2"/>
+              <a:rPr lang="en-US" sz="1300" dirty="0">
+                <a:solidFill>
+                  <a:schemeClr val="accent5"/>
                 </a:solidFill>
               </a:rPr>
-              <a:t>PostgreSQL pricing</a:t>
-            </a:r>
-            <a:endParaRPr lang="en-US" sz="1800" dirty="0"/>
-          </a:p>
-        </p:txBody>
-      </p:sp>
-      <p:sp>
-        <p:nvSpPr>
-          <p:cNvPr id="7" name="Text 4"/>
-          <p:cNvSpPr txBox="1"/>
-          <p:nvPr/>
-        </p:nvSpPr>
-        <p:spPr>
-          <a:xfrm>
-            <a:off x="822960" y="2423160"/>
-            <a:ext cx="4892040" cy="685800"/>
-          </a:xfrm>
-          <a:prstGeom prst="rect">
-            <a:avLst/>
-          </a:prstGeom>
-          <a:noFill/>
-          <a:ln/>
-        </p:spPr>
-        <p:txBody>
-          <a:bodyPr wrap="square" lIns="0" tIns="0" rIns="0" bIns="0" rtlCol="0" anchor="t"/>
-          <a:lstStyle/>
-          <a:p>
-            <a:pPr indent="0" marL="0">
-              <a:buNone/>
-            </a:pPr>
-            <a:r>
-              <a:rPr lang="en-US" sz="1400" dirty="0">
-                <a:solidFill>
-                  <a:schemeClr val="tx1"/>
-                </a:solidFill>
-              </a:rPr>
-              <a:t>Oracle doesn't publish the memory price or how HA replicas are billed. It is our largest cost line.</a:t>
-            </a:r>
-            <a:endParaRPr lang="en-US" sz="1400" dirty="0"/>
-          </a:p>
-        </p:txBody>
-      </p:sp>
-      <p:sp>
-        <p:nvSpPr>
-          <p:cNvPr id="8" name="Text 5"/>
-          <p:cNvSpPr txBox="1"/>
-          <p:nvPr/>
-        </p:nvSpPr>
-        <p:spPr>
-          <a:xfrm>
-            <a:off x="822960" y="3108960"/>
-            <a:ext cx="4892040" cy="365760"/>
-          </a:xfrm>
-          <a:prstGeom prst="rect">
-            <a:avLst/>
-          </a:prstGeom>
-          <a:noFill/>
-          <a:ln/>
-        </p:spPr>
-        <p:txBody>
-          <a:bodyPr wrap="square" lIns="0" tIns="0" rIns="0" bIns="0" rtlCol="0" anchor="t"/>
-          <a:lstStyle/>
-          <a:p>
-            <a:pPr indent="0" marL="0">
-              <a:buNone/>
-            </a:pPr>
-            <a:r>
-              <a:rPr lang="en-US" sz="1300" b="1" dirty="0">
-                <a:solidFill>
-                  <a:schemeClr val="accent1"/>
-                </a:solidFill>
-              </a:rPr>
-              <a:t>Next: Oracle sales call, cost estimator</a:t>
-            </a:r>
-            <a:endParaRPr lang="en-US" sz="1300" dirty="0"/>
-          </a:p>
-        </p:txBody>
-      </p:sp>
-      <p:sp>
-        <p:nvSpPr>
-          <p:cNvPr id="9" name="risk 2"/>
-          <p:cNvSpPr/>
-          <p:nvPr/>
-        </p:nvSpPr>
-        <p:spPr>
-          <a:xfrm>
-            <a:off x="6172200" y="1463040"/>
-            <a:ext cx="5440680" cy="2148840"/>
-          </a:xfrm>
-          <a:prstGeom prst="roundRect">
-            <a:avLst>
-              <a:gd name="adj" fmla="val 3404"/>
-            </a:avLst>
-          </a:prstGeom>
-          <a:solidFill>
-            <a:schemeClr val="bg2"/>
-          </a:solidFill>
-          <a:ln/>
-        </p:spPr>
-      </p:sp>
-      <p:sp>
-        <p:nvSpPr>
-          <p:cNvPr id="10" name="badge LuReceipt"/>
-          <p:cNvSpPr/>
-          <p:nvPr/>
-        </p:nvSpPr>
-        <p:spPr>
-          <a:xfrm>
-            <a:off x="6446520" y="1737360"/>
-            <a:ext cx="548640" cy="548640"/>
-          </a:xfrm>
-          <a:prstGeom prst="ellipse">
-            <a:avLst/>
-          </a:prstGeom>
-          <a:solidFill>
-            <a:schemeClr val="bg1"/>
-          </a:solidFill>
-          <a:ln/>
-        </p:spPr>
-      </p:sp>
-      <p:pic>
-        <p:nvPicPr>
-          <p:cNvPr id="11" name="icon LuReceipt" descr="preencoded.png">    </p:cNvPr>
-          <p:cNvPicPr>
-            <a:picLocks noChangeAspect="1"/>
-          </p:cNvPicPr>
-          <p:nvPr/>
-        </p:nvPicPr>
-        <p:blipFill>
-          <a:blip r:embed="rId2"/>
-          <a:stretch>
-            <a:fillRect/>
-          </a:stretch>
-        </p:blipFill>
-        <p:spPr>
-          <a:xfrm>
-            <a:off x="6578194" y="1869034"/>
-            <a:ext cx="285293" cy="285293"/>
-          </a:xfrm>
-          <a:prstGeom prst="rect">
-            <a:avLst/>
-          </a:prstGeom>
-        </p:spPr>
-      </p:pic>
-      <p:sp>
-        <p:nvSpPr>
-          <p:cNvPr id="12" name="Text 8"/>
-          <p:cNvSpPr txBox="1"/>
-          <p:nvPr/>
-        </p:nvSpPr>
-        <p:spPr>
-          <a:xfrm>
-            <a:off x="7178040" y="1810512"/>
-            <a:ext cx="4206240" cy="411480"/>
-          </a:xfrm>
-          <a:prstGeom prst="rect">
-            <a:avLst/>
-          </a:prstGeom>
-          <a:noFill/>
-          <a:ln/>
-        </p:spPr>
-        <p:txBody>
-          <a:bodyPr wrap="square" lIns="0" tIns="0" rIns="0" bIns="0" rtlCol="0" anchor="t"/>
-          <a:lstStyle/>
-          <a:p>
-            <a:pPr indent="0" marL="0">
-              <a:buNone/>
-            </a:pPr>
-            <a:r>
-              <a:rPr lang="en-US" sz="1800" b="1" dirty="0">
-                <a:solidFill>
-                  <a:schemeClr val="tx2"/>
-                </a:solidFill>
-              </a:rPr>
-              <a:t>Third-party costs</a:t>
-            </a:r>
-            <a:endParaRPr lang="en-US" sz="1800" dirty="0"/>
-          </a:p>
-        </p:txBody>
-      </p:sp>
-      <p:sp>
-        <p:nvSpPr>
-          <p:cNvPr id="13" name="Text 9"/>
-          <p:cNvSpPr txBox="1"/>
-          <p:nvPr/>
-        </p:nvSpPr>
-        <p:spPr>
-          <a:xfrm>
-            <a:off x="6446520" y="2423160"/>
-            <a:ext cx="4892040" cy="685800"/>
-          </a:xfrm>
-          <a:prstGeom prst="rect">
-            <a:avLst/>
-          </a:prstGeom>
-          <a:noFill/>
-          <a:ln/>
-        </p:spPr>
-        <p:txBody>
-          <a:bodyPr wrap="square" lIns="0" tIns="0" rIns="0" bIns="0" rtlCol="0" anchor="t"/>
-          <a:lstStyle/>
-          <a:p>
-            <a:pPr indent="0" marL="0">
-              <a:buNone/>
-            </a:pPr>
-            <a:r>
-              <a:rPr lang="en-US" sz="1400" dirty="0">
-                <a:solidFill>
-                  <a:schemeClr val="tx1"/>
-                </a:solidFill>
-              </a:rPr>
-              <a:t>SOC partner, pentests, ISO certification and ZATCA provider are placeholders.</a:t>
-            </a:r>
-            <a:endParaRPr lang="en-US" sz="1400" dirty="0"/>
-          </a:p>
-        </p:txBody>
-      </p:sp>
-      <p:sp>
-        <p:nvSpPr>
-          <p:cNvPr id="14" name="Text 10"/>
-          <p:cNvSpPr txBox="1"/>
-          <p:nvPr/>
-        </p:nvSpPr>
-        <p:spPr>
-          <a:xfrm>
-            <a:off x="6446520" y="3108960"/>
-            <a:ext cx="4892040" cy="365760"/>
-          </a:xfrm>
-          <a:prstGeom prst="rect">
-            <a:avLst/>
-          </a:prstGeom>
-          <a:noFill/>
-          <a:ln/>
-        </p:spPr>
-        <p:txBody>
-          <a:bodyPr wrap="square" lIns="0" tIns="0" rIns="0" bIns="0" rtlCol="0" anchor="t"/>
-          <a:lstStyle/>
-          <a:p>
-            <a:pPr indent="0" marL="0">
-              <a:buNone/>
-            </a:pPr>
-            <a:r>
-              <a:rPr lang="en-US" sz="1300" b="1" dirty="0">
-                <a:solidFill>
-                  <a:schemeClr val="accent1"/>
-                </a:solidFill>
-              </a:rPr>
-              <a:t>Next: Get three quotes each</a:t>
-            </a:r>
-            <a:endParaRPr lang="en-US" sz="1300" dirty="0"/>
-          </a:p>
-        </p:txBody>
-      </p:sp>
-      <p:sp>
-        <p:nvSpPr>
-          <p:cNvPr id="15" name="risk 3"/>
-          <p:cNvSpPr/>
-          <p:nvPr/>
-        </p:nvSpPr>
-        <p:spPr>
-          <a:xfrm>
-            <a:off x="548640" y="3840480"/>
-            <a:ext cx="5440680" cy="2148840"/>
-          </a:xfrm>
-          <a:prstGeom prst="roundRect">
-            <a:avLst>
-              <a:gd name="adj" fmla="val 3404"/>
-            </a:avLst>
-          </a:prstGeom>
-          <a:solidFill>
-            <a:schemeClr val="bg2"/>
-          </a:solidFill>
-          <a:ln/>
-        </p:spPr>
-      </p:sp>
-      <p:sp>
-        <p:nvSpPr>
-          <p:cNvPr id="16" name="badge LuGauge"/>
-          <p:cNvSpPr/>
-          <p:nvPr/>
-        </p:nvSpPr>
-        <p:spPr>
-          <a:xfrm>
-            <a:off x="822960" y="4114800"/>
-            <a:ext cx="548640" cy="548640"/>
-          </a:xfrm>
-          <a:prstGeom prst="ellipse">
-            <a:avLst/>
-          </a:prstGeom>
-          <a:solidFill>
-            <a:schemeClr val="bg1"/>
-          </a:solidFill>
-          <a:ln/>
-        </p:spPr>
-      </p:sp>
-      <p:pic>
-        <p:nvPicPr>
-          <p:cNvPr id="17" name="icon LuGauge" descr="preencoded.png">    </p:cNvPr>
-          <p:cNvPicPr>
-            <a:picLocks noChangeAspect="1"/>
-          </p:cNvPicPr>
-          <p:nvPr/>
-        </p:nvPicPr>
-        <p:blipFill>
-          <a:blip r:embed="rId3"/>
-          <a:stretch>
-            <a:fillRect/>
-          </a:stretch>
-        </p:blipFill>
-        <p:spPr>
-          <a:xfrm>
-            <a:off x="954634" y="4246474"/>
-            <a:ext cx="285293" cy="285293"/>
-          </a:xfrm>
-          <a:prstGeom prst="rect">
-            <a:avLst/>
-          </a:prstGeom>
-        </p:spPr>
-      </p:pic>
-      <p:sp>
-        <p:nvSpPr>
-          <p:cNvPr id="18" name="Text 13"/>
-          <p:cNvSpPr txBox="1"/>
-          <p:nvPr/>
-        </p:nvSpPr>
-        <p:spPr>
-          <a:xfrm>
-            <a:off x="1554480" y="4187952"/>
-            <a:ext cx="4206240" cy="411480"/>
-          </a:xfrm>
-          <a:prstGeom prst="rect">
-            <a:avLst/>
-          </a:prstGeom>
-          <a:noFill/>
-          <a:ln/>
-        </p:spPr>
-        <p:txBody>
-          <a:bodyPr wrap="square" lIns="0" tIns="0" rIns="0" bIns="0" rtlCol="0" anchor="t"/>
-          <a:lstStyle/>
-          <a:p>
-            <a:pPr indent="0" marL="0">
-              <a:buNone/>
-            </a:pPr>
-            <a:r>
-              <a:rPr lang="en-US" sz="1800" b="1" dirty="0">
-                <a:solidFill>
-                  <a:schemeClr val="tx2"/>
-                </a:solidFill>
-              </a:rPr>
-              <a:t>Pooled cell capacity</a:t>
-            </a:r>
-            <a:endParaRPr lang="en-US" sz="1800" dirty="0"/>
-          </a:p>
-        </p:txBody>
-      </p:sp>
-      <p:sp>
-        <p:nvSpPr>
-          <p:cNvPr id="19" name="Text 14"/>
-          <p:cNvSpPr txBox="1"/>
-          <p:nvPr/>
-        </p:nvSpPr>
-        <p:spPr>
-          <a:xfrm>
-            <a:off x="822960" y="4800600"/>
-            <a:ext cx="4892040" cy="685800"/>
-          </a:xfrm>
-          <a:prstGeom prst="rect">
-            <a:avLst/>
-          </a:prstGeom>
-          <a:noFill/>
-          <a:ln/>
-        </p:spPr>
-        <p:txBody>
-          <a:bodyPr wrap="square" lIns="0" tIns="0" rIns="0" bIns="0" rtlCol="0" anchor="t"/>
-          <a:lstStyle/>
-          <a:p>
-            <a:pPr indent="0" marL="0">
-              <a:buNone/>
-            </a:pPr>
-            <a:r>
-              <a:rPr lang="en-US" sz="1400" dirty="0">
-                <a:solidFill>
-                  <a:schemeClr val="tx1"/>
-                </a:solidFill>
-              </a:rPr>
-              <a:t>200 Starter realms and 40 Business instances per cell are estimates.</a:t>
-            </a:r>
-            <a:endParaRPr lang="en-US" sz="1400" dirty="0"/>
-          </a:p>
-        </p:txBody>
-      </p:sp>
-      <p:sp>
-        <p:nvSpPr>
-          <p:cNvPr id="20" name="Text 15"/>
-          <p:cNvSpPr txBox="1"/>
-          <p:nvPr/>
-        </p:nvSpPr>
-        <p:spPr>
-          <a:xfrm>
-            <a:off x="822960" y="5486400"/>
-            <a:ext cx="4892040" cy="365760"/>
-          </a:xfrm>
-          <a:prstGeom prst="rect">
-            <a:avLst/>
-          </a:prstGeom>
-          <a:noFill/>
-          <a:ln/>
-        </p:spPr>
-        <p:txBody>
-          <a:bodyPr wrap="square" lIns="0" tIns="0" rIns="0" bIns="0" rtlCol="0" anchor="t"/>
-          <a:lstStyle/>
-          <a:p>
-            <a:pPr indent="0" marL="0">
-              <a:buNone/>
-            </a:pPr>
-            <a:r>
-              <a:rPr lang="en-US" sz="1300" b="1" dirty="0">
-                <a:solidFill>
-                  <a:schemeClr val="accent1"/>
-                </a:solidFill>
-              </a:rPr>
-              <a:t>Next: Load tests on Keycloak</a:t>
-            </a:r>
-            <a:endParaRPr lang="en-US" sz="1300" dirty="0"/>
-          </a:p>
-        </p:txBody>
-      </p:sp>
-      <p:sp>
-        <p:nvSpPr>
-          <p:cNvPr id="21" name="risk 4"/>
-          <p:cNvSpPr/>
-          <p:nvPr/>
-        </p:nvSpPr>
-        <p:spPr>
-          <a:xfrm>
-            <a:off x="6172200" y="3840480"/>
-            <a:ext cx="5440680" cy="2148840"/>
-          </a:xfrm>
-          <a:prstGeom prst="roundRect">
-            <a:avLst>
-              <a:gd name="adj" fmla="val 3404"/>
-            </a:avLst>
-          </a:prstGeom>
-          <a:solidFill>
-            <a:schemeClr val="bg2"/>
-          </a:solidFill>
-          <a:ln/>
-        </p:spPr>
-      </p:sp>
-      <p:sp>
-        <p:nvSpPr>
-          <p:cNvPr id="22" name="badge LuTriangleAlert"/>
-          <p:cNvSpPr/>
-          <p:nvPr/>
-        </p:nvSpPr>
-        <p:spPr>
-          <a:xfrm>
-            <a:off x="6446520" y="4114800"/>
-            <a:ext cx="548640" cy="548640"/>
-          </a:xfrm>
-          <a:prstGeom prst="ellipse">
-            <a:avLst/>
-          </a:prstGeom>
-          <a:solidFill>
-            <a:schemeClr val="accent1"/>
-          </a:solidFill>
-          <a:ln/>
-        </p:spPr>
-      </p:sp>
-      <p:pic>
-        <p:nvPicPr>
-          <p:cNvPr id="23" name="icon LuTriangleAlert" descr="preencoded.png">    </p:cNvPr>
-          <p:cNvPicPr>
-            <a:picLocks noChangeAspect="1"/>
-          </p:cNvPicPr>
-          <p:nvPr/>
-        </p:nvPicPr>
-        <p:blipFill>
-          <a:blip r:embed="rId4"/>
-          <a:stretch>
-            <a:fillRect/>
-          </a:stretch>
-        </p:blipFill>
-        <p:spPr>
-          <a:xfrm>
-            <a:off x="6578194" y="4246474"/>
-            <a:ext cx="285293" cy="285293"/>
-          </a:xfrm>
-          <a:prstGeom prst="rect">
-            <a:avLst/>
-          </a:prstGeom>
-        </p:spPr>
-      </p:pic>
-      <p:sp>
-        <p:nvSpPr>
-          <p:cNvPr id="24" name="Text 18"/>
-          <p:cNvSpPr txBox="1"/>
-          <p:nvPr/>
-        </p:nvSpPr>
-        <p:spPr>
-          <a:xfrm>
-            <a:off x="7178040" y="4187952"/>
-            <a:ext cx="4206240" cy="411480"/>
-          </a:xfrm>
-          <a:prstGeom prst="rect">
-            <a:avLst/>
-          </a:prstGeom>
-          <a:noFill/>
-          <a:ln/>
-        </p:spPr>
-        <p:txBody>
-          <a:bodyPr wrap="square" lIns="0" tIns="0" rIns="0" bIns="0" rtlCol="0" anchor="t"/>
-          <a:lstStyle/>
-          <a:p>
-            <a:pPr indent="0" marL="0">
-              <a:buNone/>
-            </a:pPr>
-            <a:r>
-              <a:rPr lang="en-US" sz="1800" b="1" dirty="0">
-                <a:solidFill>
-                  <a:schemeClr val="tx2"/>
-                </a:solidFill>
-              </a:rPr>
-              <a:t>Brand name</a:t>
-            </a:r>
-            <a:endParaRPr lang="en-US" sz="1800" dirty="0"/>
-          </a:p>
-        </p:txBody>
-      </p:sp>
-      <p:sp>
-        <p:nvSpPr>
-          <p:cNvPr id="25" name="Text 19"/>
-          <p:cNvSpPr txBox="1"/>
-          <p:nvPr/>
-        </p:nvSpPr>
-        <p:spPr>
-          <a:xfrm>
-            <a:off x="6446520" y="4800600"/>
-            <a:ext cx="4892040" cy="685800"/>
-          </a:xfrm>
-          <a:prstGeom prst="rect">
-            <a:avLst/>
-          </a:prstGeom>
-          <a:noFill/>
-          <a:ln/>
-        </p:spPr>
-        <p:txBody>
-          <a:bodyPr wrap="square" lIns="0" tIns="0" rIns="0" bIns="0" rtlCol="0" anchor="t"/>
-          <a:lstStyle/>
-          <a:p>
-            <a:pPr indent="0" marL="0">
-              <a:buNone/>
-            </a:pPr>
-            <a:r>
-              <a:rPr lang="en-US" sz="1400" dirty="0">
-                <a:solidFill>
-                  <a:schemeClr val="tx1"/>
-                </a:solidFill>
-              </a:rPr>
-              <a:t>zimam.com, .sa, .io, .ai and .dev are taken; zimam.dev is an AI agent governance product.</a:t>
-            </a:r>
-            <a:endParaRPr lang="en-US" sz="1400" dirty="0"/>
-          </a:p>
-        </p:txBody>
-      </p:sp>
-      <p:sp>
-        <p:nvSpPr>
-          <p:cNvPr id="26" name="Text 20"/>
-          <p:cNvSpPr txBox="1"/>
-          <p:nvPr/>
-        </p:nvSpPr>
-        <p:spPr>
-          <a:xfrm>
-            <a:off x="6446520" y="5486400"/>
-            <a:ext cx="4892040" cy="365760"/>
-          </a:xfrm>
-          <a:prstGeom prst="rect">
-            <a:avLst/>
-          </a:prstGeom>
-          <a:noFill/>
-          <a:ln/>
-        </p:spPr>
-        <p:txBody>
-          <a:bodyPr wrap="square" lIns="0" tIns="0" rIns="0" bIns="0" rtlCol="0" anchor="t"/>
-          <a:lstStyle/>
-          <a:p>
-            <a:pPr indent="0" marL="0">
-              <a:buNone/>
-            </a:pPr>
-            <a:r>
-              <a:rPr lang="en-US" sz="1300" b="1" dirty="0">
-                <a:solidFill>
-                  <a:schemeClr val="accent1"/>
-                </a:solidFill>
-              </a:rPr>
-              <a:t>Next: SAIP trademark search; zimamid.com and .sa are free</a:t>
+              <a:t>None of the global vendors documents AI features hosted in KSA. Managed-Keycloak rivals have no risk scoring at all.</a:t>
             </a:r>
             <a:endParaRPr lang="en-US" sz="1300" dirty="0"/>
           </a:p>
@@ -7848,6 +10107,2311 @@
 <file path=ppt/slides/slide15.xml><?xml version="1.0" encoding="utf-8"?>
 <p:sld xmlns:a="http://schemas.openxmlformats.org/drawingml/2006/main" xmlns:r="http://schemas.openxmlformats.org/officeDocument/2006/relationships" xmlns:p="http://schemas.openxmlformats.org/presentationml/2006/main">
   <p:cSld name="Slide 15">
+    <p:spTree>
+      <p:nvGrpSpPr>
+        <p:cNvPr id="1" name=""/>
+        <p:cNvGrpSpPr/>
+        <p:nvPr/>
+      </p:nvGrpSpPr>
+      <p:grpSpPr>
+        <a:xfrm>
+          <a:off x="0" y="0"/>
+          <a:ext cx="0" cy="0"/>
+          <a:chOff x="0" y="0"/>
+          <a:chExt cx="0" cy="0"/>
+        </a:xfrm>
+      </p:grpSpPr>
+      <p:sp>
+        <p:nvSpPr>
+          <p:cNvPr id="2" name="Text 1"/>
+          <p:cNvSpPr/>
+          <p:nvPr>
+            <p:ph idx="101" type="title" hasCustomPrompt="1"/>
+          </p:nvPr>
+        </p:nvSpPr>
+        <p:spPr>
+          <a:xfrm>
+            <a:off x="548640" y="365760"/>
+            <a:ext cx="11064240" cy="822960"/>
+          </a:xfrm>
+          <a:prstGeom prst="rect">
+            <a:avLst/>
+          </a:prstGeom>
+          <a:noFill/>
+          <a:ln/>
+        </p:spPr>
+        <p:txBody>
+          <a:bodyPr wrap="square" lIns="0" tIns="0" rIns="0" bIns="0" rtlCol="0" anchor="ctr"/>
+          <a:lstStyle/>
+          <a:p>
+            <a:pPr algn="l" indent="0" marL="0">
+              <a:buNone/>
+            </a:pPr>
+            <a:r>
+              <a:rPr lang="en-US" sz="3400" b="1" dirty="0">
+                <a:solidFill>
+                  <a:schemeClr val="tx2"/>
+                </a:solidFill>
+              </a:rPr>
+              <a:t>Three AI add-ons, all running in the Kingdom</a:t>
+            </a:r>
+            <a:endParaRPr lang="en-US" sz="3400" dirty="0"/>
+          </a:p>
+        </p:txBody>
+      </p:sp>
+      <p:sp>
+        <p:nvSpPr>
+          <p:cNvPr id="3" name="ai offer Zimam Protect"/>
+          <p:cNvSpPr/>
+          <p:nvPr/>
+        </p:nvSpPr>
+        <p:spPr>
+          <a:xfrm>
+            <a:off x="548640" y="1463040"/>
+            <a:ext cx="3520440" cy="4572000"/>
+          </a:xfrm>
+          <a:prstGeom prst="roundRect">
+            <a:avLst>
+              <a:gd name="adj" fmla="val 2078"/>
+            </a:avLst>
+          </a:prstGeom>
+          <a:solidFill>
+            <a:schemeClr val="bg2"/>
+          </a:solidFill>
+          <a:ln/>
+        </p:spPr>
+      </p:sp>
+      <p:sp>
+        <p:nvSpPr>
+          <p:cNvPr id="4" name="badge LuShieldCheck"/>
+          <p:cNvSpPr/>
+          <p:nvPr/>
+        </p:nvSpPr>
+        <p:spPr>
+          <a:xfrm>
+            <a:off x="868680" y="1737360"/>
+            <a:ext cx="640080" cy="640080"/>
+          </a:xfrm>
+          <a:prstGeom prst="ellipse">
+            <a:avLst/>
+          </a:prstGeom>
+          <a:solidFill>
+            <a:schemeClr val="accent1"/>
+          </a:solidFill>
+          <a:ln/>
+        </p:spPr>
+      </p:sp>
+      <p:pic>
+        <p:nvPicPr>
+          <p:cNvPr id="5" name="icon LuShieldCheck" descr="preencoded.png">    </p:cNvPr>
+          <p:cNvPicPr>
+            <a:picLocks noChangeAspect="1"/>
+          </p:cNvPicPr>
+          <p:nvPr/>
+        </p:nvPicPr>
+        <p:blipFill>
+          <a:blip r:embed="rId1"/>
+          <a:stretch>
+            <a:fillRect/>
+          </a:stretch>
+        </p:blipFill>
+        <p:spPr>
+          <a:xfrm>
+            <a:off x="1022299" y="1890979"/>
+            <a:ext cx="332842" cy="332842"/>
+          </a:xfrm>
+          <a:prstGeom prst="rect">
+            <a:avLst/>
+          </a:prstGeom>
+        </p:spPr>
+      </p:pic>
+      <p:sp>
+        <p:nvSpPr>
+          <p:cNvPr id="6" name="Text 3"/>
+          <p:cNvSpPr txBox="1"/>
+          <p:nvPr/>
+        </p:nvSpPr>
+        <p:spPr>
+          <a:xfrm>
+            <a:off x="868680" y="2560320"/>
+            <a:ext cx="2926080" cy="457200"/>
+          </a:xfrm>
+          <a:prstGeom prst="rect">
+            <a:avLst/>
+          </a:prstGeom>
+          <a:noFill/>
+          <a:ln/>
+        </p:spPr>
+        <p:txBody>
+          <a:bodyPr wrap="square" lIns="0" tIns="0" rIns="0" bIns="0" rtlCol="0" anchor="t"/>
+          <a:lstStyle/>
+          <a:p>
+            <a:pPr indent="0" marL="0">
+              <a:buNone/>
+            </a:pPr>
+            <a:r>
+              <a:rPr lang="en-US" sz="2400" b="1" dirty="0">
+                <a:solidFill>
+                  <a:schemeClr val="tx2"/>
+                </a:solidFill>
+                <a:latin typeface="Cambria" pitchFamily="34" charset="0"/>
+                <a:ea typeface="Cambria" pitchFamily="34" charset="-122"/>
+                <a:cs typeface="Cambria" pitchFamily="34" charset="-120"/>
+              </a:rPr>
+              <a:t>Zimam Protect</a:t>
+            </a:r>
+            <a:endParaRPr lang="en-US" sz="2400" dirty="0"/>
+          </a:p>
+        </p:txBody>
+      </p:sp>
+      <p:sp>
+        <p:nvSpPr>
+          <p:cNvPr id="7" name="Text 4"/>
+          <p:cNvSpPr txBox="1"/>
+          <p:nvPr/>
+        </p:nvSpPr>
+        <p:spPr>
+          <a:xfrm>
+            <a:off x="868680" y="3017520"/>
+            <a:ext cx="2926080" cy="320040"/>
+          </a:xfrm>
+          <a:prstGeom prst="rect">
+            <a:avLst/>
+          </a:prstGeom>
+          <a:noFill/>
+          <a:ln/>
+        </p:spPr>
+        <p:txBody>
+          <a:bodyPr wrap="square" lIns="0" tIns="0" rIns="0" bIns="0" rtlCol="0" anchor="t"/>
+          <a:lstStyle/>
+          <a:p>
+            <a:pPr indent="0" marL="0">
+              <a:buNone/>
+            </a:pPr>
+            <a:r>
+              <a:rPr lang="en-US" sz="1400" dirty="0">
+                <a:solidFill>
+                  <a:schemeClr val="accent5"/>
+                </a:solidFill>
+              </a:rPr>
+              <a:t>Risk-based login</a:t>
+            </a:r>
+            <a:endParaRPr lang="en-US" sz="1400" dirty="0"/>
+          </a:p>
+        </p:txBody>
+      </p:sp>
+      <p:sp>
+        <p:nvSpPr>
+          <p:cNvPr id="8" name="Text 5"/>
+          <p:cNvSpPr txBox="1"/>
+          <p:nvPr/>
+        </p:nvSpPr>
+        <p:spPr>
+          <a:xfrm>
+            <a:off x="868680" y="3383280"/>
+            <a:ext cx="2926080" cy="457200"/>
+          </a:xfrm>
+          <a:prstGeom prst="rect">
+            <a:avLst/>
+          </a:prstGeom>
+          <a:noFill/>
+          <a:ln/>
+        </p:spPr>
+        <p:txBody>
+          <a:bodyPr wrap="square" lIns="0" tIns="0" rIns="0" bIns="0" rtlCol="0" anchor="t"/>
+          <a:lstStyle/>
+          <a:p>
+            <a:pPr indent="0" marL="0">
+              <a:buNone/>
+            </a:pPr>
+            <a:r>
+              <a:rPr lang="en-US" sz="2000" b="1" dirty="0">
+                <a:solidFill>
+                  <a:schemeClr val="accent1"/>
+                </a:solidFill>
+              </a:rPr>
+              <a:t>SAR 500–2,000</a:t>
+            </a:r>
+            <a:endParaRPr lang="en-US" sz="2000" dirty="0"/>
+          </a:p>
+        </p:txBody>
+      </p:sp>
+      <p:sp>
+        <p:nvSpPr>
+          <p:cNvPr id="9" name="Text 6"/>
+          <p:cNvSpPr txBox="1"/>
+          <p:nvPr/>
+        </p:nvSpPr>
+        <p:spPr>
+          <a:xfrm>
+            <a:off x="868680" y="3840480"/>
+            <a:ext cx="2926080" cy="640080"/>
+          </a:xfrm>
+          <a:prstGeom prst="rect">
+            <a:avLst/>
+          </a:prstGeom>
+          <a:noFill/>
+          <a:ln/>
+        </p:spPr>
+        <p:txBody>
+          <a:bodyPr wrap="square" lIns="0" tIns="0" rIns="0" bIns="0" rtlCol="0" anchor="t"/>
+          <a:lstStyle/>
+          <a:p>
+            <a:pPr indent="0" marL="0">
+              <a:buNone/>
+            </a:pPr>
+            <a:r>
+              <a:rPr lang="en-US" sz="1200" dirty="0">
+                <a:solidFill>
+                  <a:schemeClr val="accent5"/>
+                </a:solidFill>
+              </a:rPr>
+              <a:t>Business S–L; Starter from SAR 100; included in Enterprise M and L</a:t>
+            </a:r>
+            <a:endParaRPr lang="en-US" sz="1200" dirty="0"/>
+          </a:p>
+        </p:txBody>
+      </p:sp>
+      <p:sp>
+        <p:nvSpPr>
+          <p:cNvPr id="10" name="Text 7"/>
+          <p:cNvSpPr txBox="1"/>
+          <p:nvPr/>
+        </p:nvSpPr>
+        <p:spPr>
+          <a:xfrm>
+            <a:off x="868680" y="4526280"/>
+            <a:ext cx="2926080" cy="868680"/>
+          </a:xfrm>
+          <a:prstGeom prst="rect">
+            <a:avLst/>
+          </a:prstGeom>
+          <a:noFill/>
+          <a:ln/>
+        </p:spPr>
+        <p:txBody>
+          <a:bodyPr wrap="square" lIns="0" tIns="0" rIns="0" bIns="0" rtlCol="0" anchor="t"/>
+          <a:lstStyle/>
+          <a:p>
+            <a:pPr indent="0" marL="0">
+              <a:buNone/>
+            </a:pPr>
+            <a:r>
+              <a:rPr lang="en-US" sz="1400" dirty="0">
+                <a:solidFill>
+                  <a:schemeClr val="tx1"/>
+                </a:solidFill>
+              </a:rPr>
+              <a:t>Rules then ML scoring in each cell, no LLM. Step-up to passkey, OTP or Nafath.</a:t>
+            </a:r>
+            <a:endParaRPr lang="en-US" sz="1400" dirty="0"/>
+          </a:p>
+        </p:txBody>
+      </p:sp>
+      <p:sp>
+        <p:nvSpPr>
+          <p:cNvPr id="11" name="Text 8"/>
+          <p:cNvSpPr txBox="1"/>
+          <p:nvPr/>
+        </p:nvSpPr>
+        <p:spPr>
+          <a:xfrm>
+            <a:off x="868680" y="5440680"/>
+            <a:ext cx="2926080" cy="365760"/>
+          </a:xfrm>
+          <a:prstGeom prst="rect">
+            <a:avLst/>
+          </a:prstGeom>
+          <a:noFill/>
+          <a:ln/>
+        </p:spPr>
+        <p:txBody>
+          <a:bodyPr wrap="square" lIns="0" tIns="0" rIns="0" bIns="0" rtlCol="0" anchor="t"/>
+          <a:lstStyle/>
+          <a:p>
+            <a:pPr indent="0" marL="0">
+              <a:buNone/>
+            </a:pPr>
+            <a:r>
+              <a:rPr lang="en-US" sz="1300" b="1" dirty="0">
+                <a:solidFill>
+                  <a:schemeClr val="tx2"/>
+                </a:solidFill>
+              </a:rPr>
+              <a:t>Costs SAR 579 a month per cell</a:t>
+            </a:r>
+            <a:endParaRPr lang="en-US" sz="1300" dirty="0"/>
+          </a:p>
+        </p:txBody>
+      </p:sp>
+      <p:sp>
+        <p:nvSpPr>
+          <p:cNvPr id="12" name="ai offer Zimam Assist"/>
+          <p:cNvSpPr/>
+          <p:nvPr/>
+        </p:nvSpPr>
+        <p:spPr>
+          <a:xfrm>
+            <a:off x="4297680" y="1463040"/>
+            <a:ext cx="3520440" cy="4572000"/>
+          </a:xfrm>
+          <a:prstGeom prst="roundRect">
+            <a:avLst>
+              <a:gd name="adj" fmla="val 2078"/>
+            </a:avLst>
+          </a:prstGeom>
+          <a:solidFill>
+            <a:schemeClr val="bg2"/>
+          </a:solidFill>
+          <a:ln/>
+        </p:spPr>
+      </p:sp>
+      <p:sp>
+        <p:nvSpPr>
+          <p:cNvPr id="13" name="badge LuMessageSquare"/>
+          <p:cNvSpPr/>
+          <p:nvPr/>
+        </p:nvSpPr>
+        <p:spPr>
+          <a:xfrm>
+            <a:off x="4617720" y="1737360"/>
+            <a:ext cx="640080" cy="640080"/>
+          </a:xfrm>
+          <a:prstGeom prst="ellipse">
+            <a:avLst/>
+          </a:prstGeom>
+          <a:solidFill>
+            <a:schemeClr val="bg1"/>
+          </a:solidFill>
+          <a:ln/>
+        </p:spPr>
+      </p:sp>
+      <p:pic>
+        <p:nvPicPr>
+          <p:cNvPr id="14" name="icon LuMessageSquare" descr="preencoded.png">    </p:cNvPr>
+          <p:cNvPicPr>
+            <a:picLocks noChangeAspect="1"/>
+          </p:cNvPicPr>
+          <p:nvPr/>
+        </p:nvPicPr>
+        <p:blipFill>
+          <a:blip r:embed="rId2"/>
+          <a:stretch>
+            <a:fillRect/>
+          </a:stretch>
+        </p:blipFill>
+        <p:spPr>
+          <a:xfrm>
+            <a:off x="4771339" y="1890979"/>
+            <a:ext cx="332842" cy="332842"/>
+          </a:xfrm>
+          <a:prstGeom prst="rect">
+            <a:avLst/>
+          </a:prstGeom>
+        </p:spPr>
+      </p:pic>
+      <p:sp>
+        <p:nvSpPr>
+          <p:cNvPr id="15" name="Text 11"/>
+          <p:cNvSpPr txBox="1"/>
+          <p:nvPr/>
+        </p:nvSpPr>
+        <p:spPr>
+          <a:xfrm>
+            <a:off x="4617720" y="2560320"/>
+            <a:ext cx="2926080" cy="457200"/>
+          </a:xfrm>
+          <a:prstGeom prst="rect">
+            <a:avLst/>
+          </a:prstGeom>
+          <a:noFill/>
+          <a:ln/>
+        </p:spPr>
+        <p:txBody>
+          <a:bodyPr wrap="square" lIns="0" tIns="0" rIns="0" bIns="0" rtlCol="0" anchor="t"/>
+          <a:lstStyle/>
+          <a:p>
+            <a:pPr indent="0" marL="0">
+              <a:buNone/>
+            </a:pPr>
+            <a:r>
+              <a:rPr lang="en-US" sz="2400" b="1" dirty="0">
+                <a:solidFill>
+                  <a:schemeClr val="tx2"/>
+                </a:solidFill>
+                <a:latin typeface="Cambria" pitchFamily="34" charset="0"/>
+                <a:ea typeface="Cambria" pitchFamily="34" charset="-122"/>
+                <a:cs typeface="Cambria" pitchFamily="34" charset="-120"/>
+              </a:rPr>
+              <a:t>Zimam Assist</a:t>
+            </a:r>
+            <a:endParaRPr lang="en-US" sz="2400" dirty="0"/>
+          </a:p>
+        </p:txBody>
+      </p:sp>
+      <p:sp>
+        <p:nvSpPr>
+          <p:cNvPr id="16" name="Text 12"/>
+          <p:cNvSpPr txBox="1"/>
+          <p:nvPr/>
+        </p:nvSpPr>
+        <p:spPr>
+          <a:xfrm>
+            <a:off x="4617720" y="3017520"/>
+            <a:ext cx="2926080" cy="320040"/>
+          </a:xfrm>
+          <a:prstGeom prst="rect">
+            <a:avLst/>
+          </a:prstGeom>
+          <a:noFill/>
+          <a:ln/>
+        </p:spPr>
+        <p:txBody>
+          <a:bodyPr wrap="square" lIns="0" tIns="0" rIns="0" bIns="0" rtlCol="0" anchor="t"/>
+          <a:lstStyle/>
+          <a:p>
+            <a:pPr indent="0" marL="0">
+              <a:buNone/>
+            </a:pPr>
+            <a:r>
+              <a:rPr lang="en-US" sz="1400" dirty="0">
+                <a:solidFill>
+                  <a:schemeClr val="accent5"/>
+                </a:solidFill>
+              </a:rPr>
+              <a:t>Arabic/English copilot</a:t>
+            </a:r>
+            <a:endParaRPr lang="en-US" sz="1400" dirty="0"/>
+          </a:p>
+        </p:txBody>
+      </p:sp>
+      <p:sp>
+        <p:nvSpPr>
+          <p:cNvPr id="17" name="Text 13"/>
+          <p:cNvSpPr txBox="1"/>
+          <p:nvPr/>
+        </p:nvSpPr>
+        <p:spPr>
+          <a:xfrm>
+            <a:off x="4617720" y="3383280"/>
+            <a:ext cx="2926080" cy="457200"/>
+          </a:xfrm>
+          <a:prstGeom prst="rect">
+            <a:avLst/>
+          </a:prstGeom>
+          <a:noFill/>
+          <a:ln/>
+        </p:spPr>
+        <p:txBody>
+          <a:bodyPr wrap="square" lIns="0" tIns="0" rIns="0" bIns="0" rtlCol="0" anchor="t"/>
+          <a:lstStyle/>
+          <a:p>
+            <a:pPr indent="0" marL="0">
+              <a:buNone/>
+            </a:pPr>
+            <a:r>
+              <a:rPr lang="en-US" sz="2000" b="1" dirty="0">
+                <a:solidFill>
+                  <a:schemeClr val="accent1"/>
+                </a:solidFill>
+              </a:rPr>
+              <a:t>Included</a:t>
+            </a:r>
+            <a:endParaRPr lang="en-US" sz="2000" dirty="0"/>
+          </a:p>
+        </p:txBody>
+      </p:sp>
+      <p:sp>
+        <p:nvSpPr>
+          <p:cNvPr id="18" name="Text 14"/>
+          <p:cNvSpPr txBox="1"/>
+          <p:nvPr/>
+        </p:nvSpPr>
+        <p:spPr>
+          <a:xfrm>
+            <a:off x="4617720" y="3840480"/>
+            <a:ext cx="2926080" cy="640080"/>
+          </a:xfrm>
+          <a:prstGeom prst="rect">
+            <a:avLst/>
+          </a:prstGeom>
+          <a:noFill/>
+          <a:ln/>
+        </p:spPr>
+        <p:txBody>
+          <a:bodyPr wrap="square" lIns="0" tIns="0" rIns="0" bIns="0" rtlCol="0" anchor="t"/>
+          <a:lstStyle/>
+          <a:p>
+            <a:pPr indent="0" marL="0">
+              <a:buNone/>
+            </a:pPr>
+            <a:r>
+              <a:rPr lang="en-US" sz="1200" dirty="0">
+                <a:solidFill>
+                  <a:schemeClr val="accent5"/>
+                </a:solidFill>
+              </a:rPr>
+              <a:t>50 / 300 / 1,000 requests a month; extra SAR 75 per 100</a:t>
+            </a:r>
+            <a:endParaRPr lang="en-US" sz="1200" dirty="0"/>
+          </a:p>
+        </p:txBody>
+      </p:sp>
+      <p:sp>
+        <p:nvSpPr>
+          <p:cNvPr id="19" name="Text 15"/>
+          <p:cNvSpPr txBox="1"/>
+          <p:nvPr/>
+        </p:nvSpPr>
+        <p:spPr>
+          <a:xfrm>
+            <a:off x="4617720" y="4526280"/>
+            <a:ext cx="2926080" cy="868680"/>
+          </a:xfrm>
+          <a:prstGeom prst="rect">
+            <a:avLst/>
+          </a:prstGeom>
+          <a:noFill/>
+          <a:ln/>
+        </p:spPr>
+        <p:txBody>
+          <a:bodyPr wrap="square" lIns="0" tIns="0" rIns="0" bIns="0" rtlCol="0" anchor="t"/>
+          <a:lstStyle/>
+          <a:p>
+            <a:pPr indent="0" marL="0">
+              <a:buNone/>
+            </a:pPr>
+            <a:r>
+              <a:rPr lang="en-US" sz="1400" dirty="0">
+                <a:solidFill>
+                  <a:schemeClr val="tx1"/>
+                </a:solidFill>
+              </a:rPr>
+              <a:t>OCI Generative AI in Riyadh. Every config change is a diff the admin approves.</a:t>
+            </a:r>
+            <a:endParaRPr lang="en-US" sz="1400" dirty="0"/>
+          </a:p>
+        </p:txBody>
+      </p:sp>
+      <p:sp>
+        <p:nvSpPr>
+          <p:cNvPr id="20" name="Text 16"/>
+          <p:cNvSpPr txBox="1"/>
+          <p:nvPr/>
+        </p:nvSpPr>
+        <p:spPr>
+          <a:xfrm>
+            <a:off x="4617720" y="5440680"/>
+            <a:ext cx="2926080" cy="365760"/>
+          </a:xfrm>
+          <a:prstGeom prst="rect">
+            <a:avLst/>
+          </a:prstGeom>
+          <a:noFill/>
+          <a:ln/>
+        </p:spPr>
+        <p:txBody>
+          <a:bodyPr wrap="square" lIns="0" tIns="0" rIns="0" bIns="0" rtlCol="0" anchor="t"/>
+          <a:lstStyle/>
+          <a:p>
+            <a:pPr indent="0" marL="0">
+              <a:buNone/>
+            </a:pPr>
+            <a:r>
+              <a:rPr lang="en-US" sz="1300" b="1" dirty="0">
+                <a:solidFill>
+                  <a:schemeClr val="tx2"/>
+                </a:solidFill>
+              </a:rPr>
+              <a:t>Costs SAR 0.28 a request</a:t>
+            </a:r>
+            <a:endParaRPr lang="en-US" sz="1300" dirty="0"/>
+          </a:p>
+        </p:txBody>
+      </p:sp>
+      <p:sp>
+        <p:nvSpPr>
+          <p:cNvPr id="21" name="ai offer Agent Pack"/>
+          <p:cNvSpPr/>
+          <p:nvPr/>
+        </p:nvSpPr>
+        <p:spPr>
+          <a:xfrm>
+            <a:off x="8046720" y="1463040"/>
+            <a:ext cx="3520440" cy="4572000"/>
+          </a:xfrm>
+          <a:prstGeom prst="roundRect">
+            <a:avLst>
+              <a:gd name="adj" fmla="val 2078"/>
+            </a:avLst>
+          </a:prstGeom>
+          <a:solidFill>
+            <a:schemeClr val="bg2"/>
+          </a:solidFill>
+          <a:ln/>
+        </p:spPr>
+      </p:sp>
+      <p:sp>
+        <p:nvSpPr>
+          <p:cNvPr id="22" name="badge LuBot"/>
+          <p:cNvSpPr/>
+          <p:nvPr/>
+        </p:nvSpPr>
+        <p:spPr>
+          <a:xfrm>
+            <a:off x="8366760" y="1737360"/>
+            <a:ext cx="640080" cy="640080"/>
+          </a:xfrm>
+          <a:prstGeom prst="ellipse">
+            <a:avLst/>
+          </a:prstGeom>
+          <a:solidFill>
+            <a:schemeClr val="bg1"/>
+          </a:solidFill>
+          <a:ln/>
+        </p:spPr>
+      </p:sp>
+      <p:pic>
+        <p:nvPicPr>
+          <p:cNvPr id="23" name="icon LuBot" descr="preencoded.png">    </p:cNvPr>
+          <p:cNvPicPr>
+            <a:picLocks noChangeAspect="1"/>
+          </p:cNvPicPr>
+          <p:nvPr/>
+        </p:nvPicPr>
+        <p:blipFill>
+          <a:blip r:embed="rId3"/>
+          <a:stretch>
+            <a:fillRect/>
+          </a:stretch>
+        </p:blipFill>
+        <p:spPr>
+          <a:xfrm>
+            <a:off x="8520379" y="1890979"/>
+            <a:ext cx="332842" cy="332842"/>
+          </a:xfrm>
+          <a:prstGeom prst="rect">
+            <a:avLst/>
+          </a:prstGeom>
+        </p:spPr>
+      </p:pic>
+      <p:sp>
+        <p:nvSpPr>
+          <p:cNvPr id="24" name="Text 19"/>
+          <p:cNvSpPr txBox="1"/>
+          <p:nvPr/>
+        </p:nvSpPr>
+        <p:spPr>
+          <a:xfrm>
+            <a:off x="8366760" y="2560320"/>
+            <a:ext cx="2926080" cy="457200"/>
+          </a:xfrm>
+          <a:prstGeom prst="rect">
+            <a:avLst/>
+          </a:prstGeom>
+          <a:noFill/>
+          <a:ln/>
+        </p:spPr>
+        <p:txBody>
+          <a:bodyPr wrap="square" lIns="0" tIns="0" rIns="0" bIns="0" rtlCol="0" anchor="t"/>
+          <a:lstStyle/>
+          <a:p>
+            <a:pPr indent="0" marL="0">
+              <a:buNone/>
+            </a:pPr>
+            <a:r>
+              <a:rPr lang="en-US" sz="2400" b="1" dirty="0">
+                <a:solidFill>
+                  <a:schemeClr val="tx2"/>
+                </a:solidFill>
+                <a:latin typeface="Cambria" pitchFamily="34" charset="0"/>
+                <a:ea typeface="Cambria" pitchFamily="34" charset="-122"/>
+                <a:cs typeface="Cambria" pitchFamily="34" charset="-120"/>
+              </a:rPr>
+              <a:t>Agent Pack</a:t>
+            </a:r>
+            <a:endParaRPr lang="en-US" sz="2400" dirty="0"/>
+          </a:p>
+        </p:txBody>
+      </p:sp>
+      <p:sp>
+        <p:nvSpPr>
+          <p:cNvPr id="25" name="Text 20"/>
+          <p:cNvSpPr txBox="1"/>
+          <p:nvPr/>
+        </p:nvSpPr>
+        <p:spPr>
+          <a:xfrm>
+            <a:off x="8366760" y="3017520"/>
+            <a:ext cx="2926080" cy="320040"/>
+          </a:xfrm>
+          <a:prstGeom prst="rect">
+            <a:avLst/>
+          </a:prstGeom>
+          <a:noFill/>
+          <a:ln/>
+        </p:spPr>
+        <p:txBody>
+          <a:bodyPr wrap="square" lIns="0" tIns="0" rIns="0" bIns="0" rtlCol="0" anchor="t"/>
+          <a:lstStyle/>
+          <a:p>
+            <a:pPr indent="0" marL="0">
+              <a:buNone/>
+            </a:pPr>
+            <a:r>
+              <a:rPr lang="en-US" sz="1400" dirty="0">
+                <a:solidFill>
+                  <a:schemeClr val="accent5"/>
+                </a:solidFill>
+              </a:rPr>
+              <a:t>Identity for AI agents</a:t>
+            </a:r>
+            <a:endParaRPr lang="en-US" sz="1400" dirty="0"/>
+          </a:p>
+        </p:txBody>
+      </p:sp>
+      <p:sp>
+        <p:nvSpPr>
+          <p:cNvPr id="26" name="Text 21"/>
+          <p:cNvSpPr txBox="1"/>
+          <p:nvPr/>
+        </p:nvSpPr>
+        <p:spPr>
+          <a:xfrm>
+            <a:off x="8366760" y="3383280"/>
+            <a:ext cx="2926080" cy="457200"/>
+          </a:xfrm>
+          <a:prstGeom prst="rect">
+            <a:avLst/>
+          </a:prstGeom>
+          <a:noFill/>
+          <a:ln/>
+        </p:spPr>
+        <p:txBody>
+          <a:bodyPr wrap="square" lIns="0" tIns="0" rIns="0" bIns="0" rtlCol="0" anchor="t"/>
+          <a:lstStyle/>
+          <a:p>
+            <a:pPr indent="0" marL="0">
+              <a:buNone/>
+            </a:pPr>
+            <a:r>
+              <a:rPr lang="en-US" sz="2000" b="1" dirty="0">
+                <a:solidFill>
+                  <a:schemeClr val="accent1"/>
+                </a:solidFill>
+              </a:rPr>
+              <a:t>SAR 750</a:t>
+            </a:r>
+            <a:endParaRPr lang="en-US" sz="2000" dirty="0"/>
+          </a:p>
+        </p:txBody>
+      </p:sp>
+      <p:sp>
+        <p:nvSpPr>
+          <p:cNvPr id="27" name="Text 22"/>
+          <p:cNvSpPr txBox="1"/>
+          <p:nvPr/>
+        </p:nvSpPr>
+        <p:spPr>
+          <a:xfrm>
+            <a:off x="8366760" y="3840480"/>
+            <a:ext cx="2926080" cy="640080"/>
+          </a:xfrm>
+          <a:prstGeom prst="rect">
+            <a:avLst/>
+          </a:prstGeom>
+          <a:noFill/>
+          <a:ln/>
+        </p:spPr>
+        <p:txBody>
+          <a:bodyPr wrap="square" lIns="0" tIns="0" rIns="0" bIns="0" rtlCol="0" anchor="t"/>
+          <a:lstStyle/>
+          <a:p>
+            <a:pPr indent="0" marL="0">
+              <a:buNone/>
+            </a:pPr>
+            <a:r>
+              <a:rPr lang="en-US" sz="1200" dirty="0">
+                <a:solidFill>
+                  <a:schemeClr val="accent5"/>
+                </a:solidFill>
+              </a:rPr>
+              <a:t>Business, preview; Enterprise later</a:t>
+            </a:r>
+            <a:endParaRPr lang="en-US" sz="1200" dirty="0"/>
+          </a:p>
+        </p:txBody>
+      </p:sp>
+      <p:sp>
+        <p:nvSpPr>
+          <p:cNvPr id="28" name="Text 23"/>
+          <p:cNvSpPr txBox="1"/>
+          <p:nvPr/>
+        </p:nvSpPr>
+        <p:spPr>
+          <a:xfrm>
+            <a:off x="8366760" y="4526280"/>
+            <a:ext cx="2926080" cy="868680"/>
+          </a:xfrm>
+          <a:prstGeom prst="rect">
+            <a:avLst/>
+          </a:prstGeom>
+          <a:noFill/>
+          <a:ln/>
+        </p:spPr>
+        <p:txBody>
+          <a:bodyPr wrap="square" lIns="0" tIns="0" rIns="0" bIns="0" rtlCol="0" anchor="t"/>
+          <a:lstStyle/>
+          <a:p>
+            <a:pPr indent="0" marL="0">
+              <a:buNone/>
+            </a:pPr>
+            <a:r>
+              <a:rPr lang="en-US" sz="1400" dirty="0">
+                <a:solidFill>
+                  <a:schemeClr val="tx1"/>
+                </a:solidFill>
+              </a:rPr>
+              <a:t>Keycloak MCP authorization, token exchange and CIBA approvals, packaged in the portal.</a:t>
+            </a:r>
+            <a:endParaRPr lang="en-US" sz="1400" dirty="0"/>
+          </a:p>
+        </p:txBody>
+      </p:sp>
+      <p:sp>
+        <p:nvSpPr>
+          <p:cNvPr id="29" name="Text 24"/>
+          <p:cNvSpPr txBox="1"/>
+          <p:nvPr/>
+        </p:nvSpPr>
+        <p:spPr>
+          <a:xfrm>
+            <a:off x="8366760" y="5440680"/>
+            <a:ext cx="2926080" cy="365760"/>
+          </a:xfrm>
+          <a:prstGeom prst="rect">
+            <a:avLst/>
+          </a:prstGeom>
+          <a:noFill/>
+          <a:ln/>
+        </p:spPr>
+        <p:txBody>
+          <a:bodyPr wrap="square" lIns="0" tIns="0" rIns="0" bIns="0" rtlCol="0" anchor="t"/>
+          <a:lstStyle/>
+          <a:p>
+            <a:pPr indent="0" marL="0">
+              <a:buNone/>
+            </a:pPr>
+            <a:r>
+              <a:rPr lang="en-US" sz="1300" b="1" dirty="0">
+                <a:solidFill>
+                  <a:schemeClr val="tx2"/>
+                </a:solidFill>
+              </a:rPr>
+              <a:t>Mostly engineering cost</a:t>
+            </a:r>
+            <a:endParaRPr lang="en-US" sz="1300" dirty="0"/>
+          </a:p>
+        </p:txBody>
+      </p:sp>
+      <p:sp>
+        <p:nvSpPr>
+          <p:cNvPr id="25" name="Slide Number Placeholder 0"/>
+          <p:cNvSpPr>
+            <a:spLocks noGrp="1"/>
+          </p:cNvSpPr>
+          <p:nvPr>
+            <p:ph type="sldNum" sz="quarter" idx="4294967295"/>
+          </p:nvPr>
+        </p:nvSpPr>
+        <p:spPr>
+          <a:xfrm>
+            <a:off x="11155680" y="6355080"/>
+            <a:ext cx="457200" cy="274320"/>
+          </a:xfrm>
+          <a:prstGeom prst="rect">
+            <a:avLst/>
+          </a:prstGeom>
+          <a:extLst>
+            <a:ext uri="{C572A759-6A51-4108-AA02-DFA0A04FC94B}">
+              <ma14:wrappingTextBoxFlag xmlns:ma14="http://schemas.microsoft.com/office/mac/drawingml/2011/main" val="0"/>
+            </a:ext>
+          </a:extLst>
+        </p:spPr>
+        <p:txBody>
+          <a:bodyPr/>
+          <a:lstStyle>
+            <a:lvl1pPr>
+              <a:defRPr sz="1000">
+                <a:solidFill>
+                  <a:srgbClr val="56645C"/>
+                </a:solidFill>
+              </a:defRPr>
+            </a:lvl1pPr>
+          </a:lstStyle>
+          <a:p>
+            <a:pPr algn="r"/>
+            <a:fld id="{F7021451-1387-4CA6-816F-3879F97B5CBC}" type="slidenum">
+              <a:rPr b="0" lang="en-US"/>
+              <a:t>15</a:t>
+            </a:fld>
+            <a:endParaRPr lang="en-US"/>
+          </a:p>
+        </p:txBody>
+      </p:sp>
+    </p:spTree>
+  </p:cSld>
+  <p:clrMapOvr>
+    <a:masterClrMapping/>
+  </p:clrMapOvr>
+</p:sld>
+</file>
+
+<file path=ppt/slides/slide16.xml><?xml version="1.0" encoding="utf-8"?>
+<p:sld xmlns:a="http://schemas.openxmlformats.org/drawingml/2006/main" xmlns:r="http://schemas.openxmlformats.org/officeDocument/2006/relationships" xmlns:p="http://schemas.openxmlformats.org/presentationml/2006/main">
+  <p:cSld name="Slide 16">
+    <p:spTree>
+      <p:nvGrpSpPr>
+        <p:cNvPr id="1" name=""/>
+        <p:cNvGrpSpPr/>
+        <p:nvPr/>
+      </p:nvGrpSpPr>
+      <p:grpSpPr>
+        <a:xfrm>
+          <a:off x="0" y="0"/>
+          <a:ext cx="0" cy="0"/>
+          <a:chOff x="0" y="0"/>
+          <a:chExt cx="0" cy="0"/>
+        </a:xfrm>
+      </p:grpSpPr>
+      <p:sp>
+        <p:nvSpPr>
+          <p:cNvPr id="2" name="Text 1"/>
+          <p:cNvSpPr/>
+          <p:nvPr>
+            <p:ph idx="101" type="title" hasCustomPrompt="1"/>
+          </p:nvPr>
+        </p:nvSpPr>
+        <p:spPr>
+          <a:xfrm>
+            <a:off x="548640" y="365760"/>
+            <a:ext cx="11064240" cy="822960"/>
+          </a:xfrm>
+          <a:prstGeom prst="rect">
+            <a:avLst/>
+          </a:prstGeom>
+          <a:noFill/>
+          <a:ln/>
+        </p:spPr>
+        <p:txBody>
+          <a:bodyPr wrap="square" lIns="0" tIns="0" rIns="0" bIns="0" rtlCol="0" anchor="ctr"/>
+          <a:lstStyle/>
+          <a:p>
+            <a:pPr algn="l" indent="0" marL="0">
+              <a:buNone/>
+            </a:pPr>
+            <a:r>
+              <a:rPr lang="en-US" sz="3400" b="1" dirty="0">
+                <a:solidFill>
+                  <a:schemeClr val="tx2"/>
+                </a:solidFill>
+              </a:rPr>
+              <a:t>AI add-ons keep margins above 60%</a:t>
+            </a:r>
+            <a:endParaRPr lang="en-US" sz="3400" dirty="0"/>
+          </a:p>
+        </p:txBody>
+      </p:sp>
+      <p:graphicFrame>
+        <p:nvGraphicFramePr>
+          <p:cNvPr id="3" name="Chart 0" descr=""/>
+          <p:cNvGraphicFramePr/>
+          <p:nvPr/>
+        </p:nvGraphicFramePr>
+        <p:xfrm>
+          <a:off x="548640" y="1371600"/>
+          <a:ext cx="7223760" cy="4754880"/>
+        </p:xfrm>
+        <a:graphic xmlns:a="http://schemas.openxmlformats.org/drawingml/2006/main">
+          <a:graphicData uri="http://schemas.openxmlformats.org/drawingml/2006/chart">
+            <c:chart xmlns:c="http://schemas.openxmlformats.org/drawingml/2006/chart" r:id="rId1"/>
+          </a:graphicData>
+        </a:graphic>
+      </p:graphicFrame>
+      <p:sp>
+        <p:nvSpPr>
+          <p:cNvPr id="4" name="ai insight 1"/>
+          <p:cNvSpPr/>
+          <p:nvPr/>
+        </p:nvSpPr>
+        <p:spPr>
+          <a:xfrm>
+            <a:off x="8046720" y="1463040"/>
+            <a:ext cx="3566160" cy="1371600"/>
+          </a:xfrm>
+          <a:prstGeom prst="roundRect">
+            <a:avLst>
+              <a:gd name="adj" fmla="val 5333"/>
+            </a:avLst>
+          </a:prstGeom>
+          <a:solidFill>
+            <a:schemeClr val="bg2"/>
+          </a:solidFill>
+          <a:ln/>
+        </p:spPr>
+      </p:sp>
+      <p:sp>
+        <p:nvSpPr>
+          <p:cNvPr id="5" name="badge LuServer"/>
+          <p:cNvSpPr/>
+          <p:nvPr/>
+        </p:nvSpPr>
+        <p:spPr>
+          <a:xfrm>
+            <a:off x="8275320" y="1691640"/>
+            <a:ext cx="502920" cy="502920"/>
+          </a:xfrm>
+          <a:prstGeom prst="ellipse">
+            <a:avLst/>
+          </a:prstGeom>
+          <a:solidFill>
+            <a:schemeClr val="bg1"/>
+          </a:solidFill>
+          <a:ln/>
+        </p:spPr>
+      </p:sp>
+      <p:pic>
+        <p:nvPicPr>
+          <p:cNvPr id="6" name="icon LuServer" descr="preencoded.png">    </p:cNvPr>
+          <p:cNvPicPr>
+            <a:picLocks noChangeAspect="1"/>
+          </p:cNvPicPr>
+          <p:nvPr/>
+        </p:nvPicPr>
+        <p:blipFill>
+          <a:blip r:embed="rId2"/>
+          <a:stretch>
+            <a:fillRect/>
+          </a:stretch>
+        </p:blipFill>
+        <p:spPr>
+          <a:xfrm>
+            <a:off x="8396021" y="1812341"/>
+            <a:ext cx="261518" cy="261518"/>
+          </a:xfrm>
+          <a:prstGeom prst="rect">
+            <a:avLst/>
+          </a:prstGeom>
+        </p:spPr>
+      </p:pic>
+      <p:sp>
+        <p:nvSpPr>
+          <p:cNvPr id="7" name="Text 3"/>
+          <p:cNvSpPr txBox="1"/>
+          <p:nvPr/>
+        </p:nvSpPr>
+        <p:spPr>
+          <a:xfrm>
+            <a:off x="8961120" y="1664208"/>
+            <a:ext cx="2560320" cy="411480"/>
+          </a:xfrm>
+          <a:prstGeom prst="rect">
+            <a:avLst/>
+          </a:prstGeom>
+          <a:noFill/>
+          <a:ln/>
+        </p:spPr>
+        <p:txBody>
+          <a:bodyPr wrap="square" lIns="0" tIns="0" rIns="0" bIns="0" rtlCol="0" anchor="t"/>
+          <a:lstStyle/>
+          <a:p>
+            <a:pPr indent="0" marL="0">
+              <a:buNone/>
+            </a:pPr>
+            <a:r>
+              <a:rPr lang="en-US" sz="1800" b="1" dirty="0">
+                <a:solidFill>
+                  <a:schemeClr val="accent1"/>
+                </a:solidFill>
+              </a:rPr>
+              <a:t>SAR 579 a cell</a:t>
+            </a:r>
+            <a:endParaRPr lang="en-US" sz="1800" dirty="0"/>
+          </a:p>
+        </p:txBody>
+      </p:sp>
+      <p:sp>
+        <p:nvSpPr>
+          <p:cNvPr id="8" name="Text 4"/>
+          <p:cNvSpPr txBox="1"/>
+          <p:nvPr/>
+        </p:nvSpPr>
+        <p:spPr>
+          <a:xfrm>
+            <a:off x="8961120" y="2057400"/>
+            <a:ext cx="2514600" cy="731520"/>
+          </a:xfrm>
+          <a:prstGeom prst="rect">
+            <a:avLst/>
+          </a:prstGeom>
+          <a:noFill/>
+          <a:ln/>
+        </p:spPr>
+        <p:txBody>
+          <a:bodyPr wrap="square" lIns="0" tIns="0" rIns="0" bIns="0" rtlCol="0" anchor="t"/>
+          <a:lstStyle/>
+          <a:p>
+            <a:pPr indent="0" marL="0">
+              <a:buNone/>
+            </a:pPr>
+            <a:r>
+              <a:rPr lang="en-US" sz="1200" dirty="0">
+                <a:solidFill>
+                  <a:schemeClr val="tx1"/>
+                </a:solidFill>
+              </a:rPr>
+              <a:t>Protect's whole cost, Jeddah standby included. Two Business S subscribers cover it.</a:t>
+            </a:r>
+            <a:endParaRPr lang="en-US" sz="1200" dirty="0"/>
+          </a:p>
+        </p:txBody>
+      </p:sp>
+      <p:sp>
+        <p:nvSpPr>
+          <p:cNvPr id="9" name="ai insight 2"/>
+          <p:cNvSpPr/>
+          <p:nvPr/>
+        </p:nvSpPr>
+        <p:spPr>
+          <a:xfrm>
+            <a:off x="8046720" y="3017520"/>
+            <a:ext cx="3566160" cy="1371600"/>
+          </a:xfrm>
+          <a:prstGeom prst="roundRect">
+            <a:avLst>
+              <a:gd name="adj" fmla="val 5333"/>
+            </a:avLst>
+          </a:prstGeom>
+          <a:solidFill>
+            <a:schemeClr val="bg2"/>
+          </a:solidFill>
+          <a:ln/>
+        </p:spPr>
+      </p:sp>
+      <p:sp>
+        <p:nvSpPr>
+          <p:cNvPr id="10" name="badge LuLandmark"/>
+          <p:cNvSpPr/>
+          <p:nvPr/>
+        </p:nvSpPr>
+        <p:spPr>
+          <a:xfrm>
+            <a:off x="8275320" y="3246120"/>
+            <a:ext cx="502920" cy="502920"/>
+          </a:xfrm>
+          <a:prstGeom prst="ellipse">
+            <a:avLst/>
+          </a:prstGeom>
+          <a:solidFill>
+            <a:schemeClr val="bg1"/>
+          </a:solidFill>
+          <a:ln/>
+        </p:spPr>
+      </p:sp>
+      <p:pic>
+        <p:nvPicPr>
+          <p:cNvPr id="11" name="icon LuLandmark" descr="preencoded.png">    </p:cNvPr>
+          <p:cNvPicPr>
+            <a:picLocks noChangeAspect="1"/>
+          </p:cNvPicPr>
+          <p:nvPr/>
+        </p:nvPicPr>
+        <p:blipFill>
+          <a:blip r:embed="rId3"/>
+          <a:stretch>
+            <a:fillRect/>
+          </a:stretch>
+        </p:blipFill>
+        <p:spPr>
+          <a:xfrm>
+            <a:off x="8396021" y="3366821"/>
+            <a:ext cx="261518" cy="261518"/>
+          </a:xfrm>
+          <a:prstGeom prst="rect">
+            <a:avLst/>
+          </a:prstGeom>
+        </p:spPr>
+      </p:pic>
+      <p:sp>
+        <p:nvSpPr>
+          <p:cNvPr id="12" name="Text 7"/>
+          <p:cNvSpPr txBox="1"/>
+          <p:nvPr/>
+        </p:nvSpPr>
+        <p:spPr>
+          <a:xfrm>
+            <a:off x="8961120" y="3218688"/>
+            <a:ext cx="2560320" cy="411480"/>
+          </a:xfrm>
+          <a:prstGeom prst="rect">
+            <a:avLst/>
+          </a:prstGeom>
+          <a:noFill/>
+          <a:ln/>
+        </p:spPr>
+        <p:txBody>
+          <a:bodyPr wrap="square" lIns="0" tIns="0" rIns="0" bIns="0" rtlCol="0" anchor="t"/>
+          <a:lstStyle/>
+          <a:p>
+            <a:pPr indent="0" marL="0">
+              <a:buNone/>
+            </a:pPr>
+            <a:r>
+              <a:rPr lang="en-US" sz="1800" b="1" dirty="0">
+                <a:solidFill>
+                  <a:schemeClr val="accent1"/>
+                </a:solidFill>
+              </a:rPr>
+              <a:t>S 57% · M/L 54%</a:t>
+            </a:r>
+            <a:endParaRPr lang="en-US" sz="1800" dirty="0"/>
+          </a:p>
+        </p:txBody>
+      </p:sp>
+      <p:sp>
+        <p:nvSpPr>
+          <p:cNvPr id="13" name="Text 8"/>
+          <p:cNvSpPr txBox="1"/>
+          <p:nvPr/>
+        </p:nvSpPr>
+        <p:spPr>
+          <a:xfrm>
+            <a:off x="8961120" y="3611880"/>
+            <a:ext cx="2514600" cy="731520"/>
+          </a:xfrm>
+          <a:prstGeom prst="rect">
+            <a:avLst/>
+          </a:prstGeom>
+          <a:noFill/>
+          <a:ln/>
+        </p:spPr>
+        <p:txBody>
+          <a:bodyPr wrap="square" lIns="0" tIns="0" rIns="0" bIns="0" rtlCol="0" anchor="t"/>
+          <a:lstStyle/>
+          <a:p>
+            <a:pPr indent="0" marL="0">
+              <a:buNone/>
+            </a:pPr>
+            <a:r>
+              <a:rPr lang="en-US" sz="1200" dirty="0">
+                <a:solidFill>
+                  <a:schemeClr val="tx1"/>
+                </a:solidFill>
+              </a:rPr>
+              <a:t>Enterprise margin with AI. Protect is an add-on on S; on M and L it costs ~5 points.</a:t>
+            </a:r>
+            <a:endParaRPr lang="en-US" sz="1200" dirty="0"/>
+          </a:p>
+        </p:txBody>
+      </p:sp>
+      <p:sp>
+        <p:nvSpPr>
+          <p:cNvPr id="14" name="ai insight 3"/>
+          <p:cNvSpPr/>
+          <p:nvPr/>
+        </p:nvSpPr>
+        <p:spPr>
+          <a:xfrm>
+            <a:off x="8046720" y="4572000"/>
+            <a:ext cx="3566160" cy="1371600"/>
+          </a:xfrm>
+          <a:prstGeom prst="roundRect">
+            <a:avLst>
+              <a:gd name="adj" fmla="val 5333"/>
+            </a:avLst>
+          </a:prstGeom>
+          <a:solidFill>
+            <a:schemeClr val="bg2"/>
+          </a:solidFill>
+          <a:ln/>
+        </p:spPr>
+      </p:sp>
+      <p:sp>
+        <p:nvSpPr>
+          <p:cNvPr id="15" name="badge LuCpu"/>
+          <p:cNvSpPr/>
+          <p:nvPr/>
+        </p:nvSpPr>
+        <p:spPr>
+          <a:xfrm>
+            <a:off x="8275320" y="4800600"/>
+            <a:ext cx="502920" cy="502920"/>
+          </a:xfrm>
+          <a:prstGeom prst="ellipse">
+            <a:avLst/>
+          </a:prstGeom>
+          <a:solidFill>
+            <a:schemeClr val="bg1"/>
+          </a:solidFill>
+          <a:ln/>
+        </p:spPr>
+      </p:sp>
+      <p:pic>
+        <p:nvPicPr>
+          <p:cNvPr id="16" name="icon LuCpu" descr="preencoded.png">    </p:cNvPr>
+          <p:cNvPicPr>
+            <a:picLocks noChangeAspect="1"/>
+          </p:cNvPicPr>
+          <p:nvPr/>
+        </p:nvPicPr>
+        <p:blipFill>
+          <a:blip r:embed="rId4"/>
+          <a:stretch>
+            <a:fillRect/>
+          </a:stretch>
+        </p:blipFill>
+        <p:spPr>
+          <a:xfrm>
+            <a:off x="8396021" y="4921301"/>
+            <a:ext cx="261518" cy="261518"/>
+          </a:xfrm>
+          <a:prstGeom prst="rect">
+            <a:avLst/>
+          </a:prstGeom>
+        </p:spPr>
+      </p:pic>
+      <p:sp>
+        <p:nvSpPr>
+          <p:cNvPr id="17" name="Text 11"/>
+          <p:cNvSpPr txBox="1"/>
+          <p:nvPr/>
+        </p:nvSpPr>
+        <p:spPr>
+          <a:xfrm>
+            <a:off x="8961120" y="4773168"/>
+            <a:ext cx="2560320" cy="411480"/>
+          </a:xfrm>
+          <a:prstGeom prst="rect">
+            <a:avLst/>
+          </a:prstGeom>
+          <a:noFill/>
+          <a:ln/>
+        </p:spPr>
+        <p:txBody>
+          <a:bodyPr wrap="square" lIns="0" tIns="0" rIns="0" bIns="0" rtlCol="0" anchor="t"/>
+          <a:lstStyle/>
+          <a:p>
+            <a:pPr indent="0" marL="0">
+              <a:buNone/>
+            </a:pPr>
+            <a:r>
+              <a:rPr lang="en-US" sz="1800" b="1" dirty="0">
+                <a:solidFill>
+                  <a:schemeClr val="accent1"/>
+                </a:solidFill>
+              </a:rPr>
+              <a:t>20,000 requests</a:t>
+            </a:r>
+            <a:endParaRPr lang="en-US" sz="1800" dirty="0"/>
+          </a:p>
+        </p:txBody>
+      </p:sp>
+      <p:sp>
+        <p:nvSpPr>
+          <p:cNvPr id="18" name="Text 12"/>
+          <p:cNvSpPr txBox="1"/>
+          <p:nvPr/>
+        </p:nvSpPr>
+        <p:spPr>
+          <a:xfrm>
+            <a:off x="8961120" y="5166360"/>
+            <a:ext cx="2514600" cy="731520"/>
+          </a:xfrm>
+          <a:prstGeom prst="rect">
+            <a:avLst/>
+          </a:prstGeom>
+          <a:noFill/>
+          <a:ln/>
+        </p:spPr>
+        <p:txBody>
+          <a:bodyPr wrap="square" lIns="0" tIns="0" rIns="0" bIns="0" rtlCol="0" anchor="t"/>
+          <a:lstStyle/>
+          <a:p>
+            <a:pPr indent="0" marL="0">
+              <a:buNone/>
+            </a:pPr>
+            <a:r>
+              <a:rPr lang="en-US" sz="1200" dirty="0">
+                <a:solidFill>
+                  <a:schemeClr val="tx1"/>
+                </a:solidFill>
+              </a:rPr>
+              <a:t>a month before a self-hosted GPU (SAR 5,507) beats on-demand OCI Generative AI.</a:t>
+            </a:r>
+            <a:endParaRPr lang="en-US" sz="1200" dirty="0"/>
+          </a:p>
+        </p:txBody>
+      </p:sp>
+      <p:sp>
+        <p:nvSpPr>
+          <p:cNvPr id="25" name="Slide Number Placeholder 0"/>
+          <p:cNvSpPr>
+            <a:spLocks noGrp="1"/>
+          </p:cNvSpPr>
+          <p:nvPr>
+            <p:ph type="sldNum" sz="quarter" idx="4294967295"/>
+          </p:nvPr>
+        </p:nvSpPr>
+        <p:spPr>
+          <a:xfrm>
+            <a:off x="11155680" y="6355080"/>
+            <a:ext cx="457200" cy="274320"/>
+          </a:xfrm>
+          <a:prstGeom prst="rect">
+            <a:avLst/>
+          </a:prstGeom>
+          <a:extLst>
+            <a:ext uri="{C572A759-6A51-4108-AA02-DFA0A04FC94B}">
+              <ma14:wrappingTextBoxFlag xmlns:ma14="http://schemas.microsoft.com/office/mac/drawingml/2011/main" val="0"/>
+            </a:ext>
+          </a:extLst>
+        </p:spPr>
+        <p:txBody>
+          <a:bodyPr/>
+          <a:lstStyle>
+            <a:lvl1pPr>
+              <a:defRPr sz="1000">
+                <a:solidFill>
+                  <a:srgbClr val="56645C"/>
+                </a:solidFill>
+              </a:defRPr>
+            </a:lvl1pPr>
+          </a:lstStyle>
+          <a:p>
+            <a:pPr algn="r"/>
+            <a:fld id="{F7021451-1387-4CA6-816F-3879F97B5CBC}" type="slidenum">
+              <a:rPr b="0" lang="en-US"/>
+              <a:t>16</a:t>
+            </a:fld>
+            <a:endParaRPr lang="en-US"/>
+          </a:p>
+        </p:txBody>
+      </p:sp>
+    </p:spTree>
+  </p:cSld>
+  <p:clrMapOvr>
+    <a:masterClrMapping/>
+  </p:clrMapOvr>
+</p:sld>
+</file>
+
+<file path=ppt/slides/slide17.xml><?xml version="1.0" encoding="utf-8"?>
+<p:sld xmlns:a="http://schemas.openxmlformats.org/drawingml/2006/main" xmlns:r="http://schemas.openxmlformats.org/officeDocument/2006/relationships" xmlns:p="http://schemas.openxmlformats.org/presentationml/2006/main">
+  <p:cSld name="Slide 17">
+    <p:spTree>
+      <p:nvGrpSpPr>
+        <p:cNvPr id="1" name=""/>
+        <p:cNvGrpSpPr/>
+        <p:nvPr/>
+      </p:nvGrpSpPr>
+      <p:grpSpPr>
+        <a:xfrm>
+          <a:off x="0" y="0"/>
+          <a:ext cx="0" cy="0"/>
+          <a:chOff x="0" y="0"/>
+          <a:chExt cx="0" cy="0"/>
+        </a:xfrm>
+      </p:grpSpPr>
+      <p:sp>
+        <p:nvSpPr>
+          <p:cNvPr id="2" name="Text 1"/>
+          <p:cNvSpPr/>
+          <p:nvPr>
+            <p:ph idx="101" type="title" hasCustomPrompt="1"/>
+          </p:nvPr>
+        </p:nvSpPr>
+        <p:spPr>
+          <a:xfrm>
+            <a:off x="548640" y="365760"/>
+            <a:ext cx="11064240" cy="822960"/>
+          </a:xfrm>
+          <a:prstGeom prst="rect">
+            <a:avLst/>
+          </a:prstGeom>
+          <a:noFill/>
+          <a:ln/>
+        </p:spPr>
+        <p:txBody>
+          <a:bodyPr wrap="square" lIns="0" tIns="0" rIns="0" bIns="0" rtlCol="0" anchor="ctr"/>
+          <a:lstStyle/>
+          <a:p>
+            <a:pPr algn="l" indent="0" marL="0">
+              <a:buNone/>
+            </a:pPr>
+            <a:r>
+              <a:rPr lang="en-US" sz="3400" b="1" dirty="0">
+                <a:solidFill>
+                  <a:schemeClr val="tx2"/>
+                </a:solidFill>
+              </a:rPr>
+              <a:t>Settle four items before publishing prices</a:t>
+            </a:r>
+            <a:endParaRPr lang="en-US" sz="3400" dirty="0"/>
+          </a:p>
+        </p:txBody>
+      </p:sp>
+      <p:sp>
+        <p:nvSpPr>
+          <p:cNvPr id="3" name="risk 1"/>
+          <p:cNvSpPr/>
+          <p:nvPr/>
+        </p:nvSpPr>
+        <p:spPr>
+          <a:xfrm>
+            <a:off x="548640" y="1463040"/>
+            <a:ext cx="5440680" cy="2148840"/>
+          </a:xfrm>
+          <a:prstGeom prst="roundRect">
+            <a:avLst>
+              <a:gd name="adj" fmla="val 3404"/>
+            </a:avLst>
+          </a:prstGeom>
+          <a:solidFill>
+            <a:schemeClr val="bg2"/>
+          </a:solidFill>
+          <a:ln/>
+        </p:spPr>
+      </p:sp>
+      <p:sp>
+        <p:nvSpPr>
+          <p:cNvPr id="4" name="badge LuDatabase"/>
+          <p:cNvSpPr/>
+          <p:nvPr/>
+        </p:nvSpPr>
+        <p:spPr>
+          <a:xfrm>
+            <a:off x="822960" y="1737360"/>
+            <a:ext cx="548640" cy="548640"/>
+          </a:xfrm>
+          <a:prstGeom prst="ellipse">
+            <a:avLst/>
+          </a:prstGeom>
+          <a:solidFill>
+            <a:schemeClr val="bg1"/>
+          </a:solidFill>
+          <a:ln/>
+        </p:spPr>
+      </p:sp>
+      <p:pic>
+        <p:nvPicPr>
+          <p:cNvPr id="5" name="icon LuDatabase" descr="preencoded.png">    </p:cNvPr>
+          <p:cNvPicPr>
+            <a:picLocks noChangeAspect="1"/>
+          </p:cNvPicPr>
+          <p:nvPr/>
+        </p:nvPicPr>
+        <p:blipFill>
+          <a:blip r:embed="rId1"/>
+          <a:stretch>
+            <a:fillRect/>
+          </a:stretch>
+        </p:blipFill>
+        <p:spPr>
+          <a:xfrm>
+            <a:off x="954634" y="1869034"/>
+            <a:ext cx="285293" cy="285293"/>
+          </a:xfrm>
+          <a:prstGeom prst="rect">
+            <a:avLst/>
+          </a:prstGeom>
+        </p:spPr>
+      </p:pic>
+      <p:sp>
+        <p:nvSpPr>
+          <p:cNvPr id="6" name="Text 3"/>
+          <p:cNvSpPr txBox="1"/>
+          <p:nvPr/>
+        </p:nvSpPr>
+        <p:spPr>
+          <a:xfrm>
+            <a:off x="1554480" y="1810512"/>
+            <a:ext cx="4206240" cy="411480"/>
+          </a:xfrm>
+          <a:prstGeom prst="rect">
+            <a:avLst/>
+          </a:prstGeom>
+          <a:noFill/>
+          <a:ln/>
+        </p:spPr>
+        <p:txBody>
+          <a:bodyPr wrap="square" lIns="0" tIns="0" rIns="0" bIns="0" rtlCol="0" anchor="t"/>
+          <a:lstStyle/>
+          <a:p>
+            <a:pPr indent="0" marL="0">
+              <a:buNone/>
+            </a:pPr>
+            <a:r>
+              <a:rPr lang="en-US" sz="1800" b="1" dirty="0">
+                <a:solidFill>
+                  <a:schemeClr val="tx2"/>
+                </a:solidFill>
+              </a:rPr>
+              <a:t>PostgreSQL pricing</a:t>
+            </a:r>
+            <a:endParaRPr lang="en-US" sz="1800" dirty="0"/>
+          </a:p>
+        </p:txBody>
+      </p:sp>
+      <p:sp>
+        <p:nvSpPr>
+          <p:cNvPr id="7" name="Text 4"/>
+          <p:cNvSpPr txBox="1"/>
+          <p:nvPr/>
+        </p:nvSpPr>
+        <p:spPr>
+          <a:xfrm>
+            <a:off x="822960" y="2423160"/>
+            <a:ext cx="4892040" cy="685800"/>
+          </a:xfrm>
+          <a:prstGeom prst="rect">
+            <a:avLst/>
+          </a:prstGeom>
+          <a:noFill/>
+          <a:ln/>
+        </p:spPr>
+        <p:txBody>
+          <a:bodyPr wrap="square" lIns="0" tIns="0" rIns="0" bIns="0" rtlCol="0" anchor="t"/>
+          <a:lstStyle/>
+          <a:p>
+            <a:pPr indent="0" marL="0">
+              <a:buNone/>
+            </a:pPr>
+            <a:r>
+              <a:rPr lang="en-US" sz="1400" dirty="0">
+                <a:solidFill>
+                  <a:schemeClr val="tx1"/>
+                </a:solidFill>
+              </a:rPr>
+              <a:t>Oracle doesn't publish the memory price or how HA replicas are billed. It is our largest cost line.</a:t>
+            </a:r>
+            <a:endParaRPr lang="en-US" sz="1400" dirty="0"/>
+          </a:p>
+        </p:txBody>
+      </p:sp>
+      <p:sp>
+        <p:nvSpPr>
+          <p:cNvPr id="8" name="Text 5"/>
+          <p:cNvSpPr txBox="1"/>
+          <p:nvPr/>
+        </p:nvSpPr>
+        <p:spPr>
+          <a:xfrm>
+            <a:off x="822960" y="3108960"/>
+            <a:ext cx="4892040" cy="365760"/>
+          </a:xfrm>
+          <a:prstGeom prst="rect">
+            <a:avLst/>
+          </a:prstGeom>
+          <a:noFill/>
+          <a:ln/>
+        </p:spPr>
+        <p:txBody>
+          <a:bodyPr wrap="square" lIns="0" tIns="0" rIns="0" bIns="0" rtlCol="0" anchor="t"/>
+          <a:lstStyle/>
+          <a:p>
+            <a:pPr indent="0" marL="0">
+              <a:buNone/>
+            </a:pPr>
+            <a:r>
+              <a:rPr lang="en-US" sz="1300" b="1" dirty="0">
+                <a:solidFill>
+                  <a:schemeClr val="accent1"/>
+                </a:solidFill>
+              </a:rPr>
+              <a:t>Next: Oracle sales call, cost estimator</a:t>
+            </a:r>
+            <a:endParaRPr lang="en-US" sz="1300" dirty="0"/>
+          </a:p>
+        </p:txBody>
+      </p:sp>
+      <p:sp>
+        <p:nvSpPr>
+          <p:cNvPr id="9" name="risk 2"/>
+          <p:cNvSpPr/>
+          <p:nvPr/>
+        </p:nvSpPr>
+        <p:spPr>
+          <a:xfrm>
+            <a:off x="6172200" y="1463040"/>
+            <a:ext cx="5440680" cy="2148840"/>
+          </a:xfrm>
+          <a:prstGeom prst="roundRect">
+            <a:avLst>
+              <a:gd name="adj" fmla="val 3404"/>
+            </a:avLst>
+          </a:prstGeom>
+          <a:solidFill>
+            <a:schemeClr val="bg2"/>
+          </a:solidFill>
+          <a:ln/>
+        </p:spPr>
+      </p:sp>
+      <p:sp>
+        <p:nvSpPr>
+          <p:cNvPr id="10" name="badge LuReceipt"/>
+          <p:cNvSpPr/>
+          <p:nvPr/>
+        </p:nvSpPr>
+        <p:spPr>
+          <a:xfrm>
+            <a:off x="6446520" y="1737360"/>
+            <a:ext cx="548640" cy="548640"/>
+          </a:xfrm>
+          <a:prstGeom prst="ellipse">
+            <a:avLst/>
+          </a:prstGeom>
+          <a:solidFill>
+            <a:schemeClr val="bg1"/>
+          </a:solidFill>
+          <a:ln/>
+        </p:spPr>
+      </p:sp>
+      <p:pic>
+        <p:nvPicPr>
+          <p:cNvPr id="11" name="icon LuReceipt" descr="preencoded.png">    </p:cNvPr>
+          <p:cNvPicPr>
+            <a:picLocks noChangeAspect="1"/>
+          </p:cNvPicPr>
+          <p:nvPr/>
+        </p:nvPicPr>
+        <p:blipFill>
+          <a:blip r:embed="rId2"/>
+          <a:stretch>
+            <a:fillRect/>
+          </a:stretch>
+        </p:blipFill>
+        <p:spPr>
+          <a:xfrm>
+            <a:off x="6578194" y="1869034"/>
+            <a:ext cx="285293" cy="285293"/>
+          </a:xfrm>
+          <a:prstGeom prst="rect">
+            <a:avLst/>
+          </a:prstGeom>
+        </p:spPr>
+      </p:pic>
+      <p:sp>
+        <p:nvSpPr>
+          <p:cNvPr id="12" name="Text 8"/>
+          <p:cNvSpPr txBox="1"/>
+          <p:nvPr/>
+        </p:nvSpPr>
+        <p:spPr>
+          <a:xfrm>
+            <a:off x="7178040" y="1810512"/>
+            <a:ext cx="4206240" cy="411480"/>
+          </a:xfrm>
+          <a:prstGeom prst="rect">
+            <a:avLst/>
+          </a:prstGeom>
+          <a:noFill/>
+          <a:ln/>
+        </p:spPr>
+        <p:txBody>
+          <a:bodyPr wrap="square" lIns="0" tIns="0" rIns="0" bIns="0" rtlCol="0" anchor="t"/>
+          <a:lstStyle/>
+          <a:p>
+            <a:pPr indent="0" marL="0">
+              <a:buNone/>
+            </a:pPr>
+            <a:r>
+              <a:rPr lang="en-US" sz="1800" b="1" dirty="0">
+                <a:solidFill>
+                  <a:schemeClr val="tx2"/>
+                </a:solidFill>
+              </a:rPr>
+              <a:t>Third-party costs</a:t>
+            </a:r>
+            <a:endParaRPr lang="en-US" sz="1800" dirty="0"/>
+          </a:p>
+        </p:txBody>
+      </p:sp>
+      <p:sp>
+        <p:nvSpPr>
+          <p:cNvPr id="13" name="Text 9"/>
+          <p:cNvSpPr txBox="1"/>
+          <p:nvPr/>
+        </p:nvSpPr>
+        <p:spPr>
+          <a:xfrm>
+            <a:off x="6446520" y="2423160"/>
+            <a:ext cx="4892040" cy="685800"/>
+          </a:xfrm>
+          <a:prstGeom prst="rect">
+            <a:avLst/>
+          </a:prstGeom>
+          <a:noFill/>
+          <a:ln/>
+        </p:spPr>
+        <p:txBody>
+          <a:bodyPr wrap="square" lIns="0" tIns="0" rIns="0" bIns="0" rtlCol="0" anchor="t"/>
+          <a:lstStyle/>
+          <a:p>
+            <a:pPr indent="0" marL="0">
+              <a:buNone/>
+            </a:pPr>
+            <a:r>
+              <a:rPr lang="en-US" sz="1400" dirty="0">
+                <a:solidFill>
+                  <a:schemeClr val="tx1"/>
+                </a:solidFill>
+              </a:rPr>
+              <a:t>SOC partner, pentests, ISO certification and ZATCA provider are placeholders.</a:t>
+            </a:r>
+            <a:endParaRPr lang="en-US" sz="1400" dirty="0"/>
+          </a:p>
+        </p:txBody>
+      </p:sp>
+      <p:sp>
+        <p:nvSpPr>
+          <p:cNvPr id="14" name="Text 10"/>
+          <p:cNvSpPr txBox="1"/>
+          <p:nvPr/>
+        </p:nvSpPr>
+        <p:spPr>
+          <a:xfrm>
+            <a:off x="6446520" y="3108960"/>
+            <a:ext cx="4892040" cy="365760"/>
+          </a:xfrm>
+          <a:prstGeom prst="rect">
+            <a:avLst/>
+          </a:prstGeom>
+          <a:noFill/>
+          <a:ln/>
+        </p:spPr>
+        <p:txBody>
+          <a:bodyPr wrap="square" lIns="0" tIns="0" rIns="0" bIns="0" rtlCol="0" anchor="t"/>
+          <a:lstStyle/>
+          <a:p>
+            <a:pPr indent="0" marL="0">
+              <a:buNone/>
+            </a:pPr>
+            <a:r>
+              <a:rPr lang="en-US" sz="1300" b="1" dirty="0">
+                <a:solidFill>
+                  <a:schemeClr val="accent1"/>
+                </a:solidFill>
+              </a:rPr>
+              <a:t>Next: Get three quotes each</a:t>
+            </a:r>
+            <a:endParaRPr lang="en-US" sz="1300" dirty="0"/>
+          </a:p>
+        </p:txBody>
+      </p:sp>
+      <p:sp>
+        <p:nvSpPr>
+          <p:cNvPr id="15" name="risk 3"/>
+          <p:cNvSpPr/>
+          <p:nvPr/>
+        </p:nvSpPr>
+        <p:spPr>
+          <a:xfrm>
+            <a:off x="548640" y="3840480"/>
+            <a:ext cx="5440680" cy="2148840"/>
+          </a:xfrm>
+          <a:prstGeom prst="roundRect">
+            <a:avLst>
+              <a:gd name="adj" fmla="val 3404"/>
+            </a:avLst>
+          </a:prstGeom>
+          <a:solidFill>
+            <a:schemeClr val="bg2"/>
+          </a:solidFill>
+          <a:ln/>
+        </p:spPr>
+      </p:sp>
+      <p:sp>
+        <p:nvSpPr>
+          <p:cNvPr id="16" name="badge LuGauge"/>
+          <p:cNvSpPr/>
+          <p:nvPr/>
+        </p:nvSpPr>
+        <p:spPr>
+          <a:xfrm>
+            <a:off x="822960" y="4114800"/>
+            <a:ext cx="548640" cy="548640"/>
+          </a:xfrm>
+          <a:prstGeom prst="ellipse">
+            <a:avLst/>
+          </a:prstGeom>
+          <a:solidFill>
+            <a:schemeClr val="bg1"/>
+          </a:solidFill>
+          <a:ln/>
+        </p:spPr>
+      </p:sp>
+      <p:pic>
+        <p:nvPicPr>
+          <p:cNvPr id="17" name="icon LuGauge" descr="preencoded.png">    </p:cNvPr>
+          <p:cNvPicPr>
+            <a:picLocks noChangeAspect="1"/>
+          </p:cNvPicPr>
+          <p:nvPr/>
+        </p:nvPicPr>
+        <p:blipFill>
+          <a:blip r:embed="rId3"/>
+          <a:stretch>
+            <a:fillRect/>
+          </a:stretch>
+        </p:blipFill>
+        <p:spPr>
+          <a:xfrm>
+            <a:off x="954634" y="4246474"/>
+            <a:ext cx="285293" cy="285293"/>
+          </a:xfrm>
+          <a:prstGeom prst="rect">
+            <a:avLst/>
+          </a:prstGeom>
+        </p:spPr>
+      </p:pic>
+      <p:sp>
+        <p:nvSpPr>
+          <p:cNvPr id="18" name="Text 13"/>
+          <p:cNvSpPr txBox="1"/>
+          <p:nvPr/>
+        </p:nvSpPr>
+        <p:spPr>
+          <a:xfrm>
+            <a:off x="1554480" y="4187952"/>
+            <a:ext cx="4206240" cy="411480"/>
+          </a:xfrm>
+          <a:prstGeom prst="rect">
+            <a:avLst/>
+          </a:prstGeom>
+          <a:noFill/>
+          <a:ln/>
+        </p:spPr>
+        <p:txBody>
+          <a:bodyPr wrap="square" lIns="0" tIns="0" rIns="0" bIns="0" rtlCol="0" anchor="t"/>
+          <a:lstStyle/>
+          <a:p>
+            <a:pPr indent="0" marL="0">
+              <a:buNone/>
+            </a:pPr>
+            <a:r>
+              <a:rPr lang="en-US" sz="1800" b="1" dirty="0">
+                <a:solidFill>
+                  <a:schemeClr val="tx2"/>
+                </a:solidFill>
+              </a:rPr>
+              <a:t>Pooled cell capacity</a:t>
+            </a:r>
+            <a:endParaRPr lang="en-US" sz="1800" dirty="0"/>
+          </a:p>
+        </p:txBody>
+      </p:sp>
+      <p:sp>
+        <p:nvSpPr>
+          <p:cNvPr id="19" name="Text 14"/>
+          <p:cNvSpPr txBox="1"/>
+          <p:nvPr/>
+        </p:nvSpPr>
+        <p:spPr>
+          <a:xfrm>
+            <a:off x="822960" y="4800600"/>
+            <a:ext cx="4892040" cy="685800"/>
+          </a:xfrm>
+          <a:prstGeom prst="rect">
+            <a:avLst/>
+          </a:prstGeom>
+          <a:noFill/>
+          <a:ln/>
+        </p:spPr>
+        <p:txBody>
+          <a:bodyPr wrap="square" lIns="0" tIns="0" rIns="0" bIns="0" rtlCol="0" anchor="t"/>
+          <a:lstStyle/>
+          <a:p>
+            <a:pPr indent="0" marL="0">
+              <a:buNone/>
+            </a:pPr>
+            <a:r>
+              <a:rPr lang="en-US" sz="1400" dirty="0">
+                <a:solidFill>
+                  <a:schemeClr val="tx1"/>
+                </a:solidFill>
+              </a:rPr>
+              <a:t>200 Starter realms and 40 Business instances per cell are estimates.</a:t>
+            </a:r>
+            <a:endParaRPr lang="en-US" sz="1400" dirty="0"/>
+          </a:p>
+        </p:txBody>
+      </p:sp>
+      <p:sp>
+        <p:nvSpPr>
+          <p:cNvPr id="20" name="Text 15"/>
+          <p:cNvSpPr txBox="1"/>
+          <p:nvPr/>
+        </p:nvSpPr>
+        <p:spPr>
+          <a:xfrm>
+            <a:off x="822960" y="5486400"/>
+            <a:ext cx="4892040" cy="365760"/>
+          </a:xfrm>
+          <a:prstGeom prst="rect">
+            <a:avLst/>
+          </a:prstGeom>
+          <a:noFill/>
+          <a:ln/>
+        </p:spPr>
+        <p:txBody>
+          <a:bodyPr wrap="square" lIns="0" tIns="0" rIns="0" bIns="0" rtlCol="0" anchor="t"/>
+          <a:lstStyle/>
+          <a:p>
+            <a:pPr indent="0" marL="0">
+              <a:buNone/>
+            </a:pPr>
+            <a:r>
+              <a:rPr lang="en-US" sz="1300" b="1" dirty="0">
+                <a:solidFill>
+                  <a:schemeClr val="accent1"/>
+                </a:solidFill>
+              </a:rPr>
+              <a:t>Next: Load tests on Keycloak</a:t>
+            </a:r>
+            <a:endParaRPr lang="en-US" sz="1300" dirty="0"/>
+          </a:p>
+        </p:txBody>
+      </p:sp>
+      <p:sp>
+        <p:nvSpPr>
+          <p:cNvPr id="21" name="risk 4"/>
+          <p:cNvSpPr/>
+          <p:nvPr/>
+        </p:nvSpPr>
+        <p:spPr>
+          <a:xfrm>
+            <a:off x="6172200" y="3840480"/>
+            <a:ext cx="5440680" cy="2148840"/>
+          </a:xfrm>
+          <a:prstGeom prst="roundRect">
+            <a:avLst>
+              <a:gd name="adj" fmla="val 3404"/>
+            </a:avLst>
+          </a:prstGeom>
+          <a:solidFill>
+            <a:schemeClr val="bg2"/>
+          </a:solidFill>
+          <a:ln/>
+        </p:spPr>
+      </p:sp>
+      <p:sp>
+        <p:nvSpPr>
+          <p:cNvPr id="22" name="badge LuTriangleAlert"/>
+          <p:cNvSpPr/>
+          <p:nvPr/>
+        </p:nvSpPr>
+        <p:spPr>
+          <a:xfrm>
+            <a:off x="6446520" y="4114800"/>
+            <a:ext cx="548640" cy="548640"/>
+          </a:xfrm>
+          <a:prstGeom prst="ellipse">
+            <a:avLst/>
+          </a:prstGeom>
+          <a:solidFill>
+            <a:schemeClr val="accent1"/>
+          </a:solidFill>
+          <a:ln/>
+        </p:spPr>
+      </p:sp>
+      <p:pic>
+        <p:nvPicPr>
+          <p:cNvPr id="23" name="icon LuTriangleAlert" descr="preencoded.png">    </p:cNvPr>
+          <p:cNvPicPr>
+            <a:picLocks noChangeAspect="1"/>
+          </p:cNvPicPr>
+          <p:nvPr/>
+        </p:nvPicPr>
+        <p:blipFill>
+          <a:blip r:embed="rId4"/>
+          <a:stretch>
+            <a:fillRect/>
+          </a:stretch>
+        </p:blipFill>
+        <p:spPr>
+          <a:xfrm>
+            <a:off x="6578194" y="4246474"/>
+            <a:ext cx="285293" cy="285293"/>
+          </a:xfrm>
+          <a:prstGeom prst="rect">
+            <a:avLst/>
+          </a:prstGeom>
+        </p:spPr>
+      </p:pic>
+      <p:sp>
+        <p:nvSpPr>
+          <p:cNvPr id="24" name="Text 18"/>
+          <p:cNvSpPr txBox="1"/>
+          <p:nvPr/>
+        </p:nvSpPr>
+        <p:spPr>
+          <a:xfrm>
+            <a:off x="7178040" y="4187952"/>
+            <a:ext cx="4206240" cy="411480"/>
+          </a:xfrm>
+          <a:prstGeom prst="rect">
+            <a:avLst/>
+          </a:prstGeom>
+          <a:noFill/>
+          <a:ln/>
+        </p:spPr>
+        <p:txBody>
+          <a:bodyPr wrap="square" lIns="0" tIns="0" rIns="0" bIns="0" rtlCol="0" anchor="t"/>
+          <a:lstStyle/>
+          <a:p>
+            <a:pPr indent="0" marL="0">
+              <a:buNone/>
+            </a:pPr>
+            <a:r>
+              <a:rPr lang="en-US" sz="1800" b="1" dirty="0">
+                <a:solidFill>
+                  <a:schemeClr val="tx2"/>
+                </a:solidFill>
+              </a:rPr>
+              <a:t>Brand name</a:t>
+            </a:r>
+            <a:endParaRPr lang="en-US" sz="1800" dirty="0"/>
+          </a:p>
+        </p:txBody>
+      </p:sp>
+      <p:sp>
+        <p:nvSpPr>
+          <p:cNvPr id="25" name="Text 19"/>
+          <p:cNvSpPr txBox="1"/>
+          <p:nvPr/>
+        </p:nvSpPr>
+        <p:spPr>
+          <a:xfrm>
+            <a:off x="6446520" y="4800600"/>
+            <a:ext cx="4892040" cy="685800"/>
+          </a:xfrm>
+          <a:prstGeom prst="rect">
+            <a:avLst/>
+          </a:prstGeom>
+          <a:noFill/>
+          <a:ln/>
+        </p:spPr>
+        <p:txBody>
+          <a:bodyPr wrap="square" lIns="0" tIns="0" rIns="0" bIns="0" rtlCol="0" anchor="t"/>
+          <a:lstStyle/>
+          <a:p>
+            <a:pPr indent="0" marL="0">
+              <a:buNone/>
+            </a:pPr>
+            <a:r>
+              <a:rPr lang="en-US" sz="1400" dirty="0">
+                <a:solidFill>
+                  <a:schemeClr val="tx1"/>
+                </a:solidFill>
+              </a:rPr>
+              <a:t>zimam.com, .sa, .io, .ai and .dev are taken; zimam.dev is an AI agent governance product.</a:t>
+            </a:r>
+            <a:endParaRPr lang="en-US" sz="1400" dirty="0"/>
+          </a:p>
+        </p:txBody>
+      </p:sp>
+      <p:sp>
+        <p:nvSpPr>
+          <p:cNvPr id="26" name="Text 20"/>
+          <p:cNvSpPr txBox="1"/>
+          <p:nvPr/>
+        </p:nvSpPr>
+        <p:spPr>
+          <a:xfrm>
+            <a:off x="6446520" y="5486400"/>
+            <a:ext cx="4892040" cy="365760"/>
+          </a:xfrm>
+          <a:prstGeom prst="rect">
+            <a:avLst/>
+          </a:prstGeom>
+          <a:noFill/>
+          <a:ln/>
+        </p:spPr>
+        <p:txBody>
+          <a:bodyPr wrap="square" lIns="0" tIns="0" rIns="0" bIns="0" rtlCol="0" anchor="t"/>
+          <a:lstStyle/>
+          <a:p>
+            <a:pPr indent="0" marL="0">
+              <a:buNone/>
+            </a:pPr>
+            <a:r>
+              <a:rPr lang="en-US" sz="1300" b="1" dirty="0">
+                <a:solidFill>
+                  <a:schemeClr val="accent1"/>
+                </a:solidFill>
+              </a:rPr>
+              <a:t>Next: SAIP trademark search; zimamid.com and .sa are free</a:t>
+            </a:r>
+            <a:endParaRPr lang="en-US" sz="1300" dirty="0"/>
+          </a:p>
+        </p:txBody>
+      </p:sp>
+      <p:sp>
+        <p:nvSpPr>
+          <p:cNvPr id="25" name="Slide Number Placeholder 0"/>
+          <p:cNvSpPr>
+            <a:spLocks noGrp="1"/>
+          </p:cNvSpPr>
+          <p:nvPr>
+            <p:ph type="sldNum" sz="quarter" idx="4294967295"/>
+          </p:nvPr>
+        </p:nvSpPr>
+        <p:spPr>
+          <a:xfrm>
+            <a:off x="11155680" y="6355080"/>
+            <a:ext cx="457200" cy="274320"/>
+          </a:xfrm>
+          <a:prstGeom prst="rect">
+            <a:avLst/>
+          </a:prstGeom>
+          <a:extLst>
+            <a:ext uri="{C572A759-6A51-4108-AA02-DFA0A04FC94B}">
+              <ma14:wrappingTextBoxFlag xmlns:ma14="http://schemas.microsoft.com/office/mac/drawingml/2011/main" val="0"/>
+            </a:ext>
+          </a:extLst>
+        </p:spPr>
+        <p:txBody>
+          <a:bodyPr/>
+          <a:lstStyle>
+            <a:lvl1pPr>
+              <a:defRPr sz="1000">
+                <a:solidFill>
+                  <a:srgbClr val="56645C"/>
+                </a:solidFill>
+              </a:defRPr>
+            </a:lvl1pPr>
+          </a:lstStyle>
+          <a:p>
+            <a:pPr algn="r"/>
+            <a:fld id="{F7021451-1387-4CA6-816F-3879F97B5CBC}" type="slidenum">
+              <a:rPr b="0" lang="en-US"/>
+              <a:t>17</a:t>
+            </a:fld>
+            <a:endParaRPr lang="en-US"/>
+          </a:p>
+        </p:txBody>
+      </p:sp>
+    </p:spTree>
+  </p:cSld>
+  <p:clrMapOvr>
+    <a:masterClrMapping/>
+  </p:clrMapOvr>
+</p:sld>
+</file>
+
+<file path=ppt/slides/slide18.xml><?xml version="1.0" encoding="utf-8"?>
+<p:sld xmlns:a="http://schemas.openxmlformats.org/drawingml/2006/main" xmlns:r="http://schemas.openxmlformats.org/officeDocument/2006/relationships" xmlns:p="http://schemas.openxmlformats.org/presentationml/2006/main">
+  <p:cSld name="Slide 18">
     <p:spTree>
       <p:nvGrpSpPr>
         <p:cNvPr id="1" name=""/>
